--- a/Alur_Sistem_Aplikasi_Kredit_Interaktif.pptx
+++ b/Alur_Sistem_Aplikasi_Kredit_Interaktif.pptx
@@ -1,18 +1,21 @@
 
 <file path=ppt/presentation.xml><?xml version="1.0" encoding="utf-8"?>
-<p:presentation xmlns:a="http://schemas.openxmlformats.org/drawingml/2006/main" xmlns:r="http://schemas.openxmlformats.org/officeDocument/2006/relationships" xmlns:p="http://schemas.openxmlformats.org/presentationml/2006/main" saveSubsetFonts="1" autoCompressPictures="0">
+<p:presentation xmlns:a="http://schemas.openxmlformats.org/drawingml/2006/main" xmlns:r="http://schemas.openxmlformats.org/officeDocument/2006/relationships" xmlns:p="http://schemas.openxmlformats.org/presentationml/2006/main" xmlns:m="http://schemas.openxmlformats.org/officeDocument/2006/math" xmlns:w="http://schemas.openxmlformats.org/wordprocessingml/2006/main" autoCompressPictures="0" saveSubsetFonts="1">
   <p:sldMasterIdLst>
     <p:sldMasterId id="2147483648" r:id="rId1"/>
   </p:sldMasterIdLst>
+  <p:notesMasterIdLst>
+    <p:notesMasterId r:id="rId12"/>
+  </p:notesMasterIdLst>
   <p:sldIdLst>
-    <p:sldId id="256" r:id="rId7"/>
-    <p:sldId id="257" r:id="rId8"/>
-    <p:sldId id="258" r:id="rId9"/>
-    <p:sldId id="259" r:id="rId10"/>
-    <p:sldId id="260" r:id="rId11"/>
-    <p:sldId id="261" r:id="rId12"/>
-    <p:sldId id="262" r:id="rId13"/>
-    <p:sldId id="263" r:id="rId14"/>
+    <p:sldId id="256" r:id="rId4"/>
+    <p:sldId id="257" r:id="rId5"/>
+    <p:sldId id="258" r:id="rId6"/>
+    <p:sldId id="259" r:id="rId7"/>
+    <p:sldId id="260" r:id="rId8"/>
+    <p:sldId id="261" r:id="rId9"/>
+    <p:sldId id="262" r:id="rId10"/>
+    <p:sldId id="263" r:id="rId11"/>
   </p:sldIdLst>
   <p:sldSz cx="9144000" cy="6858000" type="screen4x3"/>
   <p:notesSz cx="6858000" cy="9144000"/>
@@ -20,8 +23,8 @@
     <a:defPPr>
       <a:defRPr lang="en-US"/>
     </a:defPPr>
-    <a:lvl1pPr marL="0" algn="l" defTabSz="457200" rtl="0" eaLnBrk="1" latinLnBrk="0" hangingPunct="1">
-      <a:defRPr sz="1800" kern="1200">
+    <a:lvl1pPr marL="0" algn="l" defTabSz="457200" rtl="0">
+      <a:defRPr sz="1800">
         <a:solidFill>
           <a:schemeClr val="tx1"/>
         </a:solidFill>
@@ -30,8 +33,8 @@
         <a:cs typeface="+mn-cs"/>
       </a:defRPr>
     </a:lvl1pPr>
-    <a:lvl2pPr marL="457200" algn="l" defTabSz="457200" rtl="0" eaLnBrk="1" latinLnBrk="0" hangingPunct="1">
-      <a:defRPr sz="1800" kern="1200">
+    <a:lvl2pPr marL="457200" algn="l" defTabSz="457200" rtl="0">
+      <a:defRPr sz="1800">
         <a:solidFill>
           <a:schemeClr val="tx1"/>
         </a:solidFill>
@@ -40,8 +43,8 @@
         <a:cs typeface="+mn-cs"/>
       </a:defRPr>
     </a:lvl2pPr>
-    <a:lvl3pPr marL="914400" algn="l" defTabSz="457200" rtl="0" eaLnBrk="1" latinLnBrk="0" hangingPunct="1">
-      <a:defRPr sz="1800" kern="1200">
+    <a:lvl3pPr marL="914400" algn="l" defTabSz="457200" rtl="0">
+      <a:defRPr sz="1800">
         <a:solidFill>
           <a:schemeClr val="tx1"/>
         </a:solidFill>
@@ -50,8 +53,8 @@
         <a:cs typeface="+mn-cs"/>
       </a:defRPr>
     </a:lvl3pPr>
-    <a:lvl4pPr marL="1371600" algn="l" defTabSz="457200" rtl="0" eaLnBrk="1" latinLnBrk="0" hangingPunct="1">
-      <a:defRPr sz="1800" kern="1200">
+    <a:lvl4pPr marL="1371600" algn="l" defTabSz="457200" rtl="0">
+      <a:defRPr sz="1800">
         <a:solidFill>
           <a:schemeClr val="tx1"/>
         </a:solidFill>
@@ -60,8 +63,8 @@
         <a:cs typeface="+mn-cs"/>
       </a:defRPr>
     </a:lvl4pPr>
-    <a:lvl5pPr marL="1828800" algn="l" defTabSz="457200" rtl="0" eaLnBrk="1" latinLnBrk="0" hangingPunct="1">
-      <a:defRPr sz="1800" kern="1200">
+    <a:lvl5pPr marL="1828800" algn="l" defTabSz="457200" rtl="0">
+      <a:defRPr sz="1800">
         <a:solidFill>
           <a:schemeClr val="tx1"/>
         </a:solidFill>
@@ -70,8 +73,8 @@
         <a:cs typeface="+mn-cs"/>
       </a:defRPr>
     </a:lvl5pPr>
-    <a:lvl6pPr marL="2286000" algn="l" defTabSz="457200" rtl="0" eaLnBrk="1" latinLnBrk="0" hangingPunct="1">
-      <a:defRPr sz="1800" kern="1200">
+    <a:lvl6pPr marL="2286000" algn="l" defTabSz="457200" rtl="0">
+      <a:defRPr sz="1800">
         <a:solidFill>
           <a:schemeClr val="tx1"/>
         </a:solidFill>
@@ -80,8 +83,8 @@
         <a:cs typeface="+mn-cs"/>
       </a:defRPr>
     </a:lvl6pPr>
-    <a:lvl7pPr marL="2743200" algn="l" defTabSz="457200" rtl="0" eaLnBrk="1" latinLnBrk="0" hangingPunct="1">
-      <a:defRPr sz="1800" kern="1200">
+    <a:lvl7pPr marL="2743200" algn="l" defTabSz="457200" rtl="0">
+      <a:defRPr sz="1800">
         <a:solidFill>
           <a:schemeClr val="tx1"/>
         </a:solidFill>
@@ -90,8 +93,8 @@
         <a:cs typeface="+mn-cs"/>
       </a:defRPr>
     </a:lvl7pPr>
-    <a:lvl8pPr marL="3200400" algn="l" defTabSz="457200" rtl="0" eaLnBrk="1" latinLnBrk="0" hangingPunct="1">
-      <a:defRPr sz="1800" kern="1200">
+    <a:lvl8pPr marL="3200400" algn="l" defTabSz="457200" rtl="0">
+      <a:defRPr sz="1800">
         <a:solidFill>
           <a:schemeClr val="tx1"/>
         </a:solidFill>
@@ -100,8 +103,8 @@
         <a:cs typeface="+mn-cs"/>
       </a:defRPr>
     </a:lvl8pPr>
-    <a:lvl9pPr marL="3657600" algn="l" defTabSz="457200" rtl="0" eaLnBrk="1" latinLnBrk="0" hangingPunct="1">
-      <a:defRPr sz="1800" kern="1200">
+    <a:lvl9pPr marL="3657600" algn="l" defTabSz="457200" rtl="0">
+      <a:defRPr sz="1800">
         <a:solidFill>
           <a:schemeClr val="tx1"/>
         </a:solidFill>
@@ -114,8 +117,1008 @@
 </p:presentation>
 </file>
 
+<file path=ppt/notesMasters/notesMaster1.xml><?xml version="1.0" encoding="utf-8"?>
+<p:notesMaster xmlns:a="http://schemas.openxmlformats.org/drawingml/2006/main" xmlns:r="http://schemas.openxmlformats.org/officeDocument/2006/relationships" xmlns:p="http://schemas.openxmlformats.org/presentationml/2006/main">
+  <p:cSld name="">
+    <p:bg>
+      <p:bgRef idx="1001">
+        <a:schemeClr val="bg1"/>
+      </p:bgRef>
+    </p:bg>
+    <p:spTree>
+      <p:nvGrpSpPr>
+        <p:cNvPr id="1" name=""/>
+        <p:cNvGrpSpPr/>
+        <p:nvPr/>
+      </p:nvGrpSpPr>
+      <p:grpSpPr bwMode="auto">
+        <a:xfrm>
+          <a:off x="0" y="0"/>
+          <a:ext cx="0" cy="0"/>
+          <a:chOff x="0" y="0"/>
+          <a:chExt cx="0" cy="0"/>
+        </a:xfrm>
+      </p:grpSpPr>
+      <p:sp>
+        <p:nvSpPr>
+          <p:cNvPr id="2" name="Header Placeholder 1"/>
+          <p:cNvSpPr>
+            <a:spLocks noGrp="1"/>
+          </p:cNvSpPr>
+          <p:nvPr>
+            <p:ph type="hdr" sz="quarter"/>
+          </p:nvPr>
+        </p:nvSpPr>
+        <p:spPr bwMode="auto">
+          <a:xfrm>
+            <a:off x="0" y="0"/>
+            <a:ext cx="2971800" cy="458788"/>
+          </a:xfrm>
+          <a:prstGeom prst="rect">
+            <a:avLst/>
+          </a:prstGeom>
+        </p:spPr>
+        <p:txBody>
+          <a:bodyPr vert="horz" lIns="91440" tIns="45720" rIns="91440" bIns="45720" rtlCol="0" anchor="ctr"/>
+          <a:lstStyle>
+            <a:lvl1pPr algn="l">
+              <a:defRPr sz="1200"/>
+            </a:lvl1pPr>
+          </a:lstStyle>
+          <a:p>
+            <a:pPr>
+              <a:defRPr/>
+            </a:pPr>
+            <a:endParaRPr/>
+          </a:p>
+        </p:txBody>
+      </p:sp>
+      <p:sp>
+        <p:nvSpPr>
+          <p:cNvPr id="3" name="Date Placeholder 2"/>
+          <p:cNvSpPr>
+            <a:spLocks noGrp="1"/>
+          </p:cNvSpPr>
+          <p:nvPr>
+            <p:ph type="dt" idx="2"/>
+          </p:nvPr>
+        </p:nvSpPr>
+        <p:spPr bwMode="auto">
+          <a:xfrm>
+            <a:off x="3884613" y="0"/>
+            <a:ext cx="2971800" cy="458788"/>
+          </a:xfrm>
+          <a:prstGeom prst="rect">
+            <a:avLst/>
+          </a:prstGeom>
+        </p:spPr>
+        <p:txBody>
+          <a:bodyPr vert="horz" lIns="91440" tIns="45720" rIns="91440" bIns="45720" rtlCol="0" anchor="ctr"/>
+          <a:lstStyle>
+            <a:lvl1pPr algn="r">
+              <a:defRPr sz="1200"/>
+            </a:lvl1pPr>
+          </a:lstStyle>
+          <a:p>
+            <a:pPr>
+              <a:defRPr/>
+            </a:pPr>
+            <a:endParaRPr/>
+          </a:p>
+        </p:txBody>
+      </p:sp>
+      <p:sp>
+        <p:nvSpPr>
+          <p:cNvPr id="3" name="Date Placeholder 2"/>
+          <p:cNvSpPr>
+            <a:spLocks noGrp="1"/>
+          </p:cNvSpPr>
+          <p:nvPr>
+            <p:ph type="dt" idx="3"/>
+          </p:nvPr>
+        </p:nvSpPr>
+        <p:spPr bwMode="auto">
+          <a:xfrm>
+            <a:off x="3884613" y="0"/>
+            <a:ext cx="2971800" cy="458788"/>
+          </a:xfrm>
+          <a:prstGeom prst="rect">
+            <a:avLst/>
+          </a:prstGeom>
+        </p:spPr>
+        <p:txBody>
+          <a:bodyPr vert="horz" lIns="91440" tIns="45720" rIns="91440" bIns="45720" rtlCol="0" anchor="ctr"/>
+          <a:lstStyle>
+            <a:lvl1pPr algn="r">
+              <a:defRPr sz="1200"/>
+            </a:lvl1pPr>
+          </a:lstStyle>
+          <a:p>
+            <a:pPr>
+              <a:defRPr/>
+            </a:pPr>
+            <a:endParaRPr/>
+          </a:p>
+        </p:txBody>
+      </p:sp>
+      <p:sp>
+        <p:nvSpPr>
+          <p:cNvPr id="5" name="Notes Placeholder 4"/>
+          <p:cNvSpPr>
+            <a:spLocks noGrp="1"/>
+          </p:cNvSpPr>
+          <p:nvPr>
+            <p:ph type="body" sz="quarter" idx="1"/>
+          </p:nvPr>
+        </p:nvSpPr>
+        <p:spPr bwMode="auto">
+          <a:xfrm>
+            <a:off x="685800" y="4400550"/>
+            <a:ext cx="5486400" cy="3600450"/>
+          </a:xfrm>
+          <a:prstGeom prst="rect">
+            <a:avLst/>
+          </a:prstGeom>
+        </p:spPr>
+        <p:txBody>
+          <a:bodyPr vert="horz" lIns="91440" tIns="45720" rIns="91440" bIns="45720" rtlCol="0" anchor="ctr"/>
+          <a:lstStyle/>
+          <a:p>
+            <a:pPr>
+              <a:defRPr/>
+            </a:pPr>
+            <a:endParaRPr/>
+          </a:p>
+        </p:txBody>
+      </p:sp>
+      <p:sp>
+        <p:nvSpPr>
+          <p:cNvPr id="6" name="Footer Placeholder 5"/>
+          <p:cNvSpPr>
+            <a:spLocks noGrp="1"/>
+          </p:cNvSpPr>
+          <p:nvPr>
+            <p:ph type="ftr" sz="quarter" idx="4"/>
+          </p:nvPr>
+        </p:nvSpPr>
+        <p:spPr bwMode="auto">
+          <a:xfrm>
+            <a:off x="0" y="8685213"/>
+            <a:ext cx="2971800" cy="458787"/>
+          </a:xfrm>
+          <a:prstGeom prst="rect">
+            <a:avLst/>
+          </a:prstGeom>
+        </p:spPr>
+        <p:txBody>
+          <a:bodyPr vert="horz" lIns="91440" tIns="45720" rIns="91440" bIns="45720" rtlCol="0" anchor="b"/>
+          <a:lstStyle>
+            <a:lvl1pPr algn="l">
+              <a:defRPr sz="1200"/>
+            </a:lvl1pPr>
+          </a:lstStyle>
+          <a:p>
+            <a:pPr>
+              <a:defRPr/>
+            </a:pPr>
+            <a:endParaRPr/>
+          </a:p>
+        </p:txBody>
+      </p:sp>
+      <p:sp>
+        <p:nvSpPr>
+          <p:cNvPr id="7" name="Slide Number Placeholder 6"/>
+          <p:cNvSpPr>
+            <a:spLocks noGrp="1"/>
+          </p:cNvSpPr>
+          <p:nvPr>
+            <p:ph type="sldNum" sz="quarter" idx="10"/>
+          </p:nvPr>
+        </p:nvSpPr>
+        <p:spPr bwMode="auto">
+          <a:xfrm>
+            <a:off x="3884613" y="8685213"/>
+            <a:ext cx="2971800" cy="458787"/>
+          </a:xfrm>
+          <a:prstGeom prst="rect">
+            <a:avLst/>
+          </a:prstGeom>
+        </p:spPr>
+        <p:txBody>
+          <a:bodyPr vert="horz" lIns="91440" tIns="45720" rIns="91440" bIns="45720" rtlCol="0" anchor="b"/>
+          <a:lstStyle>
+            <a:lvl1pPr algn="r">
+              <a:defRPr sz="1200"/>
+            </a:lvl1pPr>
+          </a:lstStyle>
+          <a:p>
+            <a:pPr>
+              <a:defRPr/>
+            </a:pPr>
+            <a:endParaRPr/>
+          </a:p>
+        </p:txBody>
+      </p:sp>
+    </p:spTree>
+  </p:cSld>
+  <p:clrMap bg1="lt1" tx1="dk1" bg2="lt2" tx2="dk2" accent1="accent1" accent2="accent2" accent3="accent3" accent4="accent4" accent5="accent5" accent6="accent6" hlink="hlink" folHlink="folHlink"/>
+  <p:notesStyle>
+    <a:lvl1pPr marL="0" algn="l" defTabSz="914400">
+      <a:defRPr sz="1200">
+        <a:solidFill>
+          <a:schemeClr val="tx1"/>
+        </a:solidFill>
+        <a:latin typeface="+mn-lt"/>
+        <a:ea typeface="+mn-ea"/>
+        <a:cs typeface="+mn-cs"/>
+      </a:defRPr>
+    </a:lvl1pPr>
+    <a:lvl2pPr marL="457200" algn="l" defTabSz="914400">
+      <a:defRPr sz="1200">
+        <a:solidFill>
+          <a:schemeClr val="tx1"/>
+        </a:solidFill>
+        <a:latin typeface="+mn-lt"/>
+        <a:ea typeface="+mn-ea"/>
+        <a:cs typeface="+mn-cs"/>
+      </a:defRPr>
+    </a:lvl2pPr>
+    <a:lvl3pPr marL="914400" algn="l" defTabSz="914400">
+      <a:defRPr sz="1200">
+        <a:solidFill>
+          <a:schemeClr val="tx1"/>
+        </a:solidFill>
+        <a:latin typeface="+mn-lt"/>
+        <a:ea typeface="+mn-ea"/>
+        <a:cs typeface="+mn-cs"/>
+      </a:defRPr>
+    </a:lvl3pPr>
+    <a:lvl4pPr marL="1371600" algn="l" defTabSz="914400">
+      <a:defRPr sz="1200">
+        <a:solidFill>
+          <a:schemeClr val="tx1"/>
+        </a:solidFill>
+        <a:latin typeface="+mn-lt"/>
+        <a:ea typeface="+mn-ea"/>
+        <a:cs typeface="+mn-cs"/>
+      </a:defRPr>
+    </a:lvl4pPr>
+    <a:lvl5pPr marL="1828800" algn="l" defTabSz="914400">
+      <a:defRPr sz="1200">
+        <a:solidFill>
+          <a:schemeClr val="tx1"/>
+        </a:solidFill>
+        <a:latin typeface="+mn-lt"/>
+        <a:ea typeface="+mn-ea"/>
+        <a:cs typeface="+mn-cs"/>
+      </a:defRPr>
+    </a:lvl5pPr>
+    <a:lvl6pPr marL="2286000" algn="l" defTabSz="914400">
+      <a:defRPr sz="1200">
+        <a:solidFill>
+          <a:schemeClr val="tx1"/>
+        </a:solidFill>
+        <a:latin typeface="+mn-lt"/>
+        <a:ea typeface="+mn-ea"/>
+        <a:cs typeface="+mn-cs"/>
+      </a:defRPr>
+    </a:lvl6pPr>
+    <a:lvl7pPr marL="2743200" algn="l" defTabSz="914400">
+      <a:defRPr sz="1200">
+        <a:solidFill>
+          <a:schemeClr val="tx1"/>
+        </a:solidFill>
+        <a:latin typeface="+mn-lt"/>
+        <a:ea typeface="+mn-ea"/>
+        <a:cs typeface="+mn-cs"/>
+      </a:defRPr>
+    </a:lvl7pPr>
+    <a:lvl8pPr marL="3200400" algn="l" defTabSz="914400">
+      <a:defRPr sz="1200">
+        <a:solidFill>
+          <a:schemeClr val="tx1"/>
+        </a:solidFill>
+        <a:latin typeface="+mn-lt"/>
+        <a:ea typeface="+mn-ea"/>
+        <a:cs typeface="+mn-cs"/>
+      </a:defRPr>
+    </a:lvl8pPr>
+    <a:lvl9pPr marL="3657600" algn="l" defTabSz="914400">
+      <a:defRPr sz="1200">
+        <a:solidFill>
+          <a:schemeClr val="tx1"/>
+        </a:solidFill>
+        <a:latin typeface="+mn-lt"/>
+        <a:ea typeface="+mn-ea"/>
+        <a:cs typeface="+mn-cs"/>
+      </a:defRPr>
+    </a:lvl9pPr>
+  </p:notesStyle>
+</p:notesMaster>
+</file>
+
+<file path=ppt/notesSlides/notesSlide1.xml><?xml version="1.0" encoding="utf-8"?>
+<p:notes xmlns:a="http://schemas.openxmlformats.org/drawingml/2006/main" xmlns:r="http://schemas.openxmlformats.org/officeDocument/2006/relationships" xmlns:p="http://schemas.openxmlformats.org/presentationml/2006/main" xmlns:m="http://schemas.openxmlformats.org/officeDocument/2006/math" xmlns:w="http://schemas.openxmlformats.org/wordprocessingml/2006/main">
+  <p:cSld name="">
+    <p:spTree>
+      <p:nvGrpSpPr>
+        <p:cNvPr id="1" name=""/>
+        <p:cNvGrpSpPr/>
+        <p:nvPr/>
+      </p:nvGrpSpPr>
+      <p:grpSpPr bwMode="auto">
+        <a:xfrm>
+          <a:off x="0" y="0"/>
+          <a:ext cx="0" cy="0"/>
+          <a:chOff x="0" y="0"/>
+          <a:chExt cx="0" cy="0"/>
+        </a:xfrm>
+      </p:grpSpPr>
+      <p:sp>
+        <p:nvSpPr>
+          <p:cNvPr id="2" name="Slide Image Placeholder 1"/>
+          <p:cNvSpPr>
+            <a:spLocks noChangeAspect="1" noGrp="1" noRot="1"/>
+          </p:cNvSpPr>
+          <p:nvPr>
+            <p:ph type="sldImg"/>
+          </p:nvPr>
+        </p:nvSpPr>
+        <p:spPr bwMode="auto"/>
+      </p:sp>
+      <p:sp>
+        <p:nvSpPr>
+          <p:cNvPr id="3" name="Notes Placeholder 2"/>
+          <p:cNvSpPr>
+            <a:spLocks noGrp="1"/>
+          </p:cNvSpPr>
+          <p:nvPr>
+            <p:ph type="body" idx="1"/>
+          </p:nvPr>
+        </p:nvSpPr>
+        <p:spPr bwMode="auto"/>
+        <p:txBody>
+          <a:bodyPr/>
+          <a:lstStyle/>
+          <a:p>
+            <a:pPr>
+              <a:defRPr/>
+            </a:pPr>
+            <a:endParaRPr/>
+          </a:p>
+        </p:txBody>
+      </p:sp>
+      <p:sp>
+        <p:nvSpPr>
+          <p:cNvPr id="4" name="Slide Number Placeholder 3"/>
+          <p:cNvSpPr>
+            <a:spLocks noGrp="1"/>
+          </p:cNvSpPr>
+          <p:nvPr>
+            <p:ph type="sldNum" sz="quarter" idx="10"/>
+          </p:nvPr>
+        </p:nvSpPr>
+        <p:spPr bwMode="auto"/>
+        <p:txBody>
+          <a:bodyPr/>
+          <a:lstStyle/>
+          <a:p>
+            <a:pPr>
+              <a:defRPr/>
+            </a:pPr>
+            <a:fld id="{B77E9482-B9B1-6854-E6C8-AA1161F98A6F}" type="slidenum">
+              <a:rPr/>
+              <a:t/>
+            </a:fld>
+            <a:endParaRPr/>
+          </a:p>
+        </p:txBody>
+      </p:sp>
+    </p:spTree>
+  </p:cSld>
+  <p:clrMapOvr>
+    <a:masterClrMapping/>
+  </p:clrMapOvr>
+</p:notes>
+</file>
+
+<file path=ppt/notesSlides/notesSlide2.xml><?xml version="1.0" encoding="utf-8"?>
+<p:notes xmlns:a="http://schemas.openxmlformats.org/drawingml/2006/main" xmlns:r="http://schemas.openxmlformats.org/officeDocument/2006/relationships" xmlns:p="http://schemas.openxmlformats.org/presentationml/2006/main" xmlns:m="http://schemas.openxmlformats.org/officeDocument/2006/math" xmlns:w="http://schemas.openxmlformats.org/wordprocessingml/2006/main">
+  <p:cSld name="">
+    <p:spTree>
+      <p:nvGrpSpPr>
+        <p:cNvPr id="1" name=""/>
+        <p:cNvGrpSpPr/>
+        <p:nvPr/>
+      </p:nvGrpSpPr>
+      <p:grpSpPr bwMode="auto">
+        <a:xfrm>
+          <a:off x="0" y="0"/>
+          <a:ext cx="0" cy="0"/>
+          <a:chOff x="0" y="0"/>
+          <a:chExt cx="0" cy="0"/>
+        </a:xfrm>
+      </p:grpSpPr>
+      <p:sp>
+        <p:nvSpPr>
+          <p:cNvPr id="2" name="Slide Image Placeholder 1"/>
+          <p:cNvSpPr>
+            <a:spLocks noChangeAspect="1" noGrp="1" noRot="1"/>
+          </p:cNvSpPr>
+          <p:nvPr>
+            <p:ph type="sldImg"/>
+          </p:nvPr>
+        </p:nvSpPr>
+        <p:spPr bwMode="auto"/>
+      </p:sp>
+      <p:sp>
+        <p:nvSpPr>
+          <p:cNvPr id="3" name="Notes Placeholder 2"/>
+          <p:cNvSpPr>
+            <a:spLocks noGrp="1"/>
+          </p:cNvSpPr>
+          <p:nvPr>
+            <p:ph type="body" idx="1"/>
+          </p:nvPr>
+        </p:nvSpPr>
+        <p:spPr bwMode="auto"/>
+        <p:txBody>
+          <a:bodyPr/>
+          <a:lstStyle/>
+          <a:p>
+            <a:pPr>
+              <a:defRPr/>
+            </a:pPr>
+            <a:endParaRPr/>
+          </a:p>
+        </p:txBody>
+      </p:sp>
+      <p:sp>
+        <p:nvSpPr>
+          <p:cNvPr id="4" name="Slide Number Placeholder 3"/>
+          <p:cNvSpPr>
+            <a:spLocks noGrp="1"/>
+          </p:cNvSpPr>
+          <p:nvPr>
+            <p:ph type="sldNum" sz="quarter" idx="10"/>
+          </p:nvPr>
+        </p:nvSpPr>
+        <p:spPr bwMode="auto"/>
+        <p:txBody>
+          <a:bodyPr/>
+          <a:lstStyle/>
+          <a:p>
+            <a:pPr>
+              <a:defRPr/>
+            </a:pPr>
+            <a:fld id="{6F06A2F1-E6BC-7A7A-9398-4F0E8F3E401B}" type="slidenum">
+              <a:rPr/>
+              <a:t/>
+            </a:fld>
+            <a:endParaRPr/>
+          </a:p>
+        </p:txBody>
+      </p:sp>
+    </p:spTree>
+  </p:cSld>
+  <p:clrMapOvr>
+    <a:masterClrMapping/>
+  </p:clrMapOvr>
+</p:notes>
+</file>
+
+<file path=ppt/notesSlides/notesSlide3.xml><?xml version="1.0" encoding="utf-8"?>
+<p:notes xmlns:a="http://schemas.openxmlformats.org/drawingml/2006/main" xmlns:r="http://schemas.openxmlformats.org/officeDocument/2006/relationships" xmlns:p="http://schemas.openxmlformats.org/presentationml/2006/main" xmlns:m="http://schemas.openxmlformats.org/officeDocument/2006/math" xmlns:w="http://schemas.openxmlformats.org/wordprocessingml/2006/main">
+  <p:cSld name="">
+    <p:spTree>
+      <p:nvGrpSpPr>
+        <p:cNvPr id="1" name=""/>
+        <p:cNvGrpSpPr/>
+        <p:nvPr/>
+      </p:nvGrpSpPr>
+      <p:grpSpPr bwMode="auto">
+        <a:xfrm>
+          <a:off x="0" y="0"/>
+          <a:ext cx="0" cy="0"/>
+          <a:chOff x="0" y="0"/>
+          <a:chExt cx="0" cy="0"/>
+        </a:xfrm>
+      </p:grpSpPr>
+      <p:sp>
+        <p:nvSpPr>
+          <p:cNvPr id="2" name="Slide Image Placeholder 1"/>
+          <p:cNvSpPr>
+            <a:spLocks noChangeAspect="1" noGrp="1" noRot="1"/>
+          </p:cNvSpPr>
+          <p:nvPr>
+            <p:ph type="sldImg"/>
+          </p:nvPr>
+        </p:nvSpPr>
+        <p:spPr bwMode="auto"/>
+      </p:sp>
+      <p:sp>
+        <p:nvSpPr>
+          <p:cNvPr id="3" name="Notes Placeholder 2"/>
+          <p:cNvSpPr>
+            <a:spLocks noGrp="1"/>
+          </p:cNvSpPr>
+          <p:nvPr>
+            <p:ph type="body" idx="1"/>
+          </p:nvPr>
+        </p:nvSpPr>
+        <p:spPr bwMode="auto"/>
+        <p:txBody>
+          <a:bodyPr/>
+          <a:lstStyle/>
+          <a:p>
+            <a:pPr>
+              <a:defRPr/>
+            </a:pPr>
+            <a:endParaRPr/>
+          </a:p>
+        </p:txBody>
+      </p:sp>
+      <p:sp>
+        <p:nvSpPr>
+          <p:cNvPr id="4" name="Slide Number Placeholder 3"/>
+          <p:cNvSpPr>
+            <a:spLocks noGrp="1"/>
+          </p:cNvSpPr>
+          <p:nvPr>
+            <p:ph type="sldNum" sz="quarter" idx="10"/>
+          </p:nvPr>
+        </p:nvSpPr>
+        <p:spPr bwMode="auto"/>
+        <p:txBody>
+          <a:bodyPr/>
+          <a:lstStyle/>
+          <a:p>
+            <a:pPr>
+              <a:defRPr/>
+            </a:pPr>
+            <a:fld id="{DD6C6A3B-3425-6527-9B09-D08296CE616A}" type="slidenum">
+              <a:rPr/>
+              <a:t/>
+            </a:fld>
+            <a:endParaRPr/>
+          </a:p>
+        </p:txBody>
+      </p:sp>
+    </p:spTree>
+  </p:cSld>
+  <p:clrMapOvr>
+    <a:masterClrMapping/>
+  </p:clrMapOvr>
+</p:notes>
+</file>
+
+<file path=ppt/notesSlides/notesSlide4.xml><?xml version="1.0" encoding="utf-8"?>
+<p:notes xmlns:a="http://schemas.openxmlformats.org/drawingml/2006/main" xmlns:r="http://schemas.openxmlformats.org/officeDocument/2006/relationships" xmlns:p="http://schemas.openxmlformats.org/presentationml/2006/main" xmlns:m="http://schemas.openxmlformats.org/officeDocument/2006/math" xmlns:w="http://schemas.openxmlformats.org/wordprocessingml/2006/main">
+  <p:cSld name="">
+    <p:spTree>
+      <p:nvGrpSpPr>
+        <p:cNvPr id="1" name=""/>
+        <p:cNvGrpSpPr/>
+        <p:nvPr/>
+      </p:nvGrpSpPr>
+      <p:grpSpPr bwMode="auto">
+        <a:xfrm>
+          <a:off x="0" y="0"/>
+          <a:ext cx="0" cy="0"/>
+          <a:chOff x="0" y="0"/>
+          <a:chExt cx="0" cy="0"/>
+        </a:xfrm>
+      </p:grpSpPr>
+      <p:sp>
+        <p:nvSpPr>
+          <p:cNvPr id="2" name="Slide Image Placeholder 1"/>
+          <p:cNvSpPr>
+            <a:spLocks noChangeAspect="1" noGrp="1" noRot="1"/>
+          </p:cNvSpPr>
+          <p:nvPr>
+            <p:ph type="sldImg"/>
+          </p:nvPr>
+        </p:nvSpPr>
+        <p:spPr bwMode="auto"/>
+      </p:sp>
+      <p:sp>
+        <p:nvSpPr>
+          <p:cNvPr id="3" name="Notes Placeholder 2"/>
+          <p:cNvSpPr>
+            <a:spLocks noGrp="1"/>
+          </p:cNvSpPr>
+          <p:nvPr>
+            <p:ph type="body" idx="1"/>
+          </p:nvPr>
+        </p:nvSpPr>
+        <p:spPr bwMode="auto"/>
+        <p:txBody>
+          <a:bodyPr/>
+          <a:lstStyle/>
+          <a:p>
+            <a:pPr>
+              <a:defRPr/>
+            </a:pPr>
+            <a:endParaRPr/>
+          </a:p>
+        </p:txBody>
+      </p:sp>
+      <p:sp>
+        <p:nvSpPr>
+          <p:cNvPr id="4" name="Slide Number Placeholder 3"/>
+          <p:cNvSpPr>
+            <a:spLocks noGrp="1"/>
+          </p:cNvSpPr>
+          <p:nvPr>
+            <p:ph type="sldNum" sz="quarter" idx="10"/>
+          </p:nvPr>
+        </p:nvSpPr>
+        <p:spPr bwMode="auto"/>
+        <p:txBody>
+          <a:bodyPr/>
+          <a:lstStyle/>
+          <a:p>
+            <a:pPr>
+              <a:defRPr/>
+            </a:pPr>
+            <a:fld id="{C3B8C681-01BD-6340-6442-6258B73C6D88}" type="slidenum">
+              <a:rPr/>
+              <a:t/>
+            </a:fld>
+            <a:endParaRPr/>
+          </a:p>
+        </p:txBody>
+      </p:sp>
+    </p:spTree>
+  </p:cSld>
+  <p:clrMapOvr>
+    <a:masterClrMapping/>
+  </p:clrMapOvr>
+</p:notes>
+</file>
+
+<file path=ppt/notesSlides/notesSlide5.xml><?xml version="1.0" encoding="utf-8"?>
+<p:notes xmlns:a="http://schemas.openxmlformats.org/drawingml/2006/main" xmlns:r="http://schemas.openxmlformats.org/officeDocument/2006/relationships" xmlns:p="http://schemas.openxmlformats.org/presentationml/2006/main" xmlns:m="http://schemas.openxmlformats.org/officeDocument/2006/math" xmlns:w="http://schemas.openxmlformats.org/wordprocessingml/2006/main">
+  <p:cSld name="">
+    <p:spTree>
+      <p:nvGrpSpPr>
+        <p:cNvPr id="1" name=""/>
+        <p:cNvGrpSpPr/>
+        <p:nvPr/>
+      </p:nvGrpSpPr>
+      <p:grpSpPr bwMode="auto">
+        <a:xfrm>
+          <a:off x="0" y="0"/>
+          <a:ext cx="0" cy="0"/>
+          <a:chOff x="0" y="0"/>
+          <a:chExt cx="0" cy="0"/>
+        </a:xfrm>
+      </p:grpSpPr>
+      <p:sp>
+        <p:nvSpPr>
+          <p:cNvPr id="2" name="Slide Image Placeholder 1"/>
+          <p:cNvSpPr>
+            <a:spLocks noChangeAspect="1" noGrp="1" noRot="1"/>
+          </p:cNvSpPr>
+          <p:nvPr>
+            <p:ph type="sldImg"/>
+          </p:nvPr>
+        </p:nvSpPr>
+        <p:spPr bwMode="auto"/>
+      </p:sp>
+      <p:sp>
+        <p:nvSpPr>
+          <p:cNvPr id="3" name="Notes Placeholder 2"/>
+          <p:cNvSpPr>
+            <a:spLocks noGrp="1"/>
+          </p:cNvSpPr>
+          <p:nvPr>
+            <p:ph type="body" idx="1"/>
+          </p:nvPr>
+        </p:nvSpPr>
+        <p:spPr bwMode="auto"/>
+        <p:txBody>
+          <a:bodyPr/>
+          <a:lstStyle/>
+          <a:p>
+            <a:pPr>
+              <a:defRPr/>
+            </a:pPr>
+            <a:endParaRPr/>
+          </a:p>
+        </p:txBody>
+      </p:sp>
+      <p:sp>
+        <p:nvSpPr>
+          <p:cNvPr id="4" name="Slide Number Placeholder 3"/>
+          <p:cNvSpPr>
+            <a:spLocks noGrp="1"/>
+          </p:cNvSpPr>
+          <p:nvPr>
+            <p:ph type="sldNum" sz="quarter" idx="10"/>
+          </p:nvPr>
+        </p:nvSpPr>
+        <p:spPr bwMode="auto"/>
+        <p:txBody>
+          <a:bodyPr/>
+          <a:lstStyle/>
+          <a:p>
+            <a:pPr>
+              <a:defRPr/>
+            </a:pPr>
+            <a:fld id="{951B87EC-1DC1-D3E0-687F-28C72EE497B9}" type="slidenum">
+              <a:rPr/>
+              <a:t/>
+            </a:fld>
+            <a:endParaRPr/>
+          </a:p>
+        </p:txBody>
+      </p:sp>
+    </p:spTree>
+  </p:cSld>
+  <p:clrMapOvr>
+    <a:masterClrMapping/>
+  </p:clrMapOvr>
+</p:notes>
+</file>
+
+<file path=ppt/notesSlides/notesSlide6.xml><?xml version="1.0" encoding="utf-8"?>
+<p:notes xmlns:a="http://schemas.openxmlformats.org/drawingml/2006/main" xmlns:r="http://schemas.openxmlformats.org/officeDocument/2006/relationships" xmlns:p="http://schemas.openxmlformats.org/presentationml/2006/main" xmlns:m="http://schemas.openxmlformats.org/officeDocument/2006/math" xmlns:w="http://schemas.openxmlformats.org/wordprocessingml/2006/main">
+  <p:cSld name="">
+    <p:spTree>
+      <p:nvGrpSpPr>
+        <p:cNvPr id="1" name=""/>
+        <p:cNvGrpSpPr/>
+        <p:nvPr/>
+      </p:nvGrpSpPr>
+      <p:grpSpPr bwMode="auto">
+        <a:xfrm>
+          <a:off x="0" y="0"/>
+          <a:ext cx="0" cy="0"/>
+          <a:chOff x="0" y="0"/>
+          <a:chExt cx="0" cy="0"/>
+        </a:xfrm>
+      </p:grpSpPr>
+      <p:sp>
+        <p:nvSpPr>
+          <p:cNvPr id="2" name="Slide Image Placeholder 1"/>
+          <p:cNvSpPr>
+            <a:spLocks noChangeAspect="1" noGrp="1" noRot="1"/>
+          </p:cNvSpPr>
+          <p:nvPr>
+            <p:ph type="sldImg"/>
+          </p:nvPr>
+        </p:nvSpPr>
+        <p:spPr bwMode="auto"/>
+      </p:sp>
+      <p:sp>
+        <p:nvSpPr>
+          <p:cNvPr id="3" name="Notes Placeholder 2"/>
+          <p:cNvSpPr>
+            <a:spLocks noGrp="1"/>
+          </p:cNvSpPr>
+          <p:nvPr>
+            <p:ph type="body" idx="1"/>
+          </p:nvPr>
+        </p:nvSpPr>
+        <p:spPr bwMode="auto"/>
+        <p:txBody>
+          <a:bodyPr/>
+          <a:lstStyle/>
+          <a:p>
+            <a:pPr>
+              <a:defRPr/>
+            </a:pPr>
+            <a:endParaRPr/>
+          </a:p>
+        </p:txBody>
+      </p:sp>
+      <p:sp>
+        <p:nvSpPr>
+          <p:cNvPr id="4" name="Slide Number Placeholder 3"/>
+          <p:cNvSpPr>
+            <a:spLocks noGrp="1"/>
+          </p:cNvSpPr>
+          <p:nvPr>
+            <p:ph type="sldNum" sz="quarter" idx="10"/>
+          </p:nvPr>
+        </p:nvSpPr>
+        <p:spPr bwMode="auto"/>
+        <p:txBody>
+          <a:bodyPr/>
+          <a:lstStyle/>
+          <a:p>
+            <a:pPr>
+              <a:defRPr/>
+            </a:pPr>
+            <a:fld id="{8BB6311B-0B84-F39D-DD8D-647381CFE2BE}" type="slidenum">
+              <a:rPr/>
+              <a:t/>
+            </a:fld>
+            <a:endParaRPr/>
+          </a:p>
+        </p:txBody>
+      </p:sp>
+    </p:spTree>
+  </p:cSld>
+  <p:clrMapOvr>
+    <a:masterClrMapping/>
+  </p:clrMapOvr>
+</p:notes>
+</file>
+
+<file path=ppt/notesSlides/notesSlide7.xml><?xml version="1.0" encoding="utf-8"?>
+<p:notes xmlns:a="http://schemas.openxmlformats.org/drawingml/2006/main" xmlns:r="http://schemas.openxmlformats.org/officeDocument/2006/relationships" xmlns:p="http://schemas.openxmlformats.org/presentationml/2006/main" xmlns:m="http://schemas.openxmlformats.org/officeDocument/2006/math" xmlns:w="http://schemas.openxmlformats.org/wordprocessingml/2006/main">
+  <p:cSld name="">
+    <p:spTree>
+      <p:nvGrpSpPr>
+        <p:cNvPr id="1" name=""/>
+        <p:cNvGrpSpPr/>
+        <p:nvPr/>
+      </p:nvGrpSpPr>
+      <p:grpSpPr bwMode="auto">
+        <a:xfrm>
+          <a:off x="0" y="0"/>
+          <a:ext cx="0" cy="0"/>
+          <a:chOff x="0" y="0"/>
+          <a:chExt cx="0" cy="0"/>
+        </a:xfrm>
+      </p:grpSpPr>
+      <p:sp>
+        <p:nvSpPr>
+          <p:cNvPr id="2" name="Slide Image Placeholder 1"/>
+          <p:cNvSpPr>
+            <a:spLocks noChangeAspect="1" noGrp="1" noRot="1"/>
+          </p:cNvSpPr>
+          <p:nvPr>
+            <p:ph type="sldImg"/>
+          </p:nvPr>
+        </p:nvSpPr>
+        <p:spPr bwMode="auto"/>
+      </p:sp>
+      <p:sp>
+        <p:nvSpPr>
+          <p:cNvPr id="3" name="Notes Placeholder 2"/>
+          <p:cNvSpPr>
+            <a:spLocks noGrp="1"/>
+          </p:cNvSpPr>
+          <p:nvPr>
+            <p:ph type="body" idx="1"/>
+          </p:nvPr>
+        </p:nvSpPr>
+        <p:spPr bwMode="auto"/>
+        <p:txBody>
+          <a:bodyPr/>
+          <a:lstStyle/>
+          <a:p>
+            <a:pPr>
+              <a:defRPr/>
+            </a:pPr>
+            <a:endParaRPr/>
+          </a:p>
+        </p:txBody>
+      </p:sp>
+      <p:sp>
+        <p:nvSpPr>
+          <p:cNvPr id="4" name="Slide Number Placeholder 3"/>
+          <p:cNvSpPr>
+            <a:spLocks noGrp="1"/>
+          </p:cNvSpPr>
+          <p:nvPr>
+            <p:ph type="sldNum" sz="quarter" idx="10"/>
+          </p:nvPr>
+        </p:nvSpPr>
+        <p:spPr bwMode="auto"/>
+        <p:txBody>
+          <a:bodyPr/>
+          <a:lstStyle/>
+          <a:p>
+            <a:pPr>
+              <a:defRPr/>
+            </a:pPr>
+            <a:fld id="{C134EE1B-F6F1-F952-8336-E5B9AB3720C1}" type="slidenum">
+              <a:rPr/>
+              <a:t/>
+            </a:fld>
+            <a:endParaRPr/>
+          </a:p>
+        </p:txBody>
+      </p:sp>
+    </p:spTree>
+  </p:cSld>
+  <p:clrMapOvr>
+    <a:masterClrMapping/>
+  </p:clrMapOvr>
+</p:notes>
+</file>
+
+<file path=ppt/notesSlides/notesSlide8.xml><?xml version="1.0" encoding="utf-8"?>
+<p:notes xmlns:a="http://schemas.openxmlformats.org/drawingml/2006/main" xmlns:r="http://schemas.openxmlformats.org/officeDocument/2006/relationships" xmlns:p="http://schemas.openxmlformats.org/presentationml/2006/main" xmlns:m="http://schemas.openxmlformats.org/officeDocument/2006/math" xmlns:w="http://schemas.openxmlformats.org/wordprocessingml/2006/main">
+  <p:cSld name="">
+    <p:spTree>
+      <p:nvGrpSpPr>
+        <p:cNvPr id="1" name=""/>
+        <p:cNvGrpSpPr/>
+        <p:nvPr/>
+      </p:nvGrpSpPr>
+      <p:grpSpPr bwMode="auto">
+        <a:xfrm>
+          <a:off x="0" y="0"/>
+          <a:ext cx="0" cy="0"/>
+          <a:chOff x="0" y="0"/>
+          <a:chExt cx="0" cy="0"/>
+        </a:xfrm>
+      </p:grpSpPr>
+      <p:sp>
+        <p:nvSpPr>
+          <p:cNvPr id="2" name="Slide Image Placeholder 1"/>
+          <p:cNvSpPr>
+            <a:spLocks noChangeAspect="1" noGrp="1" noRot="1"/>
+          </p:cNvSpPr>
+          <p:nvPr>
+            <p:ph type="sldImg"/>
+          </p:nvPr>
+        </p:nvSpPr>
+        <p:spPr bwMode="auto"/>
+      </p:sp>
+      <p:sp>
+        <p:nvSpPr>
+          <p:cNvPr id="3" name="Notes Placeholder 2"/>
+          <p:cNvSpPr>
+            <a:spLocks noGrp="1"/>
+          </p:cNvSpPr>
+          <p:nvPr>
+            <p:ph type="body" idx="1"/>
+          </p:nvPr>
+        </p:nvSpPr>
+        <p:spPr bwMode="auto"/>
+        <p:txBody>
+          <a:bodyPr/>
+          <a:lstStyle/>
+          <a:p>
+            <a:pPr>
+              <a:defRPr/>
+            </a:pPr>
+            <a:endParaRPr/>
+          </a:p>
+        </p:txBody>
+      </p:sp>
+      <p:sp>
+        <p:nvSpPr>
+          <p:cNvPr id="4" name="Slide Number Placeholder 3"/>
+          <p:cNvSpPr>
+            <a:spLocks noGrp="1"/>
+          </p:cNvSpPr>
+          <p:nvPr>
+            <p:ph type="sldNum" sz="quarter" idx="10"/>
+          </p:nvPr>
+        </p:nvSpPr>
+        <p:spPr bwMode="auto"/>
+        <p:txBody>
+          <a:bodyPr/>
+          <a:lstStyle/>
+          <a:p>
+            <a:pPr>
+              <a:defRPr/>
+            </a:pPr>
+            <a:fld id="{00444E8B-2B01-7895-DC15-7939EB3B630F}" type="slidenum">
+              <a:rPr/>
+              <a:t/>
+            </a:fld>
+            <a:endParaRPr/>
+          </a:p>
+        </p:txBody>
+      </p:sp>
+    </p:spTree>
+  </p:cSld>
+  <p:clrMapOvr>
+    <a:masterClrMapping/>
+  </p:clrMapOvr>
+</p:notes>
+</file>
+
 <file path=ppt/slideLayouts/slideLayout1.xml><?xml version="1.0" encoding="utf-8"?>
-<p:sldLayout xmlns:a="http://schemas.openxmlformats.org/drawingml/2006/main" xmlns:r="http://schemas.openxmlformats.org/officeDocument/2006/relationships" xmlns:p="http://schemas.openxmlformats.org/presentationml/2006/main" type="title" preserve="1">
+<p:sldLayout xmlns:a="http://schemas.openxmlformats.org/drawingml/2006/main" xmlns:r="http://schemas.openxmlformats.org/officeDocument/2006/relationships" xmlns:p="http://schemas.openxmlformats.org/presentationml/2006/main" xmlns:m="http://schemas.openxmlformats.org/officeDocument/2006/math" xmlns:w="http://schemas.openxmlformats.org/wordprocessingml/2006/main" matchingName="" preserve="1" showMasterPhAnim="0" showMasterSp="1" type="title" userDrawn="1">
   <p:cSld name="Title Slide">
     <p:spTree>
       <p:nvGrpSpPr>
@@ -123,7 +1126,7 @@
         <p:cNvGrpSpPr/>
         <p:nvPr/>
       </p:nvGrpSpPr>
-      <p:grpSpPr>
+      <p:grpSpPr bwMode="auto">
         <a:xfrm>
           <a:off x="0" y="0"/>
           <a:ext cx="0" cy="0"/>
@@ -133,7 +1136,7 @@
       </p:grpSpPr>
       <p:sp>
         <p:nvSpPr>
-          <p:cNvPr id="2" name="Title 1"/>
+          <p:cNvPr id="1994649997" name="Title 1"/>
           <p:cNvSpPr>
             <a:spLocks noGrp="1"/>
           </p:cNvSpPr>
@@ -141,7 +1144,7 @@
             <p:ph type="ctrTitle"/>
           </p:nvPr>
         </p:nvSpPr>
-        <p:spPr>
+        <p:spPr bwMode="auto">
           <a:xfrm>
             <a:off x="685800" y="2130425"/>
             <a:ext cx="7772400" cy="1470025"/>
@@ -151,8 +1154,11 @@
           <a:bodyPr/>
           <a:lstStyle/>
           <a:p>
-            <a:r>
-              <a:rPr lang="en-US" smtClean="0"/>
+            <a:pPr>
+              <a:defRPr/>
+            </a:pPr>
+            <a:r>
+              <a:rPr lang="en-US"/>
               <a:t>Click to edit Master title style</a:t>
             </a:r>
             <a:endParaRPr lang="en-US"/>
@@ -161,7 +1167,7 @@
       </p:sp>
       <p:sp>
         <p:nvSpPr>
-          <p:cNvPr id="3" name="Subtitle 2"/>
+          <p:cNvPr id="273926513" name="Subtitle 2"/>
           <p:cNvSpPr>
             <a:spLocks noGrp="1"/>
           </p:cNvSpPr>
@@ -169,10 +1175,10 @@
             <p:ph type="subTitle" idx="1"/>
           </p:nvPr>
         </p:nvSpPr>
-        <p:spPr>
+        <p:spPr bwMode="auto">
           <a:xfrm>
             <a:off x="1371600" y="3886200"/>
-            <a:ext cx="6400800" cy="1752600"/>
+            <a:ext cx="6400800" cy="1752599"/>
           </a:xfrm>
         </p:spPr>
         <p:txBody>
@@ -270,8 +1276,11 @@
             </a:lvl9pPr>
           </a:lstStyle>
           <a:p>
-            <a:r>
-              <a:rPr lang="en-US" smtClean="0"/>
+            <a:pPr>
+              <a:defRPr/>
+            </a:pPr>
+            <a:r>
+              <a:rPr lang="en-US"/>
               <a:t>Click to edit Master subtitle style</a:t>
             </a:r>
             <a:endParaRPr lang="en-US"/>
@@ -280,7 +1289,7 @@
       </p:sp>
       <p:sp>
         <p:nvSpPr>
-          <p:cNvPr id="4" name="Date Placeholder 3"/>
+          <p:cNvPr id="722897099" name="Date Placeholder 3"/>
           <p:cNvSpPr>
             <a:spLocks noGrp="1"/>
           </p:cNvSpPr>
@@ -288,13 +1297,16 @@
             <p:ph type="dt" sz="half" idx="10"/>
           </p:nvPr>
         </p:nvSpPr>
-        <p:spPr/>
-        <p:txBody>
-          <a:bodyPr/>
-          <a:lstStyle/>
-          <a:p>
+        <p:spPr bwMode="auto"/>
+        <p:txBody>
+          <a:bodyPr/>
+          <a:lstStyle/>
+          <a:p>
+            <a:pPr>
+              <a:defRPr/>
+            </a:pPr>
             <a:fld id="{5BCAD085-E8A6-8845-BD4E-CB4CCA059FC4}" type="datetimeFigureOut">
-              <a:rPr lang="en-US" smtClean="0"/>
+              <a:rPr lang="en-US"/>
               <a:t>1/27/13</a:t>
             </a:fld>
             <a:endParaRPr lang="en-US"/>
@@ -303,7 +1315,7 @@
       </p:sp>
       <p:sp>
         <p:nvSpPr>
-          <p:cNvPr id="5" name="Footer Placeholder 4"/>
+          <p:cNvPr id="2058359443" name="Footer Placeholder 4"/>
           <p:cNvSpPr>
             <a:spLocks noGrp="1"/>
           </p:cNvSpPr>
@@ -311,18 +1323,21 @@
             <p:ph type="ftr" sz="quarter" idx="11"/>
           </p:nvPr>
         </p:nvSpPr>
-        <p:spPr/>
-        <p:txBody>
-          <a:bodyPr/>
-          <a:lstStyle/>
-          <a:p>
+        <p:spPr bwMode="auto"/>
+        <p:txBody>
+          <a:bodyPr/>
+          <a:lstStyle/>
+          <a:p>
+            <a:pPr>
+              <a:defRPr/>
+            </a:pPr>
             <a:endParaRPr lang="en-US"/>
           </a:p>
         </p:txBody>
       </p:sp>
       <p:sp>
         <p:nvSpPr>
-          <p:cNvPr id="6" name="Slide Number Placeholder 5"/>
+          <p:cNvPr id="957713829" name="Slide Number Placeholder 5"/>
           <p:cNvSpPr>
             <a:spLocks noGrp="1"/>
           </p:cNvSpPr>
@@ -330,13 +1345,16 @@
             <p:ph type="sldNum" sz="quarter" idx="12"/>
           </p:nvPr>
         </p:nvSpPr>
-        <p:spPr/>
-        <p:txBody>
-          <a:bodyPr/>
-          <a:lstStyle/>
-          <a:p>
+        <p:spPr bwMode="auto"/>
+        <p:txBody>
+          <a:bodyPr/>
+          <a:lstStyle/>
+          <a:p>
+            <a:pPr>
+              <a:defRPr/>
+            </a:pPr>
             <a:fld id="{C1FF6DA9-008F-8B48-92A6-B652298478BF}" type="slidenum">
-              <a:rPr lang="en-US" smtClean="0"/>
+              <a:rPr lang="en-US"/>
               <a:t>‹#›</a:t>
             </a:fld>
             <a:endParaRPr lang="en-US"/>
@@ -344,11 +1362,6 @@
         </p:txBody>
       </p:sp>
     </p:spTree>
-    <p:extLst>
-      <p:ext uri="{BB962C8B-B14F-4D97-AF65-F5344CB8AC3E}">
-        <p14:creationId xmlns:p14="http://schemas.microsoft.com/office/powerpoint/2010/main" val="3168075583"/>
-      </p:ext>
-    </p:extLst>
   </p:cSld>
   <p:clrMapOvr>
     <a:masterClrMapping/>
@@ -357,7 +1370,7 @@
 </file>
 
 <file path=ppt/slideLayouts/slideLayout10.xml><?xml version="1.0" encoding="utf-8"?>
-<p:sldLayout xmlns:a="http://schemas.openxmlformats.org/drawingml/2006/main" xmlns:r="http://schemas.openxmlformats.org/officeDocument/2006/relationships" xmlns:p="http://schemas.openxmlformats.org/presentationml/2006/main" type="vertTx" preserve="1">
+<p:sldLayout xmlns:a="http://schemas.openxmlformats.org/drawingml/2006/main" xmlns:r="http://schemas.openxmlformats.org/officeDocument/2006/relationships" xmlns:p="http://schemas.openxmlformats.org/presentationml/2006/main" xmlns:m="http://schemas.openxmlformats.org/officeDocument/2006/math" xmlns:w="http://schemas.openxmlformats.org/wordprocessingml/2006/main" matchingName="" preserve="1" showMasterPhAnim="0" showMasterSp="1" type="vertTx" userDrawn="1">
   <p:cSld name="Title and Vertical Text">
     <p:spTree>
       <p:nvGrpSpPr>
@@ -365,7 +1378,7 @@
         <p:cNvGrpSpPr/>
         <p:nvPr/>
       </p:nvGrpSpPr>
-      <p:grpSpPr>
+      <p:grpSpPr bwMode="auto">
         <a:xfrm>
           <a:off x="0" y="0"/>
           <a:ext cx="0" cy="0"/>
@@ -375,7 +1388,7 @@
       </p:grpSpPr>
       <p:sp>
         <p:nvSpPr>
-          <p:cNvPr id="2" name="Title 1"/>
+          <p:cNvPr id="1120484167" name="Title 1"/>
           <p:cNvSpPr>
             <a:spLocks noGrp="1"/>
           </p:cNvSpPr>
@@ -383,13 +1396,16 @@
             <p:ph type="title"/>
           </p:nvPr>
         </p:nvSpPr>
-        <p:spPr/>
-        <p:txBody>
-          <a:bodyPr/>
-          <a:lstStyle/>
-          <a:p>
-            <a:r>
-              <a:rPr lang="en-US" smtClean="0"/>
+        <p:spPr bwMode="auto"/>
+        <p:txBody>
+          <a:bodyPr/>
+          <a:lstStyle/>
+          <a:p>
+            <a:pPr>
+              <a:defRPr/>
+            </a:pPr>
+            <a:r>
+              <a:rPr lang="en-US"/>
               <a:t>Click to edit Master title style</a:t>
             </a:r>
             <a:endParaRPr lang="en-US"/>
@@ -398,7 +1414,7 @@
       </p:sp>
       <p:sp>
         <p:nvSpPr>
-          <p:cNvPr id="3" name="Vertical Text Placeholder 2"/>
+          <p:cNvPr id="1545496912" name="Vertical Text Placeholder 2"/>
           <p:cNvSpPr>
             <a:spLocks noGrp="1"/>
           </p:cNvSpPr>
@@ -406,42 +1422,56 @@
             <p:ph type="body" orient="vert" idx="1"/>
           </p:nvPr>
         </p:nvSpPr>
-        <p:spPr/>
+        <p:spPr bwMode="auto"/>
         <p:txBody>
           <a:bodyPr vert="eaVert"/>
           <a:lstStyle/>
           <a:p>
-            <a:pPr lvl="0"/>
-            <a:r>
-              <a:rPr lang="en-US" smtClean="0"/>
+            <a:pPr lvl="0">
+              <a:defRPr/>
+            </a:pPr>
+            <a:r>
+              <a:rPr lang="en-US"/>
               <a:t>Click to edit Master text styles</a:t>
             </a:r>
-          </a:p>
-          <a:p>
-            <a:pPr lvl="1"/>
-            <a:r>
-              <a:rPr lang="en-US" smtClean="0"/>
+            <a:endParaRPr/>
+          </a:p>
+          <a:p>
+            <a:pPr lvl="1">
+              <a:defRPr/>
+            </a:pPr>
+            <a:r>
+              <a:rPr lang="en-US"/>
               <a:t>Second level</a:t>
             </a:r>
-          </a:p>
-          <a:p>
-            <a:pPr lvl="2"/>
-            <a:r>
-              <a:rPr lang="en-US" smtClean="0"/>
+            <a:endParaRPr/>
+          </a:p>
+          <a:p>
+            <a:pPr lvl="2">
+              <a:defRPr/>
+            </a:pPr>
+            <a:r>
+              <a:rPr lang="en-US"/>
               <a:t>Third level</a:t>
             </a:r>
-          </a:p>
-          <a:p>
-            <a:pPr lvl="3"/>
-            <a:r>
-              <a:rPr lang="en-US" smtClean="0"/>
+            <a:endParaRPr/>
+          </a:p>
+          <a:p>
+            <a:pPr lvl="3">
+              <a:defRPr/>
+            </a:pPr>
+            <a:r>
+              <a:rPr lang="en-US"/>
               <a:t>Fourth level</a:t>
             </a:r>
-          </a:p>
-          <a:p>
-            <a:pPr lvl="4"/>
-            <a:r>
-              <a:rPr lang="en-US" smtClean="0"/>
+            <a:endParaRPr/>
+          </a:p>
+          <a:p>
+            <a:pPr lvl="4">
+              <a:defRPr/>
+            </a:pPr>
+            <a:r>
+              <a:rPr lang="en-US"/>
               <a:t>Fifth level</a:t>
             </a:r>
             <a:endParaRPr lang="en-US"/>
@@ -450,7 +1480,7 @@
       </p:sp>
       <p:sp>
         <p:nvSpPr>
-          <p:cNvPr id="4" name="Date Placeholder 3"/>
+          <p:cNvPr id="357879493" name="Date Placeholder 3"/>
           <p:cNvSpPr>
             <a:spLocks noGrp="1"/>
           </p:cNvSpPr>
@@ -458,13 +1488,16 @@
             <p:ph type="dt" sz="half" idx="10"/>
           </p:nvPr>
         </p:nvSpPr>
-        <p:spPr/>
-        <p:txBody>
-          <a:bodyPr/>
-          <a:lstStyle/>
-          <a:p>
+        <p:spPr bwMode="auto"/>
+        <p:txBody>
+          <a:bodyPr/>
+          <a:lstStyle/>
+          <a:p>
+            <a:pPr>
+              <a:defRPr/>
+            </a:pPr>
             <a:fld id="{5BCAD085-E8A6-8845-BD4E-CB4CCA059FC4}" type="datetimeFigureOut">
-              <a:rPr lang="en-US" smtClean="0"/>
+              <a:rPr lang="en-US"/>
               <a:t>1/27/13</a:t>
             </a:fld>
             <a:endParaRPr lang="en-US"/>
@@ -473,7 +1506,7 @@
       </p:sp>
       <p:sp>
         <p:nvSpPr>
-          <p:cNvPr id="5" name="Footer Placeholder 4"/>
+          <p:cNvPr id="478685384" name="Footer Placeholder 4"/>
           <p:cNvSpPr>
             <a:spLocks noGrp="1"/>
           </p:cNvSpPr>
@@ -481,18 +1514,21 @@
             <p:ph type="ftr" sz="quarter" idx="11"/>
           </p:nvPr>
         </p:nvSpPr>
-        <p:spPr/>
-        <p:txBody>
-          <a:bodyPr/>
-          <a:lstStyle/>
-          <a:p>
+        <p:spPr bwMode="auto"/>
+        <p:txBody>
+          <a:bodyPr/>
+          <a:lstStyle/>
+          <a:p>
+            <a:pPr>
+              <a:defRPr/>
+            </a:pPr>
             <a:endParaRPr lang="en-US"/>
           </a:p>
         </p:txBody>
       </p:sp>
       <p:sp>
         <p:nvSpPr>
-          <p:cNvPr id="6" name="Slide Number Placeholder 5"/>
+          <p:cNvPr id="436726045" name="Slide Number Placeholder 5"/>
           <p:cNvSpPr>
             <a:spLocks noGrp="1"/>
           </p:cNvSpPr>
@@ -500,13 +1536,16 @@
             <p:ph type="sldNum" sz="quarter" idx="12"/>
           </p:nvPr>
         </p:nvSpPr>
-        <p:spPr/>
-        <p:txBody>
-          <a:bodyPr/>
-          <a:lstStyle/>
-          <a:p>
+        <p:spPr bwMode="auto"/>
+        <p:txBody>
+          <a:bodyPr/>
+          <a:lstStyle/>
+          <a:p>
+            <a:pPr>
+              <a:defRPr/>
+            </a:pPr>
             <a:fld id="{C1FF6DA9-008F-8B48-92A6-B652298478BF}" type="slidenum">
-              <a:rPr lang="en-US" smtClean="0"/>
+              <a:rPr lang="en-US"/>
               <a:t>‹#›</a:t>
             </a:fld>
             <a:endParaRPr lang="en-US"/>
@@ -514,11 +1553,6 @@
         </p:txBody>
       </p:sp>
     </p:spTree>
-    <p:extLst>
-      <p:ext uri="{BB962C8B-B14F-4D97-AF65-F5344CB8AC3E}">
-        <p14:creationId xmlns:p14="http://schemas.microsoft.com/office/powerpoint/2010/main" val="2910927964"/>
-      </p:ext>
-    </p:extLst>
   </p:cSld>
   <p:clrMapOvr>
     <a:masterClrMapping/>
@@ -527,7 +1561,7 @@
 </file>
 
 <file path=ppt/slideLayouts/slideLayout11.xml><?xml version="1.0" encoding="utf-8"?>
-<p:sldLayout xmlns:a="http://schemas.openxmlformats.org/drawingml/2006/main" xmlns:r="http://schemas.openxmlformats.org/officeDocument/2006/relationships" xmlns:p="http://schemas.openxmlformats.org/presentationml/2006/main" type="vertTitleAndTx" preserve="1">
+<p:sldLayout xmlns:a="http://schemas.openxmlformats.org/drawingml/2006/main" xmlns:r="http://schemas.openxmlformats.org/officeDocument/2006/relationships" xmlns:p="http://schemas.openxmlformats.org/presentationml/2006/main" xmlns:m="http://schemas.openxmlformats.org/officeDocument/2006/math" xmlns:w="http://schemas.openxmlformats.org/wordprocessingml/2006/main" matchingName="" preserve="1" showMasterPhAnim="0" showMasterSp="1" type="vertTitleAndTx" userDrawn="1">
   <p:cSld name="Vertical Title and Text">
     <p:spTree>
       <p:nvGrpSpPr>
@@ -535,7 +1569,7 @@
         <p:cNvGrpSpPr/>
         <p:nvPr/>
       </p:nvGrpSpPr>
-      <p:grpSpPr>
+      <p:grpSpPr bwMode="auto">
         <a:xfrm>
           <a:off x="0" y="0"/>
           <a:ext cx="0" cy="0"/>
@@ -545,7 +1579,7 @@
       </p:grpSpPr>
       <p:sp>
         <p:nvSpPr>
-          <p:cNvPr id="2" name="Vertical Title 1"/>
+          <p:cNvPr id="1106803265" name="Vertical Title 1"/>
           <p:cNvSpPr>
             <a:spLocks noGrp="1"/>
           </p:cNvSpPr>
@@ -553,7 +1587,7 @@
             <p:ph type="title" orient="vert"/>
           </p:nvPr>
         </p:nvSpPr>
-        <p:spPr>
+        <p:spPr bwMode="auto">
           <a:xfrm>
             <a:off x="6629400" y="274638"/>
             <a:ext cx="2057400" cy="5851525"/>
@@ -563,8 +1597,11 @@
           <a:bodyPr vert="eaVert"/>
           <a:lstStyle/>
           <a:p>
-            <a:r>
-              <a:rPr lang="en-US" smtClean="0"/>
+            <a:pPr>
+              <a:defRPr/>
+            </a:pPr>
+            <a:r>
+              <a:rPr lang="en-US"/>
               <a:t>Click to edit Master title style</a:t>
             </a:r>
             <a:endParaRPr lang="en-US"/>
@@ -573,7 +1610,7 @@
       </p:sp>
       <p:sp>
         <p:nvSpPr>
-          <p:cNvPr id="3" name="Vertical Text Placeholder 2"/>
+          <p:cNvPr id="266763011" name="Vertical Text Placeholder 2"/>
           <p:cNvSpPr>
             <a:spLocks noGrp="1"/>
           </p:cNvSpPr>
@@ -581,7 +1618,7 @@
             <p:ph type="body" orient="vert" idx="1"/>
           </p:nvPr>
         </p:nvSpPr>
-        <p:spPr>
+        <p:spPr bwMode="auto">
           <a:xfrm>
             <a:off x="457200" y="274638"/>
             <a:ext cx="6019800" cy="5851525"/>
@@ -591,37 +1628,51 @@
           <a:bodyPr vert="eaVert"/>
           <a:lstStyle/>
           <a:p>
-            <a:pPr lvl="0"/>
-            <a:r>
-              <a:rPr lang="en-US" smtClean="0"/>
+            <a:pPr lvl="0">
+              <a:defRPr/>
+            </a:pPr>
+            <a:r>
+              <a:rPr lang="en-US"/>
               <a:t>Click to edit Master text styles</a:t>
             </a:r>
-          </a:p>
-          <a:p>
-            <a:pPr lvl="1"/>
-            <a:r>
-              <a:rPr lang="en-US" smtClean="0"/>
+            <a:endParaRPr/>
+          </a:p>
+          <a:p>
+            <a:pPr lvl="1">
+              <a:defRPr/>
+            </a:pPr>
+            <a:r>
+              <a:rPr lang="en-US"/>
               <a:t>Second level</a:t>
             </a:r>
-          </a:p>
-          <a:p>
-            <a:pPr lvl="2"/>
-            <a:r>
-              <a:rPr lang="en-US" smtClean="0"/>
+            <a:endParaRPr/>
+          </a:p>
+          <a:p>
+            <a:pPr lvl="2">
+              <a:defRPr/>
+            </a:pPr>
+            <a:r>
+              <a:rPr lang="en-US"/>
               <a:t>Third level</a:t>
             </a:r>
-          </a:p>
-          <a:p>
-            <a:pPr lvl="3"/>
-            <a:r>
-              <a:rPr lang="en-US" smtClean="0"/>
+            <a:endParaRPr/>
+          </a:p>
+          <a:p>
+            <a:pPr lvl="3">
+              <a:defRPr/>
+            </a:pPr>
+            <a:r>
+              <a:rPr lang="en-US"/>
               <a:t>Fourth level</a:t>
             </a:r>
-          </a:p>
-          <a:p>
-            <a:pPr lvl="4"/>
-            <a:r>
-              <a:rPr lang="en-US" smtClean="0"/>
+            <a:endParaRPr/>
+          </a:p>
+          <a:p>
+            <a:pPr lvl="4">
+              <a:defRPr/>
+            </a:pPr>
+            <a:r>
+              <a:rPr lang="en-US"/>
               <a:t>Fifth level</a:t>
             </a:r>
             <a:endParaRPr lang="en-US"/>
@@ -630,7 +1681,7 @@
       </p:sp>
       <p:sp>
         <p:nvSpPr>
-          <p:cNvPr id="4" name="Date Placeholder 3"/>
+          <p:cNvPr id="1975255184" name="Date Placeholder 3"/>
           <p:cNvSpPr>
             <a:spLocks noGrp="1"/>
           </p:cNvSpPr>
@@ -638,13 +1689,16 @@
             <p:ph type="dt" sz="half" idx="10"/>
           </p:nvPr>
         </p:nvSpPr>
-        <p:spPr/>
-        <p:txBody>
-          <a:bodyPr/>
-          <a:lstStyle/>
-          <a:p>
+        <p:spPr bwMode="auto"/>
+        <p:txBody>
+          <a:bodyPr/>
+          <a:lstStyle/>
+          <a:p>
+            <a:pPr>
+              <a:defRPr/>
+            </a:pPr>
             <a:fld id="{5BCAD085-E8A6-8845-BD4E-CB4CCA059FC4}" type="datetimeFigureOut">
-              <a:rPr lang="en-US" smtClean="0"/>
+              <a:rPr lang="en-US"/>
               <a:t>1/27/13</a:t>
             </a:fld>
             <a:endParaRPr lang="en-US"/>
@@ -653,7 +1707,7 @@
       </p:sp>
       <p:sp>
         <p:nvSpPr>
-          <p:cNvPr id="5" name="Footer Placeholder 4"/>
+          <p:cNvPr id="2057463353" name="Footer Placeholder 4"/>
           <p:cNvSpPr>
             <a:spLocks noGrp="1"/>
           </p:cNvSpPr>
@@ -661,18 +1715,21 @@
             <p:ph type="ftr" sz="quarter" idx="11"/>
           </p:nvPr>
         </p:nvSpPr>
-        <p:spPr/>
-        <p:txBody>
-          <a:bodyPr/>
-          <a:lstStyle/>
-          <a:p>
+        <p:spPr bwMode="auto"/>
+        <p:txBody>
+          <a:bodyPr/>
+          <a:lstStyle/>
+          <a:p>
+            <a:pPr>
+              <a:defRPr/>
+            </a:pPr>
             <a:endParaRPr lang="en-US"/>
           </a:p>
         </p:txBody>
       </p:sp>
       <p:sp>
         <p:nvSpPr>
-          <p:cNvPr id="6" name="Slide Number Placeholder 5"/>
+          <p:cNvPr id="1719290385" name="Slide Number Placeholder 5"/>
           <p:cNvSpPr>
             <a:spLocks noGrp="1"/>
           </p:cNvSpPr>
@@ -680,13 +1737,16 @@
             <p:ph type="sldNum" sz="quarter" idx="12"/>
           </p:nvPr>
         </p:nvSpPr>
-        <p:spPr/>
-        <p:txBody>
-          <a:bodyPr/>
-          <a:lstStyle/>
-          <a:p>
+        <p:spPr bwMode="auto"/>
+        <p:txBody>
+          <a:bodyPr/>
+          <a:lstStyle/>
+          <a:p>
+            <a:pPr>
+              <a:defRPr/>
+            </a:pPr>
             <a:fld id="{C1FF6DA9-008F-8B48-92A6-B652298478BF}" type="slidenum">
-              <a:rPr lang="en-US" smtClean="0"/>
+              <a:rPr lang="en-US"/>
               <a:t>‹#›</a:t>
             </a:fld>
             <a:endParaRPr lang="en-US"/>
@@ -694,11 +1754,6 @@
         </p:txBody>
       </p:sp>
     </p:spTree>
-    <p:extLst>
-      <p:ext uri="{BB962C8B-B14F-4D97-AF65-F5344CB8AC3E}">
-        <p14:creationId xmlns:p14="http://schemas.microsoft.com/office/powerpoint/2010/main" val="3612223792"/>
-      </p:ext>
-    </p:extLst>
   </p:cSld>
   <p:clrMapOvr>
     <a:masterClrMapping/>
@@ -707,7 +1762,7 @@
 </file>
 
 <file path=ppt/slideLayouts/slideLayout2.xml><?xml version="1.0" encoding="utf-8"?>
-<p:sldLayout xmlns:a="http://schemas.openxmlformats.org/drawingml/2006/main" xmlns:r="http://schemas.openxmlformats.org/officeDocument/2006/relationships" xmlns:p="http://schemas.openxmlformats.org/presentationml/2006/main" type="obj" preserve="1">
+<p:sldLayout xmlns:a="http://schemas.openxmlformats.org/drawingml/2006/main" xmlns:r="http://schemas.openxmlformats.org/officeDocument/2006/relationships" xmlns:p="http://schemas.openxmlformats.org/presentationml/2006/main" xmlns:m="http://schemas.openxmlformats.org/officeDocument/2006/math" xmlns:w="http://schemas.openxmlformats.org/wordprocessingml/2006/main" matchingName="" preserve="1" showMasterPhAnim="0" showMasterSp="1" type="obj" userDrawn="1">
   <p:cSld name="Title and Content">
     <p:spTree>
       <p:nvGrpSpPr>
@@ -715,7 +1770,7 @@
         <p:cNvGrpSpPr/>
         <p:nvPr/>
       </p:nvGrpSpPr>
-      <p:grpSpPr>
+      <p:grpSpPr bwMode="auto">
         <a:xfrm>
           <a:off x="0" y="0"/>
           <a:ext cx="0" cy="0"/>
@@ -725,7 +1780,7 @@
       </p:grpSpPr>
       <p:sp>
         <p:nvSpPr>
-          <p:cNvPr id="2" name="Title 1"/>
+          <p:cNvPr id="545742939" name="Title 1"/>
           <p:cNvSpPr>
             <a:spLocks noGrp="1"/>
           </p:cNvSpPr>
@@ -733,13 +1788,16 @@
             <p:ph type="title"/>
           </p:nvPr>
         </p:nvSpPr>
-        <p:spPr/>
-        <p:txBody>
-          <a:bodyPr/>
-          <a:lstStyle/>
-          <a:p>
-            <a:r>
-              <a:rPr lang="en-US" smtClean="0"/>
+        <p:spPr bwMode="auto"/>
+        <p:txBody>
+          <a:bodyPr/>
+          <a:lstStyle/>
+          <a:p>
+            <a:pPr>
+              <a:defRPr/>
+            </a:pPr>
+            <a:r>
+              <a:rPr lang="en-US"/>
               <a:t>Click to edit Master title style</a:t>
             </a:r>
             <a:endParaRPr lang="en-US"/>
@@ -748,7 +1806,7 @@
       </p:sp>
       <p:sp>
         <p:nvSpPr>
-          <p:cNvPr id="3" name="Content Placeholder 2"/>
+          <p:cNvPr id="988120245" name="Content Placeholder 2"/>
           <p:cNvSpPr>
             <a:spLocks noGrp="1"/>
           </p:cNvSpPr>
@@ -756,42 +1814,56 @@
             <p:ph idx="1"/>
           </p:nvPr>
         </p:nvSpPr>
-        <p:spPr/>
-        <p:txBody>
-          <a:bodyPr/>
-          <a:lstStyle/>
-          <a:p>
-            <a:pPr lvl="0"/>
-            <a:r>
-              <a:rPr lang="en-US" smtClean="0"/>
+        <p:spPr bwMode="auto"/>
+        <p:txBody>
+          <a:bodyPr/>
+          <a:lstStyle/>
+          <a:p>
+            <a:pPr lvl="0">
+              <a:defRPr/>
+            </a:pPr>
+            <a:r>
+              <a:rPr lang="en-US"/>
               <a:t>Click to edit Master text styles</a:t>
             </a:r>
-          </a:p>
-          <a:p>
-            <a:pPr lvl="1"/>
-            <a:r>
-              <a:rPr lang="en-US" smtClean="0"/>
+            <a:endParaRPr/>
+          </a:p>
+          <a:p>
+            <a:pPr lvl="1">
+              <a:defRPr/>
+            </a:pPr>
+            <a:r>
+              <a:rPr lang="en-US"/>
               <a:t>Second level</a:t>
             </a:r>
-          </a:p>
-          <a:p>
-            <a:pPr lvl="2"/>
-            <a:r>
-              <a:rPr lang="en-US" smtClean="0"/>
+            <a:endParaRPr/>
+          </a:p>
+          <a:p>
+            <a:pPr lvl="2">
+              <a:defRPr/>
+            </a:pPr>
+            <a:r>
+              <a:rPr lang="en-US"/>
               <a:t>Third level</a:t>
             </a:r>
-          </a:p>
-          <a:p>
-            <a:pPr lvl="3"/>
-            <a:r>
-              <a:rPr lang="en-US" smtClean="0"/>
+            <a:endParaRPr/>
+          </a:p>
+          <a:p>
+            <a:pPr lvl="3">
+              <a:defRPr/>
+            </a:pPr>
+            <a:r>
+              <a:rPr lang="en-US"/>
               <a:t>Fourth level</a:t>
             </a:r>
-          </a:p>
-          <a:p>
-            <a:pPr lvl="4"/>
-            <a:r>
-              <a:rPr lang="en-US" smtClean="0"/>
+            <a:endParaRPr/>
+          </a:p>
+          <a:p>
+            <a:pPr lvl="4">
+              <a:defRPr/>
+            </a:pPr>
+            <a:r>
+              <a:rPr lang="en-US"/>
               <a:t>Fifth level</a:t>
             </a:r>
             <a:endParaRPr lang="en-US"/>
@@ -800,7 +1872,7 @@
       </p:sp>
       <p:sp>
         <p:nvSpPr>
-          <p:cNvPr id="4" name="Date Placeholder 3"/>
+          <p:cNvPr id="1278267834" name="Date Placeholder 3"/>
           <p:cNvSpPr>
             <a:spLocks noGrp="1"/>
           </p:cNvSpPr>
@@ -808,13 +1880,16 @@
             <p:ph type="dt" sz="half" idx="10"/>
           </p:nvPr>
         </p:nvSpPr>
-        <p:spPr/>
-        <p:txBody>
-          <a:bodyPr/>
-          <a:lstStyle/>
-          <a:p>
+        <p:spPr bwMode="auto"/>
+        <p:txBody>
+          <a:bodyPr/>
+          <a:lstStyle/>
+          <a:p>
+            <a:pPr>
+              <a:defRPr/>
+            </a:pPr>
             <a:fld id="{5BCAD085-E8A6-8845-BD4E-CB4CCA059FC4}" type="datetimeFigureOut">
-              <a:rPr lang="en-US" smtClean="0"/>
+              <a:rPr lang="en-US"/>
               <a:t>1/27/13</a:t>
             </a:fld>
             <a:endParaRPr lang="en-US"/>
@@ -823,7 +1898,7 @@
       </p:sp>
       <p:sp>
         <p:nvSpPr>
-          <p:cNvPr id="5" name="Footer Placeholder 4"/>
+          <p:cNvPr id="993086378" name="Footer Placeholder 4"/>
           <p:cNvSpPr>
             <a:spLocks noGrp="1"/>
           </p:cNvSpPr>
@@ -831,18 +1906,21 @@
             <p:ph type="ftr" sz="quarter" idx="11"/>
           </p:nvPr>
         </p:nvSpPr>
-        <p:spPr/>
-        <p:txBody>
-          <a:bodyPr/>
-          <a:lstStyle/>
-          <a:p>
+        <p:spPr bwMode="auto"/>
+        <p:txBody>
+          <a:bodyPr/>
+          <a:lstStyle/>
+          <a:p>
+            <a:pPr>
+              <a:defRPr/>
+            </a:pPr>
             <a:endParaRPr lang="en-US"/>
           </a:p>
         </p:txBody>
       </p:sp>
       <p:sp>
         <p:nvSpPr>
-          <p:cNvPr id="6" name="Slide Number Placeholder 5"/>
+          <p:cNvPr id="826465229" name="Slide Number Placeholder 5"/>
           <p:cNvSpPr>
             <a:spLocks noGrp="1"/>
           </p:cNvSpPr>
@@ -850,13 +1928,16 @@
             <p:ph type="sldNum" sz="quarter" idx="12"/>
           </p:nvPr>
         </p:nvSpPr>
-        <p:spPr/>
-        <p:txBody>
-          <a:bodyPr/>
-          <a:lstStyle/>
-          <a:p>
+        <p:spPr bwMode="auto"/>
+        <p:txBody>
+          <a:bodyPr/>
+          <a:lstStyle/>
+          <a:p>
+            <a:pPr>
+              <a:defRPr/>
+            </a:pPr>
             <a:fld id="{C1FF6DA9-008F-8B48-92A6-B652298478BF}" type="slidenum">
-              <a:rPr lang="en-US" smtClean="0"/>
+              <a:rPr lang="en-US"/>
               <a:t>‹#›</a:t>
             </a:fld>
             <a:endParaRPr lang="en-US"/>
@@ -864,11 +1945,6 @@
         </p:txBody>
       </p:sp>
     </p:spTree>
-    <p:extLst>
-      <p:ext uri="{BB962C8B-B14F-4D97-AF65-F5344CB8AC3E}">
-        <p14:creationId xmlns:p14="http://schemas.microsoft.com/office/powerpoint/2010/main" val="2614314258"/>
-      </p:ext>
-    </p:extLst>
   </p:cSld>
   <p:clrMapOvr>
     <a:masterClrMapping/>
@@ -877,7 +1953,7 @@
 </file>
 
 <file path=ppt/slideLayouts/slideLayout3.xml><?xml version="1.0" encoding="utf-8"?>
-<p:sldLayout xmlns:a="http://schemas.openxmlformats.org/drawingml/2006/main" xmlns:r="http://schemas.openxmlformats.org/officeDocument/2006/relationships" xmlns:p="http://schemas.openxmlformats.org/presentationml/2006/main" type="secHead" preserve="1">
+<p:sldLayout xmlns:a="http://schemas.openxmlformats.org/drawingml/2006/main" xmlns:r="http://schemas.openxmlformats.org/officeDocument/2006/relationships" xmlns:p="http://schemas.openxmlformats.org/presentationml/2006/main" xmlns:m="http://schemas.openxmlformats.org/officeDocument/2006/math" xmlns:w="http://schemas.openxmlformats.org/wordprocessingml/2006/main" matchingName="" preserve="1" showMasterPhAnim="0" showMasterSp="1" type="secHead" userDrawn="1">
   <p:cSld name="Section Header">
     <p:spTree>
       <p:nvGrpSpPr>
@@ -885,7 +1961,7 @@
         <p:cNvGrpSpPr/>
         <p:nvPr/>
       </p:nvGrpSpPr>
-      <p:grpSpPr>
+      <p:grpSpPr bwMode="auto">
         <a:xfrm>
           <a:off x="0" y="0"/>
           <a:ext cx="0" cy="0"/>
@@ -895,7 +1971,7 @@
       </p:grpSpPr>
       <p:sp>
         <p:nvSpPr>
-          <p:cNvPr id="2" name="Title 1"/>
+          <p:cNvPr id="2062743344" name="Title 1"/>
           <p:cNvSpPr>
             <a:spLocks noGrp="1"/>
           </p:cNvSpPr>
@@ -903,7 +1979,7 @@
             <p:ph type="title"/>
           </p:nvPr>
         </p:nvSpPr>
-        <p:spPr>
+        <p:spPr bwMode="auto">
           <a:xfrm>
             <a:off x="722313" y="4406900"/>
             <a:ext cx="7772400" cy="1362075"/>
@@ -917,8 +1993,11 @@
             </a:lvl1pPr>
           </a:lstStyle>
           <a:p>
-            <a:r>
-              <a:rPr lang="en-US" smtClean="0"/>
+            <a:pPr>
+              <a:defRPr/>
+            </a:pPr>
+            <a:r>
+              <a:rPr lang="en-US"/>
               <a:t>Click to edit Master title style</a:t>
             </a:r>
             <a:endParaRPr lang="en-US"/>
@@ -927,7 +2006,7 @@
       </p:sp>
       <p:sp>
         <p:nvSpPr>
-          <p:cNvPr id="3" name="Text Placeholder 2"/>
+          <p:cNvPr id="810683185" name="Text Placeholder 2"/>
           <p:cNvSpPr>
             <a:spLocks noGrp="1"/>
           </p:cNvSpPr>
@@ -935,7 +2014,7 @@
             <p:ph type="body" idx="1"/>
           </p:nvPr>
         </p:nvSpPr>
-        <p:spPr>
+        <p:spPr bwMode="auto">
           <a:xfrm>
             <a:off x="722313" y="2906713"/>
             <a:ext cx="7772400" cy="1500187"/>
@@ -1036,17 +2115,20 @@
             </a:lvl9pPr>
           </a:lstStyle>
           <a:p>
-            <a:pPr lvl="0"/>
-            <a:r>
-              <a:rPr lang="en-US" smtClean="0"/>
+            <a:pPr lvl="0">
+              <a:defRPr/>
+            </a:pPr>
+            <a:r>
+              <a:rPr lang="en-US"/>
               <a:t>Click to edit Master text styles</a:t>
             </a:r>
-          </a:p>
-        </p:txBody>
-      </p:sp>
-      <p:sp>
-        <p:nvSpPr>
-          <p:cNvPr id="4" name="Date Placeholder 3"/>
+            <a:endParaRPr/>
+          </a:p>
+        </p:txBody>
+      </p:sp>
+      <p:sp>
+        <p:nvSpPr>
+          <p:cNvPr id="1157909501" name="Date Placeholder 3"/>
           <p:cNvSpPr>
             <a:spLocks noGrp="1"/>
           </p:cNvSpPr>
@@ -1054,13 +2136,16 @@
             <p:ph type="dt" sz="half" idx="10"/>
           </p:nvPr>
         </p:nvSpPr>
-        <p:spPr/>
-        <p:txBody>
-          <a:bodyPr/>
-          <a:lstStyle/>
-          <a:p>
+        <p:spPr bwMode="auto"/>
+        <p:txBody>
+          <a:bodyPr/>
+          <a:lstStyle/>
+          <a:p>
+            <a:pPr>
+              <a:defRPr/>
+            </a:pPr>
             <a:fld id="{5BCAD085-E8A6-8845-BD4E-CB4CCA059FC4}" type="datetimeFigureOut">
-              <a:rPr lang="en-US" smtClean="0"/>
+              <a:rPr lang="en-US"/>
               <a:t>1/27/13</a:t>
             </a:fld>
             <a:endParaRPr lang="en-US"/>
@@ -1069,7 +2154,7 @@
       </p:sp>
       <p:sp>
         <p:nvSpPr>
-          <p:cNvPr id="5" name="Footer Placeholder 4"/>
+          <p:cNvPr id="90732517" name="Footer Placeholder 4"/>
           <p:cNvSpPr>
             <a:spLocks noGrp="1"/>
           </p:cNvSpPr>
@@ -1077,18 +2162,21 @@
             <p:ph type="ftr" sz="quarter" idx="11"/>
           </p:nvPr>
         </p:nvSpPr>
-        <p:spPr/>
-        <p:txBody>
-          <a:bodyPr/>
-          <a:lstStyle/>
-          <a:p>
+        <p:spPr bwMode="auto"/>
+        <p:txBody>
+          <a:bodyPr/>
+          <a:lstStyle/>
+          <a:p>
+            <a:pPr>
+              <a:defRPr/>
+            </a:pPr>
             <a:endParaRPr lang="en-US"/>
           </a:p>
         </p:txBody>
       </p:sp>
       <p:sp>
         <p:nvSpPr>
-          <p:cNvPr id="6" name="Slide Number Placeholder 5"/>
+          <p:cNvPr id="1340071691" name="Slide Number Placeholder 5"/>
           <p:cNvSpPr>
             <a:spLocks noGrp="1"/>
           </p:cNvSpPr>
@@ -1096,13 +2184,16 @@
             <p:ph type="sldNum" sz="quarter" idx="12"/>
           </p:nvPr>
         </p:nvSpPr>
-        <p:spPr/>
-        <p:txBody>
-          <a:bodyPr/>
-          <a:lstStyle/>
-          <a:p>
+        <p:spPr bwMode="auto"/>
+        <p:txBody>
+          <a:bodyPr/>
+          <a:lstStyle/>
+          <a:p>
+            <a:pPr>
+              <a:defRPr/>
+            </a:pPr>
             <a:fld id="{C1FF6DA9-008F-8B48-92A6-B652298478BF}" type="slidenum">
-              <a:rPr lang="en-US" smtClean="0"/>
+              <a:rPr lang="en-US"/>
               <a:t>‹#›</a:t>
             </a:fld>
             <a:endParaRPr lang="en-US"/>
@@ -1110,11 +2201,6 @@
         </p:txBody>
       </p:sp>
     </p:spTree>
-    <p:extLst>
-      <p:ext uri="{BB962C8B-B14F-4D97-AF65-F5344CB8AC3E}">
-        <p14:creationId xmlns:p14="http://schemas.microsoft.com/office/powerpoint/2010/main" val="960648375"/>
-      </p:ext>
-    </p:extLst>
   </p:cSld>
   <p:clrMapOvr>
     <a:masterClrMapping/>
@@ -1123,7 +2209,7 @@
 </file>
 
 <file path=ppt/slideLayouts/slideLayout4.xml><?xml version="1.0" encoding="utf-8"?>
-<p:sldLayout xmlns:a="http://schemas.openxmlformats.org/drawingml/2006/main" xmlns:r="http://schemas.openxmlformats.org/officeDocument/2006/relationships" xmlns:p="http://schemas.openxmlformats.org/presentationml/2006/main" type="twoObj" preserve="1">
+<p:sldLayout xmlns:a="http://schemas.openxmlformats.org/drawingml/2006/main" xmlns:r="http://schemas.openxmlformats.org/officeDocument/2006/relationships" xmlns:p="http://schemas.openxmlformats.org/presentationml/2006/main" xmlns:m="http://schemas.openxmlformats.org/officeDocument/2006/math" xmlns:w="http://schemas.openxmlformats.org/wordprocessingml/2006/main" matchingName="" preserve="1" showMasterPhAnim="0" showMasterSp="1" type="twoObj" userDrawn="1">
   <p:cSld name="Two Content">
     <p:spTree>
       <p:nvGrpSpPr>
@@ -1131,7 +2217,7 @@
         <p:cNvGrpSpPr/>
         <p:nvPr/>
       </p:nvGrpSpPr>
-      <p:grpSpPr>
+      <p:grpSpPr bwMode="auto">
         <a:xfrm>
           <a:off x="0" y="0"/>
           <a:ext cx="0" cy="0"/>
@@ -1141,7 +2227,7 @@
       </p:grpSpPr>
       <p:sp>
         <p:nvSpPr>
-          <p:cNvPr id="2" name="Title 1"/>
+          <p:cNvPr id="1356809567" name="Title 1"/>
           <p:cNvSpPr>
             <a:spLocks noGrp="1"/>
           </p:cNvSpPr>
@@ -1149,13 +2235,16 @@
             <p:ph type="title"/>
           </p:nvPr>
         </p:nvSpPr>
-        <p:spPr/>
-        <p:txBody>
-          <a:bodyPr/>
-          <a:lstStyle/>
-          <a:p>
-            <a:r>
-              <a:rPr lang="en-US" smtClean="0"/>
+        <p:spPr bwMode="auto"/>
+        <p:txBody>
+          <a:bodyPr/>
+          <a:lstStyle/>
+          <a:p>
+            <a:pPr>
+              <a:defRPr/>
+            </a:pPr>
+            <a:r>
+              <a:rPr lang="en-US"/>
               <a:t>Click to edit Master title style</a:t>
             </a:r>
             <a:endParaRPr lang="en-US"/>
@@ -1164,7 +2253,7 @@
       </p:sp>
       <p:sp>
         <p:nvSpPr>
-          <p:cNvPr id="3" name="Content Placeholder 2"/>
+          <p:cNvPr id="15985240" name="Content Placeholder 2"/>
           <p:cNvSpPr>
             <a:spLocks noGrp="1"/>
           </p:cNvSpPr>
@@ -1172,7 +2261,7 @@
             <p:ph sz="half" idx="1"/>
           </p:nvPr>
         </p:nvSpPr>
-        <p:spPr>
+        <p:spPr bwMode="auto">
           <a:xfrm>
             <a:off x="457200" y="1600200"/>
             <a:ext cx="4038600" cy="4525963"/>
@@ -1210,37 +2299,51 @@
             </a:lvl9pPr>
           </a:lstStyle>
           <a:p>
-            <a:pPr lvl="0"/>
-            <a:r>
-              <a:rPr lang="en-US" smtClean="0"/>
+            <a:pPr lvl="0">
+              <a:defRPr/>
+            </a:pPr>
+            <a:r>
+              <a:rPr lang="en-US"/>
               <a:t>Click to edit Master text styles</a:t>
             </a:r>
-          </a:p>
-          <a:p>
-            <a:pPr lvl="1"/>
-            <a:r>
-              <a:rPr lang="en-US" smtClean="0"/>
+            <a:endParaRPr/>
+          </a:p>
+          <a:p>
+            <a:pPr lvl="1">
+              <a:defRPr/>
+            </a:pPr>
+            <a:r>
+              <a:rPr lang="en-US"/>
               <a:t>Second level</a:t>
             </a:r>
-          </a:p>
-          <a:p>
-            <a:pPr lvl="2"/>
-            <a:r>
-              <a:rPr lang="en-US" smtClean="0"/>
+            <a:endParaRPr/>
+          </a:p>
+          <a:p>
+            <a:pPr lvl="2">
+              <a:defRPr/>
+            </a:pPr>
+            <a:r>
+              <a:rPr lang="en-US"/>
               <a:t>Third level</a:t>
             </a:r>
-          </a:p>
-          <a:p>
-            <a:pPr lvl="3"/>
-            <a:r>
-              <a:rPr lang="en-US" smtClean="0"/>
+            <a:endParaRPr/>
+          </a:p>
+          <a:p>
+            <a:pPr lvl="3">
+              <a:defRPr/>
+            </a:pPr>
+            <a:r>
+              <a:rPr lang="en-US"/>
               <a:t>Fourth level</a:t>
             </a:r>
-          </a:p>
-          <a:p>
-            <a:pPr lvl="4"/>
-            <a:r>
-              <a:rPr lang="en-US" smtClean="0"/>
+            <a:endParaRPr/>
+          </a:p>
+          <a:p>
+            <a:pPr lvl="4">
+              <a:defRPr/>
+            </a:pPr>
+            <a:r>
+              <a:rPr lang="en-US"/>
               <a:t>Fifth level</a:t>
             </a:r>
             <a:endParaRPr lang="en-US"/>
@@ -1249,7 +2352,7 @@
       </p:sp>
       <p:sp>
         <p:nvSpPr>
-          <p:cNvPr id="4" name="Content Placeholder 3"/>
+          <p:cNvPr id="1351089116" name="Content Placeholder 3"/>
           <p:cNvSpPr>
             <a:spLocks noGrp="1"/>
           </p:cNvSpPr>
@@ -1257,7 +2360,7 @@
             <p:ph sz="half" idx="2"/>
           </p:nvPr>
         </p:nvSpPr>
-        <p:spPr>
+        <p:spPr bwMode="auto">
           <a:xfrm>
             <a:off x="4648200" y="1600200"/>
             <a:ext cx="4038600" cy="4525963"/>
@@ -1295,37 +2398,51 @@
             </a:lvl9pPr>
           </a:lstStyle>
           <a:p>
-            <a:pPr lvl="0"/>
-            <a:r>
-              <a:rPr lang="en-US" smtClean="0"/>
+            <a:pPr lvl="0">
+              <a:defRPr/>
+            </a:pPr>
+            <a:r>
+              <a:rPr lang="en-US"/>
               <a:t>Click to edit Master text styles</a:t>
             </a:r>
-          </a:p>
-          <a:p>
-            <a:pPr lvl="1"/>
-            <a:r>
-              <a:rPr lang="en-US" smtClean="0"/>
+            <a:endParaRPr/>
+          </a:p>
+          <a:p>
+            <a:pPr lvl="1">
+              <a:defRPr/>
+            </a:pPr>
+            <a:r>
+              <a:rPr lang="en-US"/>
               <a:t>Second level</a:t>
             </a:r>
-          </a:p>
-          <a:p>
-            <a:pPr lvl="2"/>
-            <a:r>
-              <a:rPr lang="en-US" smtClean="0"/>
+            <a:endParaRPr/>
+          </a:p>
+          <a:p>
+            <a:pPr lvl="2">
+              <a:defRPr/>
+            </a:pPr>
+            <a:r>
+              <a:rPr lang="en-US"/>
               <a:t>Third level</a:t>
             </a:r>
-          </a:p>
-          <a:p>
-            <a:pPr lvl="3"/>
-            <a:r>
-              <a:rPr lang="en-US" smtClean="0"/>
+            <a:endParaRPr/>
+          </a:p>
+          <a:p>
+            <a:pPr lvl="3">
+              <a:defRPr/>
+            </a:pPr>
+            <a:r>
+              <a:rPr lang="en-US"/>
               <a:t>Fourth level</a:t>
             </a:r>
-          </a:p>
-          <a:p>
-            <a:pPr lvl="4"/>
-            <a:r>
-              <a:rPr lang="en-US" smtClean="0"/>
+            <a:endParaRPr/>
+          </a:p>
+          <a:p>
+            <a:pPr lvl="4">
+              <a:defRPr/>
+            </a:pPr>
+            <a:r>
+              <a:rPr lang="en-US"/>
               <a:t>Fifth level</a:t>
             </a:r>
             <a:endParaRPr lang="en-US"/>
@@ -1334,7 +2451,7 @@
       </p:sp>
       <p:sp>
         <p:nvSpPr>
-          <p:cNvPr id="5" name="Date Placeholder 4"/>
+          <p:cNvPr id="519159427" name="Date Placeholder 4"/>
           <p:cNvSpPr>
             <a:spLocks noGrp="1"/>
           </p:cNvSpPr>
@@ -1342,13 +2459,16 @@
             <p:ph type="dt" sz="half" idx="10"/>
           </p:nvPr>
         </p:nvSpPr>
-        <p:spPr/>
-        <p:txBody>
-          <a:bodyPr/>
-          <a:lstStyle/>
-          <a:p>
+        <p:spPr bwMode="auto"/>
+        <p:txBody>
+          <a:bodyPr/>
+          <a:lstStyle/>
+          <a:p>
+            <a:pPr>
+              <a:defRPr/>
+            </a:pPr>
             <a:fld id="{5BCAD085-E8A6-8845-BD4E-CB4CCA059FC4}" type="datetimeFigureOut">
-              <a:rPr lang="en-US" smtClean="0"/>
+              <a:rPr lang="en-US"/>
               <a:t>1/27/13</a:t>
             </a:fld>
             <a:endParaRPr lang="en-US"/>
@@ -1357,7 +2477,7 @@
       </p:sp>
       <p:sp>
         <p:nvSpPr>
-          <p:cNvPr id="6" name="Footer Placeholder 5"/>
+          <p:cNvPr id="2009455981" name="Footer Placeholder 5"/>
           <p:cNvSpPr>
             <a:spLocks noGrp="1"/>
           </p:cNvSpPr>
@@ -1365,18 +2485,21 @@
             <p:ph type="ftr" sz="quarter" idx="11"/>
           </p:nvPr>
         </p:nvSpPr>
-        <p:spPr/>
-        <p:txBody>
-          <a:bodyPr/>
-          <a:lstStyle/>
-          <a:p>
+        <p:spPr bwMode="auto"/>
+        <p:txBody>
+          <a:bodyPr/>
+          <a:lstStyle/>
+          <a:p>
+            <a:pPr>
+              <a:defRPr/>
+            </a:pPr>
             <a:endParaRPr lang="en-US"/>
           </a:p>
         </p:txBody>
       </p:sp>
       <p:sp>
         <p:nvSpPr>
-          <p:cNvPr id="7" name="Slide Number Placeholder 6"/>
+          <p:cNvPr id="780188623" name="Slide Number Placeholder 6"/>
           <p:cNvSpPr>
             <a:spLocks noGrp="1"/>
           </p:cNvSpPr>
@@ -1384,13 +2507,16 @@
             <p:ph type="sldNum" sz="quarter" idx="12"/>
           </p:nvPr>
         </p:nvSpPr>
-        <p:spPr/>
-        <p:txBody>
-          <a:bodyPr/>
-          <a:lstStyle/>
-          <a:p>
+        <p:spPr bwMode="auto"/>
+        <p:txBody>
+          <a:bodyPr/>
+          <a:lstStyle/>
+          <a:p>
+            <a:pPr>
+              <a:defRPr/>
+            </a:pPr>
             <a:fld id="{C1FF6DA9-008F-8B48-92A6-B652298478BF}" type="slidenum">
-              <a:rPr lang="en-US" smtClean="0"/>
+              <a:rPr lang="en-US"/>
               <a:t>‹#›</a:t>
             </a:fld>
             <a:endParaRPr lang="en-US"/>
@@ -1398,11 +2524,6 @@
         </p:txBody>
       </p:sp>
     </p:spTree>
-    <p:extLst>
-      <p:ext uri="{BB962C8B-B14F-4D97-AF65-F5344CB8AC3E}">
-        <p14:creationId xmlns:p14="http://schemas.microsoft.com/office/powerpoint/2010/main" val="2782244947"/>
-      </p:ext>
-    </p:extLst>
   </p:cSld>
   <p:clrMapOvr>
     <a:masterClrMapping/>
@@ -1411,7 +2532,7 @@
 </file>
 
 <file path=ppt/slideLayouts/slideLayout5.xml><?xml version="1.0" encoding="utf-8"?>
-<p:sldLayout xmlns:a="http://schemas.openxmlformats.org/drawingml/2006/main" xmlns:r="http://schemas.openxmlformats.org/officeDocument/2006/relationships" xmlns:p="http://schemas.openxmlformats.org/presentationml/2006/main" type="twoTxTwoObj" preserve="1">
+<p:sldLayout xmlns:a="http://schemas.openxmlformats.org/drawingml/2006/main" xmlns:r="http://schemas.openxmlformats.org/officeDocument/2006/relationships" xmlns:p="http://schemas.openxmlformats.org/presentationml/2006/main" xmlns:m="http://schemas.openxmlformats.org/officeDocument/2006/math" xmlns:w="http://schemas.openxmlformats.org/wordprocessingml/2006/main" matchingName="" preserve="1" showMasterPhAnim="0" showMasterSp="1" type="twoTxTwoObj" userDrawn="1">
   <p:cSld name="Comparison">
     <p:spTree>
       <p:nvGrpSpPr>
@@ -1419,7 +2540,7 @@
         <p:cNvGrpSpPr/>
         <p:nvPr/>
       </p:nvGrpSpPr>
-      <p:grpSpPr>
+      <p:grpSpPr bwMode="auto">
         <a:xfrm>
           <a:off x="0" y="0"/>
           <a:ext cx="0" cy="0"/>
@@ -1429,7 +2550,7 @@
       </p:grpSpPr>
       <p:sp>
         <p:nvSpPr>
-          <p:cNvPr id="2" name="Title 1"/>
+          <p:cNvPr id="920718956" name="Title 1"/>
           <p:cNvSpPr>
             <a:spLocks noGrp="1"/>
           </p:cNvSpPr>
@@ -1437,7 +2558,7 @@
             <p:ph type="title"/>
           </p:nvPr>
         </p:nvSpPr>
-        <p:spPr/>
+        <p:spPr bwMode="auto"/>
         <p:txBody>
           <a:bodyPr/>
           <a:lstStyle>
@@ -1446,8 +2567,11 @@
             </a:lvl1pPr>
           </a:lstStyle>
           <a:p>
-            <a:r>
-              <a:rPr lang="en-US" smtClean="0"/>
+            <a:pPr>
+              <a:defRPr/>
+            </a:pPr>
+            <a:r>
+              <a:rPr lang="en-US"/>
               <a:t>Click to edit Master title style</a:t>
             </a:r>
             <a:endParaRPr lang="en-US"/>
@@ -1456,7 +2580,7 @@
       </p:sp>
       <p:sp>
         <p:nvSpPr>
-          <p:cNvPr id="3" name="Text Placeholder 2"/>
+          <p:cNvPr id="1801837610" name="Text Placeholder 2"/>
           <p:cNvSpPr>
             <a:spLocks noGrp="1"/>
           </p:cNvSpPr>
@@ -1464,7 +2588,7 @@
             <p:ph type="body" idx="1"/>
           </p:nvPr>
         </p:nvSpPr>
-        <p:spPr>
+        <p:spPr bwMode="auto">
           <a:xfrm>
             <a:off x="457200" y="1535113"/>
             <a:ext cx="4040188" cy="639762"/>
@@ -1511,17 +2635,20 @@
             </a:lvl9pPr>
           </a:lstStyle>
           <a:p>
-            <a:pPr lvl="0"/>
-            <a:r>
-              <a:rPr lang="en-US" smtClean="0"/>
+            <a:pPr lvl="0">
+              <a:defRPr/>
+            </a:pPr>
+            <a:r>
+              <a:rPr lang="en-US"/>
               <a:t>Click to edit Master text styles</a:t>
             </a:r>
-          </a:p>
-        </p:txBody>
-      </p:sp>
-      <p:sp>
-        <p:nvSpPr>
-          <p:cNvPr id="4" name="Content Placeholder 3"/>
+            <a:endParaRPr/>
+          </a:p>
+        </p:txBody>
+      </p:sp>
+      <p:sp>
+        <p:nvSpPr>
+          <p:cNvPr id="1783999540" name="Content Placeholder 3"/>
           <p:cNvSpPr>
             <a:spLocks noGrp="1"/>
           </p:cNvSpPr>
@@ -1529,7 +2656,7 @@
             <p:ph sz="half" idx="2"/>
           </p:nvPr>
         </p:nvSpPr>
-        <p:spPr>
+        <p:spPr bwMode="auto">
           <a:xfrm>
             <a:off x="457200" y="2174875"/>
             <a:ext cx="4040188" cy="3951288"/>
@@ -1567,37 +2694,51 @@
             </a:lvl9pPr>
           </a:lstStyle>
           <a:p>
-            <a:pPr lvl="0"/>
-            <a:r>
-              <a:rPr lang="en-US" smtClean="0"/>
+            <a:pPr lvl="0">
+              <a:defRPr/>
+            </a:pPr>
+            <a:r>
+              <a:rPr lang="en-US"/>
               <a:t>Click to edit Master text styles</a:t>
             </a:r>
-          </a:p>
-          <a:p>
-            <a:pPr lvl="1"/>
-            <a:r>
-              <a:rPr lang="en-US" smtClean="0"/>
+            <a:endParaRPr/>
+          </a:p>
+          <a:p>
+            <a:pPr lvl="1">
+              <a:defRPr/>
+            </a:pPr>
+            <a:r>
+              <a:rPr lang="en-US"/>
               <a:t>Second level</a:t>
             </a:r>
-          </a:p>
-          <a:p>
-            <a:pPr lvl="2"/>
-            <a:r>
-              <a:rPr lang="en-US" smtClean="0"/>
+            <a:endParaRPr/>
+          </a:p>
+          <a:p>
+            <a:pPr lvl="2">
+              <a:defRPr/>
+            </a:pPr>
+            <a:r>
+              <a:rPr lang="en-US"/>
               <a:t>Third level</a:t>
             </a:r>
-          </a:p>
-          <a:p>
-            <a:pPr lvl="3"/>
-            <a:r>
-              <a:rPr lang="en-US" smtClean="0"/>
+            <a:endParaRPr/>
+          </a:p>
+          <a:p>
+            <a:pPr lvl="3">
+              <a:defRPr/>
+            </a:pPr>
+            <a:r>
+              <a:rPr lang="en-US"/>
               <a:t>Fourth level</a:t>
             </a:r>
-          </a:p>
-          <a:p>
-            <a:pPr lvl="4"/>
-            <a:r>
-              <a:rPr lang="en-US" smtClean="0"/>
+            <a:endParaRPr/>
+          </a:p>
+          <a:p>
+            <a:pPr lvl="4">
+              <a:defRPr/>
+            </a:pPr>
+            <a:r>
+              <a:rPr lang="en-US"/>
               <a:t>Fifth level</a:t>
             </a:r>
             <a:endParaRPr lang="en-US"/>
@@ -1606,7 +2747,7 @@
       </p:sp>
       <p:sp>
         <p:nvSpPr>
-          <p:cNvPr id="5" name="Text Placeholder 4"/>
+          <p:cNvPr id="56771339" name="Text Placeholder 4"/>
           <p:cNvSpPr>
             <a:spLocks noGrp="1"/>
           </p:cNvSpPr>
@@ -1614,7 +2755,7 @@
             <p:ph type="body" sz="quarter" idx="3"/>
           </p:nvPr>
         </p:nvSpPr>
-        <p:spPr>
+        <p:spPr bwMode="auto">
           <a:xfrm>
             <a:off x="4645025" y="1535113"/>
             <a:ext cx="4041775" cy="639762"/>
@@ -1661,17 +2802,20 @@
             </a:lvl9pPr>
           </a:lstStyle>
           <a:p>
-            <a:pPr lvl="0"/>
-            <a:r>
-              <a:rPr lang="en-US" smtClean="0"/>
+            <a:pPr lvl="0">
+              <a:defRPr/>
+            </a:pPr>
+            <a:r>
+              <a:rPr lang="en-US"/>
               <a:t>Click to edit Master text styles</a:t>
             </a:r>
-          </a:p>
-        </p:txBody>
-      </p:sp>
-      <p:sp>
-        <p:nvSpPr>
-          <p:cNvPr id="6" name="Content Placeholder 5"/>
+            <a:endParaRPr/>
+          </a:p>
+        </p:txBody>
+      </p:sp>
+      <p:sp>
+        <p:nvSpPr>
+          <p:cNvPr id="1048559986" name="Content Placeholder 5"/>
           <p:cNvSpPr>
             <a:spLocks noGrp="1"/>
           </p:cNvSpPr>
@@ -1679,7 +2823,7 @@
             <p:ph sz="quarter" idx="4"/>
           </p:nvPr>
         </p:nvSpPr>
-        <p:spPr>
+        <p:spPr bwMode="auto">
           <a:xfrm>
             <a:off x="4645025" y="2174875"/>
             <a:ext cx="4041775" cy="3951288"/>
@@ -1717,37 +2861,51 @@
             </a:lvl9pPr>
           </a:lstStyle>
           <a:p>
-            <a:pPr lvl="0"/>
-            <a:r>
-              <a:rPr lang="en-US" smtClean="0"/>
+            <a:pPr lvl="0">
+              <a:defRPr/>
+            </a:pPr>
+            <a:r>
+              <a:rPr lang="en-US"/>
               <a:t>Click to edit Master text styles</a:t>
             </a:r>
-          </a:p>
-          <a:p>
-            <a:pPr lvl="1"/>
-            <a:r>
-              <a:rPr lang="en-US" smtClean="0"/>
+            <a:endParaRPr/>
+          </a:p>
+          <a:p>
+            <a:pPr lvl="1">
+              <a:defRPr/>
+            </a:pPr>
+            <a:r>
+              <a:rPr lang="en-US"/>
               <a:t>Second level</a:t>
             </a:r>
-          </a:p>
-          <a:p>
-            <a:pPr lvl="2"/>
-            <a:r>
-              <a:rPr lang="en-US" smtClean="0"/>
+            <a:endParaRPr/>
+          </a:p>
+          <a:p>
+            <a:pPr lvl="2">
+              <a:defRPr/>
+            </a:pPr>
+            <a:r>
+              <a:rPr lang="en-US"/>
               <a:t>Third level</a:t>
             </a:r>
-          </a:p>
-          <a:p>
-            <a:pPr lvl="3"/>
-            <a:r>
-              <a:rPr lang="en-US" smtClean="0"/>
+            <a:endParaRPr/>
+          </a:p>
+          <a:p>
+            <a:pPr lvl="3">
+              <a:defRPr/>
+            </a:pPr>
+            <a:r>
+              <a:rPr lang="en-US"/>
               <a:t>Fourth level</a:t>
             </a:r>
-          </a:p>
-          <a:p>
-            <a:pPr lvl="4"/>
-            <a:r>
-              <a:rPr lang="en-US" smtClean="0"/>
+            <a:endParaRPr/>
+          </a:p>
+          <a:p>
+            <a:pPr lvl="4">
+              <a:defRPr/>
+            </a:pPr>
+            <a:r>
+              <a:rPr lang="en-US"/>
               <a:t>Fifth level</a:t>
             </a:r>
             <a:endParaRPr lang="en-US"/>
@@ -1756,7 +2914,7 @@
       </p:sp>
       <p:sp>
         <p:nvSpPr>
-          <p:cNvPr id="7" name="Date Placeholder 6"/>
+          <p:cNvPr id="1503421700" name="Date Placeholder 6"/>
           <p:cNvSpPr>
             <a:spLocks noGrp="1"/>
           </p:cNvSpPr>
@@ -1764,13 +2922,16 @@
             <p:ph type="dt" sz="half" idx="10"/>
           </p:nvPr>
         </p:nvSpPr>
-        <p:spPr/>
-        <p:txBody>
-          <a:bodyPr/>
-          <a:lstStyle/>
-          <a:p>
+        <p:spPr bwMode="auto"/>
+        <p:txBody>
+          <a:bodyPr/>
+          <a:lstStyle/>
+          <a:p>
+            <a:pPr>
+              <a:defRPr/>
+            </a:pPr>
             <a:fld id="{5BCAD085-E8A6-8845-BD4E-CB4CCA059FC4}" type="datetimeFigureOut">
-              <a:rPr lang="en-US" smtClean="0"/>
+              <a:rPr lang="en-US"/>
               <a:t>1/27/13</a:t>
             </a:fld>
             <a:endParaRPr lang="en-US"/>
@@ -1779,7 +2940,7 @@
       </p:sp>
       <p:sp>
         <p:nvSpPr>
-          <p:cNvPr id="8" name="Footer Placeholder 7"/>
+          <p:cNvPr id="60506908" name="Footer Placeholder 7"/>
           <p:cNvSpPr>
             <a:spLocks noGrp="1"/>
           </p:cNvSpPr>
@@ -1787,18 +2948,21 @@
             <p:ph type="ftr" sz="quarter" idx="11"/>
           </p:nvPr>
         </p:nvSpPr>
-        <p:spPr/>
-        <p:txBody>
-          <a:bodyPr/>
-          <a:lstStyle/>
-          <a:p>
+        <p:spPr bwMode="auto"/>
+        <p:txBody>
+          <a:bodyPr/>
+          <a:lstStyle/>
+          <a:p>
+            <a:pPr>
+              <a:defRPr/>
+            </a:pPr>
             <a:endParaRPr lang="en-US"/>
           </a:p>
         </p:txBody>
       </p:sp>
       <p:sp>
         <p:nvSpPr>
-          <p:cNvPr id="9" name="Slide Number Placeholder 8"/>
+          <p:cNvPr id="68932510" name="Slide Number Placeholder 8"/>
           <p:cNvSpPr>
             <a:spLocks noGrp="1"/>
           </p:cNvSpPr>
@@ -1806,13 +2970,16 @@
             <p:ph type="sldNum" sz="quarter" idx="12"/>
           </p:nvPr>
         </p:nvSpPr>
-        <p:spPr/>
-        <p:txBody>
-          <a:bodyPr/>
-          <a:lstStyle/>
-          <a:p>
+        <p:spPr bwMode="auto"/>
+        <p:txBody>
+          <a:bodyPr/>
+          <a:lstStyle/>
+          <a:p>
+            <a:pPr>
+              <a:defRPr/>
+            </a:pPr>
             <a:fld id="{C1FF6DA9-008F-8B48-92A6-B652298478BF}" type="slidenum">
-              <a:rPr lang="en-US" smtClean="0"/>
+              <a:rPr lang="en-US"/>
               <a:t>‹#›</a:t>
             </a:fld>
             <a:endParaRPr lang="en-US"/>
@@ -1820,11 +2987,6 @@
         </p:txBody>
       </p:sp>
     </p:spTree>
-    <p:extLst>
-      <p:ext uri="{BB962C8B-B14F-4D97-AF65-F5344CB8AC3E}">
-        <p14:creationId xmlns:p14="http://schemas.microsoft.com/office/powerpoint/2010/main" val="990158736"/>
-      </p:ext>
-    </p:extLst>
   </p:cSld>
   <p:clrMapOvr>
     <a:masterClrMapping/>
@@ -1833,7 +2995,7 @@
 </file>
 
 <file path=ppt/slideLayouts/slideLayout6.xml><?xml version="1.0" encoding="utf-8"?>
-<p:sldLayout xmlns:a="http://schemas.openxmlformats.org/drawingml/2006/main" xmlns:r="http://schemas.openxmlformats.org/officeDocument/2006/relationships" xmlns:p="http://schemas.openxmlformats.org/presentationml/2006/main" type="titleOnly" preserve="1">
+<p:sldLayout xmlns:a="http://schemas.openxmlformats.org/drawingml/2006/main" xmlns:r="http://schemas.openxmlformats.org/officeDocument/2006/relationships" xmlns:p="http://schemas.openxmlformats.org/presentationml/2006/main" xmlns:m="http://schemas.openxmlformats.org/officeDocument/2006/math" xmlns:w="http://schemas.openxmlformats.org/wordprocessingml/2006/main" matchingName="" preserve="1" showMasterPhAnim="0" showMasterSp="1" type="titleOnly" userDrawn="1">
   <p:cSld name="Title Only">
     <p:spTree>
       <p:nvGrpSpPr>
@@ -1841,7 +3003,7 @@
         <p:cNvGrpSpPr/>
         <p:nvPr/>
       </p:nvGrpSpPr>
-      <p:grpSpPr>
+      <p:grpSpPr bwMode="auto">
         <a:xfrm>
           <a:off x="0" y="0"/>
           <a:ext cx="0" cy="0"/>
@@ -1851,7 +3013,7 @@
       </p:grpSpPr>
       <p:sp>
         <p:nvSpPr>
-          <p:cNvPr id="2" name="Title 1"/>
+          <p:cNvPr id="612323218" name="Title 1"/>
           <p:cNvSpPr>
             <a:spLocks noGrp="1"/>
           </p:cNvSpPr>
@@ -1859,13 +3021,16 @@
             <p:ph type="title"/>
           </p:nvPr>
         </p:nvSpPr>
-        <p:spPr/>
-        <p:txBody>
-          <a:bodyPr/>
-          <a:lstStyle/>
-          <a:p>
-            <a:r>
-              <a:rPr lang="en-US" smtClean="0"/>
+        <p:spPr bwMode="auto"/>
+        <p:txBody>
+          <a:bodyPr/>
+          <a:lstStyle/>
+          <a:p>
+            <a:pPr>
+              <a:defRPr/>
+            </a:pPr>
+            <a:r>
+              <a:rPr lang="en-US"/>
               <a:t>Click to edit Master title style</a:t>
             </a:r>
             <a:endParaRPr lang="en-US"/>
@@ -1874,7 +3039,7 @@
       </p:sp>
       <p:sp>
         <p:nvSpPr>
-          <p:cNvPr id="3" name="Date Placeholder 2"/>
+          <p:cNvPr id="661299286" name="Date Placeholder 2"/>
           <p:cNvSpPr>
             <a:spLocks noGrp="1"/>
           </p:cNvSpPr>
@@ -1882,13 +3047,16 @@
             <p:ph type="dt" sz="half" idx="10"/>
           </p:nvPr>
         </p:nvSpPr>
-        <p:spPr/>
-        <p:txBody>
-          <a:bodyPr/>
-          <a:lstStyle/>
-          <a:p>
+        <p:spPr bwMode="auto"/>
+        <p:txBody>
+          <a:bodyPr/>
+          <a:lstStyle/>
+          <a:p>
+            <a:pPr>
+              <a:defRPr/>
+            </a:pPr>
             <a:fld id="{5BCAD085-E8A6-8845-BD4E-CB4CCA059FC4}" type="datetimeFigureOut">
-              <a:rPr lang="en-US" smtClean="0"/>
+              <a:rPr lang="en-US"/>
               <a:t>1/27/13</a:t>
             </a:fld>
             <a:endParaRPr lang="en-US"/>
@@ -1897,7 +3065,7 @@
       </p:sp>
       <p:sp>
         <p:nvSpPr>
-          <p:cNvPr id="4" name="Footer Placeholder 3"/>
+          <p:cNvPr id="529230257" name="Footer Placeholder 3"/>
           <p:cNvSpPr>
             <a:spLocks noGrp="1"/>
           </p:cNvSpPr>
@@ -1905,18 +3073,21 @@
             <p:ph type="ftr" sz="quarter" idx="11"/>
           </p:nvPr>
         </p:nvSpPr>
-        <p:spPr/>
-        <p:txBody>
-          <a:bodyPr/>
-          <a:lstStyle/>
-          <a:p>
+        <p:spPr bwMode="auto"/>
+        <p:txBody>
+          <a:bodyPr/>
+          <a:lstStyle/>
+          <a:p>
+            <a:pPr>
+              <a:defRPr/>
+            </a:pPr>
             <a:endParaRPr lang="en-US"/>
           </a:p>
         </p:txBody>
       </p:sp>
       <p:sp>
         <p:nvSpPr>
-          <p:cNvPr id="5" name="Slide Number Placeholder 4"/>
+          <p:cNvPr id="863999818" name="Slide Number Placeholder 4"/>
           <p:cNvSpPr>
             <a:spLocks noGrp="1"/>
           </p:cNvSpPr>
@@ -1924,13 +3095,16 @@
             <p:ph type="sldNum" sz="quarter" idx="12"/>
           </p:nvPr>
         </p:nvSpPr>
-        <p:spPr/>
-        <p:txBody>
-          <a:bodyPr/>
-          <a:lstStyle/>
-          <a:p>
+        <p:spPr bwMode="auto"/>
+        <p:txBody>
+          <a:bodyPr/>
+          <a:lstStyle/>
+          <a:p>
+            <a:pPr>
+              <a:defRPr/>
+            </a:pPr>
             <a:fld id="{C1FF6DA9-008F-8B48-92A6-B652298478BF}" type="slidenum">
-              <a:rPr lang="en-US" smtClean="0"/>
+              <a:rPr lang="en-US"/>
               <a:t>‹#›</a:t>
             </a:fld>
             <a:endParaRPr lang="en-US"/>
@@ -1938,11 +3112,6 @@
         </p:txBody>
       </p:sp>
     </p:spTree>
-    <p:extLst>
-      <p:ext uri="{BB962C8B-B14F-4D97-AF65-F5344CB8AC3E}">
-        <p14:creationId xmlns:p14="http://schemas.microsoft.com/office/powerpoint/2010/main" val="727027711"/>
-      </p:ext>
-    </p:extLst>
   </p:cSld>
   <p:clrMapOvr>
     <a:masterClrMapping/>
@@ -1951,7 +3120,7 @@
 </file>
 
 <file path=ppt/slideLayouts/slideLayout7.xml><?xml version="1.0" encoding="utf-8"?>
-<p:sldLayout xmlns:a="http://schemas.openxmlformats.org/drawingml/2006/main" xmlns:r="http://schemas.openxmlformats.org/officeDocument/2006/relationships" xmlns:p="http://schemas.openxmlformats.org/presentationml/2006/main" type="blank" preserve="1">
+<p:sldLayout xmlns:a="http://schemas.openxmlformats.org/drawingml/2006/main" xmlns:r="http://schemas.openxmlformats.org/officeDocument/2006/relationships" xmlns:p="http://schemas.openxmlformats.org/presentationml/2006/main" xmlns:m="http://schemas.openxmlformats.org/officeDocument/2006/math" xmlns:w="http://schemas.openxmlformats.org/wordprocessingml/2006/main" matchingName="" preserve="1" showMasterPhAnim="0" showMasterSp="1" type="blank" userDrawn="1">
   <p:cSld name="Blank">
     <p:spTree>
       <p:nvGrpSpPr>
@@ -1959,7 +3128,7 @@
         <p:cNvGrpSpPr/>
         <p:nvPr/>
       </p:nvGrpSpPr>
-      <p:grpSpPr>
+      <p:grpSpPr bwMode="auto">
         <a:xfrm>
           <a:off x="0" y="0"/>
           <a:ext cx="0" cy="0"/>
@@ -1969,7 +3138,7 @@
       </p:grpSpPr>
       <p:sp>
         <p:nvSpPr>
-          <p:cNvPr id="2" name="Date Placeholder 1"/>
+          <p:cNvPr id="274002203" name="Date Placeholder 1"/>
           <p:cNvSpPr>
             <a:spLocks noGrp="1"/>
           </p:cNvSpPr>
@@ -1977,13 +3146,16 @@
             <p:ph type="dt" sz="half" idx="10"/>
           </p:nvPr>
         </p:nvSpPr>
-        <p:spPr/>
-        <p:txBody>
-          <a:bodyPr/>
-          <a:lstStyle/>
-          <a:p>
+        <p:spPr bwMode="auto"/>
+        <p:txBody>
+          <a:bodyPr/>
+          <a:lstStyle/>
+          <a:p>
+            <a:pPr>
+              <a:defRPr/>
+            </a:pPr>
             <a:fld id="{5BCAD085-E8A6-8845-BD4E-CB4CCA059FC4}" type="datetimeFigureOut">
-              <a:rPr lang="en-US" smtClean="0"/>
+              <a:rPr lang="en-US"/>
               <a:t>1/27/13</a:t>
             </a:fld>
             <a:endParaRPr lang="en-US"/>
@@ -1992,7 +3164,7 @@
       </p:sp>
       <p:sp>
         <p:nvSpPr>
-          <p:cNvPr id="3" name="Footer Placeholder 2"/>
+          <p:cNvPr id="1578078926" name="Footer Placeholder 2"/>
           <p:cNvSpPr>
             <a:spLocks noGrp="1"/>
           </p:cNvSpPr>
@@ -2000,18 +3172,21 @@
             <p:ph type="ftr" sz="quarter" idx="11"/>
           </p:nvPr>
         </p:nvSpPr>
-        <p:spPr/>
-        <p:txBody>
-          <a:bodyPr/>
-          <a:lstStyle/>
-          <a:p>
+        <p:spPr bwMode="auto"/>
+        <p:txBody>
+          <a:bodyPr/>
+          <a:lstStyle/>
+          <a:p>
+            <a:pPr>
+              <a:defRPr/>
+            </a:pPr>
             <a:endParaRPr lang="en-US"/>
           </a:p>
         </p:txBody>
       </p:sp>
       <p:sp>
         <p:nvSpPr>
-          <p:cNvPr id="4" name="Slide Number Placeholder 3"/>
+          <p:cNvPr id="1226467653" name="Slide Number Placeholder 3"/>
           <p:cNvSpPr>
             <a:spLocks noGrp="1"/>
           </p:cNvSpPr>
@@ -2019,13 +3194,16 @@
             <p:ph type="sldNum" sz="quarter" idx="12"/>
           </p:nvPr>
         </p:nvSpPr>
-        <p:spPr/>
-        <p:txBody>
-          <a:bodyPr/>
-          <a:lstStyle/>
-          <a:p>
+        <p:spPr bwMode="auto"/>
+        <p:txBody>
+          <a:bodyPr/>
+          <a:lstStyle/>
+          <a:p>
+            <a:pPr>
+              <a:defRPr/>
+            </a:pPr>
             <a:fld id="{C1FF6DA9-008F-8B48-92A6-B652298478BF}" type="slidenum">
-              <a:rPr lang="en-US" smtClean="0"/>
+              <a:rPr lang="en-US"/>
               <a:t>‹#›</a:t>
             </a:fld>
             <a:endParaRPr lang="en-US"/>
@@ -2033,11 +3211,6 @@
         </p:txBody>
       </p:sp>
     </p:spTree>
-    <p:extLst>
-      <p:ext uri="{BB962C8B-B14F-4D97-AF65-F5344CB8AC3E}">
-        <p14:creationId xmlns:p14="http://schemas.microsoft.com/office/powerpoint/2010/main" val="1212999818"/>
-      </p:ext>
-    </p:extLst>
   </p:cSld>
   <p:clrMapOvr>
     <a:masterClrMapping/>
@@ -2046,7 +3219,7 @@
 </file>
 
 <file path=ppt/slideLayouts/slideLayout8.xml><?xml version="1.0" encoding="utf-8"?>
-<p:sldLayout xmlns:a="http://schemas.openxmlformats.org/drawingml/2006/main" xmlns:r="http://schemas.openxmlformats.org/officeDocument/2006/relationships" xmlns:p="http://schemas.openxmlformats.org/presentationml/2006/main" type="objTx" preserve="1">
+<p:sldLayout xmlns:a="http://schemas.openxmlformats.org/drawingml/2006/main" xmlns:r="http://schemas.openxmlformats.org/officeDocument/2006/relationships" xmlns:p="http://schemas.openxmlformats.org/presentationml/2006/main" xmlns:m="http://schemas.openxmlformats.org/officeDocument/2006/math" xmlns:w="http://schemas.openxmlformats.org/wordprocessingml/2006/main" matchingName="" preserve="1" showMasterPhAnim="0" showMasterSp="1" type="objTx" userDrawn="1">
   <p:cSld name="Content with Caption">
     <p:spTree>
       <p:nvGrpSpPr>
@@ -2054,7 +3227,7 @@
         <p:cNvGrpSpPr/>
         <p:nvPr/>
       </p:nvGrpSpPr>
-      <p:grpSpPr>
+      <p:grpSpPr bwMode="auto">
         <a:xfrm>
           <a:off x="0" y="0"/>
           <a:ext cx="0" cy="0"/>
@@ -2064,7 +3237,7 @@
       </p:grpSpPr>
       <p:sp>
         <p:nvSpPr>
-          <p:cNvPr id="2" name="Title 1"/>
+          <p:cNvPr id="735620402" name="Title 1"/>
           <p:cNvSpPr>
             <a:spLocks noGrp="1"/>
           </p:cNvSpPr>
@@ -2072,7 +3245,7 @@
             <p:ph type="title"/>
           </p:nvPr>
         </p:nvSpPr>
-        <p:spPr>
+        <p:spPr bwMode="auto">
           <a:xfrm>
             <a:off x="457200" y="273050"/>
             <a:ext cx="3008313" cy="1162050"/>
@@ -2086,8 +3259,11 @@
             </a:lvl1pPr>
           </a:lstStyle>
           <a:p>
-            <a:r>
-              <a:rPr lang="en-US" smtClean="0"/>
+            <a:pPr>
+              <a:defRPr/>
+            </a:pPr>
+            <a:r>
+              <a:rPr lang="en-US"/>
               <a:t>Click to edit Master title style</a:t>
             </a:r>
             <a:endParaRPr lang="en-US"/>
@@ -2096,7 +3272,7 @@
       </p:sp>
       <p:sp>
         <p:nvSpPr>
-          <p:cNvPr id="3" name="Content Placeholder 2"/>
+          <p:cNvPr id="467223725" name="Content Placeholder 2"/>
           <p:cNvSpPr>
             <a:spLocks noGrp="1"/>
           </p:cNvSpPr>
@@ -2104,7 +3280,7 @@
             <p:ph idx="1"/>
           </p:nvPr>
         </p:nvSpPr>
-        <p:spPr>
+        <p:spPr bwMode="auto">
           <a:xfrm>
             <a:off x="3575050" y="273050"/>
             <a:ext cx="5111750" cy="5853113"/>
@@ -2142,37 +3318,51 @@
             </a:lvl9pPr>
           </a:lstStyle>
           <a:p>
-            <a:pPr lvl="0"/>
-            <a:r>
-              <a:rPr lang="en-US" smtClean="0"/>
+            <a:pPr lvl="0">
+              <a:defRPr/>
+            </a:pPr>
+            <a:r>
+              <a:rPr lang="en-US"/>
               <a:t>Click to edit Master text styles</a:t>
             </a:r>
-          </a:p>
-          <a:p>
-            <a:pPr lvl="1"/>
-            <a:r>
-              <a:rPr lang="en-US" smtClean="0"/>
+            <a:endParaRPr/>
+          </a:p>
+          <a:p>
+            <a:pPr lvl="1">
+              <a:defRPr/>
+            </a:pPr>
+            <a:r>
+              <a:rPr lang="en-US"/>
               <a:t>Second level</a:t>
             </a:r>
-          </a:p>
-          <a:p>
-            <a:pPr lvl="2"/>
-            <a:r>
-              <a:rPr lang="en-US" smtClean="0"/>
+            <a:endParaRPr/>
+          </a:p>
+          <a:p>
+            <a:pPr lvl="2">
+              <a:defRPr/>
+            </a:pPr>
+            <a:r>
+              <a:rPr lang="en-US"/>
               <a:t>Third level</a:t>
             </a:r>
-          </a:p>
-          <a:p>
-            <a:pPr lvl="3"/>
-            <a:r>
-              <a:rPr lang="en-US" smtClean="0"/>
+            <a:endParaRPr/>
+          </a:p>
+          <a:p>
+            <a:pPr lvl="3">
+              <a:defRPr/>
+            </a:pPr>
+            <a:r>
+              <a:rPr lang="en-US"/>
               <a:t>Fourth level</a:t>
             </a:r>
-          </a:p>
-          <a:p>
-            <a:pPr lvl="4"/>
-            <a:r>
-              <a:rPr lang="en-US" smtClean="0"/>
+            <a:endParaRPr/>
+          </a:p>
+          <a:p>
+            <a:pPr lvl="4">
+              <a:defRPr/>
+            </a:pPr>
+            <a:r>
+              <a:rPr lang="en-US"/>
               <a:t>Fifth level</a:t>
             </a:r>
             <a:endParaRPr lang="en-US"/>
@@ -2181,7 +3371,7 @@
       </p:sp>
       <p:sp>
         <p:nvSpPr>
-          <p:cNvPr id="4" name="Text Placeholder 3"/>
+          <p:cNvPr id="973781030" name="Text Placeholder 3"/>
           <p:cNvSpPr>
             <a:spLocks noGrp="1"/>
           </p:cNvSpPr>
@@ -2189,7 +3379,7 @@
             <p:ph type="body" sz="half" idx="2"/>
           </p:nvPr>
         </p:nvSpPr>
-        <p:spPr>
+        <p:spPr bwMode="auto">
           <a:xfrm>
             <a:off x="457200" y="1435100"/>
             <a:ext cx="3008313" cy="4691063"/>
@@ -2236,17 +3426,20 @@
             </a:lvl9pPr>
           </a:lstStyle>
           <a:p>
-            <a:pPr lvl="0"/>
-            <a:r>
-              <a:rPr lang="en-US" smtClean="0"/>
+            <a:pPr lvl="0">
+              <a:defRPr/>
+            </a:pPr>
+            <a:r>
+              <a:rPr lang="en-US"/>
               <a:t>Click to edit Master text styles</a:t>
             </a:r>
-          </a:p>
-        </p:txBody>
-      </p:sp>
-      <p:sp>
-        <p:nvSpPr>
-          <p:cNvPr id="5" name="Date Placeholder 4"/>
+            <a:endParaRPr/>
+          </a:p>
+        </p:txBody>
+      </p:sp>
+      <p:sp>
+        <p:nvSpPr>
+          <p:cNvPr id="2083935213" name="Date Placeholder 4"/>
           <p:cNvSpPr>
             <a:spLocks noGrp="1"/>
           </p:cNvSpPr>
@@ -2254,13 +3447,16 @@
             <p:ph type="dt" sz="half" idx="10"/>
           </p:nvPr>
         </p:nvSpPr>
-        <p:spPr/>
-        <p:txBody>
-          <a:bodyPr/>
-          <a:lstStyle/>
-          <a:p>
+        <p:spPr bwMode="auto"/>
+        <p:txBody>
+          <a:bodyPr/>
+          <a:lstStyle/>
+          <a:p>
+            <a:pPr>
+              <a:defRPr/>
+            </a:pPr>
             <a:fld id="{5BCAD085-E8A6-8845-BD4E-CB4CCA059FC4}" type="datetimeFigureOut">
-              <a:rPr lang="en-US" smtClean="0"/>
+              <a:rPr lang="en-US"/>
               <a:t>1/27/13</a:t>
             </a:fld>
             <a:endParaRPr lang="en-US"/>
@@ -2269,7 +3465,7 @@
       </p:sp>
       <p:sp>
         <p:nvSpPr>
-          <p:cNvPr id="6" name="Footer Placeholder 5"/>
+          <p:cNvPr id="63687806" name="Footer Placeholder 5"/>
           <p:cNvSpPr>
             <a:spLocks noGrp="1"/>
           </p:cNvSpPr>
@@ -2277,18 +3473,21 @@
             <p:ph type="ftr" sz="quarter" idx="11"/>
           </p:nvPr>
         </p:nvSpPr>
-        <p:spPr/>
-        <p:txBody>
-          <a:bodyPr/>
-          <a:lstStyle/>
-          <a:p>
+        <p:spPr bwMode="auto"/>
+        <p:txBody>
+          <a:bodyPr/>
+          <a:lstStyle/>
+          <a:p>
+            <a:pPr>
+              <a:defRPr/>
+            </a:pPr>
             <a:endParaRPr lang="en-US"/>
           </a:p>
         </p:txBody>
       </p:sp>
       <p:sp>
         <p:nvSpPr>
-          <p:cNvPr id="7" name="Slide Number Placeholder 6"/>
+          <p:cNvPr id="473861028" name="Slide Number Placeholder 6"/>
           <p:cNvSpPr>
             <a:spLocks noGrp="1"/>
           </p:cNvSpPr>
@@ -2296,13 +3495,16 @@
             <p:ph type="sldNum" sz="quarter" idx="12"/>
           </p:nvPr>
         </p:nvSpPr>
-        <p:spPr/>
-        <p:txBody>
-          <a:bodyPr/>
-          <a:lstStyle/>
-          <a:p>
+        <p:spPr bwMode="auto"/>
+        <p:txBody>
+          <a:bodyPr/>
+          <a:lstStyle/>
+          <a:p>
+            <a:pPr>
+              <a:defRPr/>
+            </a:pPr>
             <a:fld id="{C1FF6DA9-008F-8B48-92A6-B652298478BF}" type="slidenum">
-              <a:rPr lang="en-US" smtClean="0"/>
+              <a:rPr lang="en-US"/>
               <a:t>‹#›</a:t>
             </a:fld>
             <a:endParaRPr lang="en-US"/>
@@ -2310,11 +3512,6 @@
         </p:txBody>
       </p:sp>
     </p:spTree>
-    <p:extLst>
-      <p:ext uri="{BB962C8B-B14F-4D97-AF65-F5344CB8AC3E}">
-        <p14:creationId xmlns:p14="http://schemas.microsoft.com/office/powerpoint/2010/main" val="1840726560"/>
-      </p:ext>
-    </p:extLst>
   </p:cSld>
   <p:clrMapOvr>
     <a:masterClrMapping/>
@@ -2323,7 +3520,7 @@
 </file>
 
 <file path=ppt/slideLayouts/slideLayout9.xml><?xml version="1.0" encoding="utf-8"?>
-<p:sldLayout xmlns:a="http://schemas.openxmlformats.org/drawingml/2006/main" xmlns:r="http://schemas.openxmlformats.org/officeDocument/2006/relationships" xmlns:p="http://schemas.openxmlformats.org/presentationml/2006/main" type="picTx" preserve="1">
+<p:sldLayout xmlns:a="http://schemas.openxmlformats.org/drawingml/2006/main" xmlns:r="http://schemas.openxmlformats.org/officeDocument/2006/relationships" xmlns:p="http://schemas.openxmlformats.org/presentationml/2006/main" xmlns:m="http://schemas.openxmlformats.org/officeDocument/2006/math" xmlns:w="http://schemas.openxmlformats.org/wordprocessingml/2006/main" matchingName="" preserve="1" showMasterPhAnim="0" showMasterSp="1" type="picTx" userDrawn="1">
   <p:cSld name="Picture with Caption">
     <p:spTree>
       <p:nvGrpSpPr>
@@ -2331,7 +3528,7 @@
         <p:cNvGrpSpPr/>
         <p:nvPr/>
       </p:nvGrpSpPr>
-      <p:grpSpPr>
+      <p:grpSpPr bwMode="auto">
         <a:xfrm>
           <a:off x="0" y="0"/>
           <a:ext cx="0" cy="0"/>
@@ -2341,7 +3538,7 @@
       </p:grpSpPr>
       <p:sp>
         <p:nvSpPr>
-          <p:cNvPr id="2" name="Title 1"/>
+          <p:cNvPr id="627696991" name="Title 1"/>
           <p:cNvSpPr>
             <a:spLocks noGrp="1"/>
           </p:cNvSpPr>
@@ -2349,7 +3546,7 @@
             <p:ph type="title"/>
           </p:nvPr>
         </p:nvSpPr>
-        <p:spPr>
+        <p:spPr bwMode="auto">
           <a:xfrm>
             <a:off x="1792288" y="4800600"/>
             <a:ext cx="5486400" cy="566738"/>
@@ -2363,8 +3560,11 @@
             </a:lvl1pPr>
           </a:lstStyle>
           <a:p>
-            <a:r>
-              <a:rPr lang="en-US" smtClean="0"/>
+            <a:pPr>
+              <a:defRPr/>
+            </a:pPr>
+            <a:r>
+              <a:rPr lang="en-US"/>
               <a:t>Click to edit Master title style</a:t>
             </a:r>
             <a:endParaRPr lang="en-US"/>
@@ -2373,7 +3573,7 @@
       </p:sp>
       <p:sp>
         <p:nvSpPr>
-          <p:cNvPr id="3" name="Picture Placeholder 2"/>
+          <p:cNvPr id="1537507604" name="Picture Placeholder 2"/>
           <p:cNvSpPr>
             <a:spLocks noGrp="1"/>
           </p:cNvSpPr>
@@ -2381,7 +3581,7 @@
             <p:ph type="pic" idx="1"/>
           </p:nvPr>
         </p:nvSpPr>
-        <p:spPr>
+        <p:spPr bwMode="auto">
           <a:xfrm>
             <a:off x="1792288" y="612775"/>
             <a:ext cx="5486400" cy="4114800"/>
@@ -2428,13 +3628,16 @@
             </a:lvl9pPr>
           </a:lstStyle>
           <a:p>
+            <a:pPr>
+              <a:defRPr/>
+            </a:pPr>
             <a:endParaRPr lang="en-US"/>
           </a:p>
         </p:txBody>
       </p:sp>
       <p:sp>
         <p:nvSpPr>
-          <p:cNvPr id="4" name="Text Placeholder 3"/>
+          <p:cNvPr id="990164711" name="Text Placeholder 3"/>
           <p:cNvSpPr>
             <a:spLocks noGrp="1"/>
           </p:cNvSpPr>
@@ -2442,7 +3645,7 @@
             <p:ph type="body" sz="half" idx="2"/>
           </p:nvPr>
         </p:nvSpPr>
-        <p:spPr>
+        <p:spPr bwMode="auto">
           <a:xfrm>
             <a:off x="1792288" y="5367338"/>
             <a:ext cx="5486400" cy="804862"/>
@@ -2489,17 +3692,20 @@
             </a:lvl9pPr>
           </a:lstStyle>
           <a:p>
-            <a:pPr lvl="0"/>
-            <a:r>
-              <a:rPr lang="en-US" smtClean="0"/>
+            <a:pPr lvl="0">
+              <a:defRPr/>
+            </a:pPr>
+            <a:r>
+              <a:rPr lang="en-US"/>
               <a:t>Click to edit Master text styles</a:t>
             </a:r>
-          </a:p>
-        </p:txBody>
-      </p:sp>
-      <p:sp>
-        <p:nvSpPr>
-          <p:cNvPr id="5" name="Date Placeholder 4"/>
+            <a:endParaRPr/>
+          </a:p>
+        </p:txBody>
+      </p:sp>
+      <p:sp>
+        <p:nvSpPr>
+          <p:cNvPr id="599408889" name="Date Placeholder 4"/>
           <p:cNvSpPr>
             <a:spLocks noGrp="1"/>
           </p:cNvSpPr>
@@ -2507,13 +3713,16 @@
             <p:ph type="dt" sz="half" idx="10"/>
           </p:nvPr>
         </p:nvSpPr>
-        <p:spPr/>
-        <p:txBody>
-          <a:bodyPr/>
-          <a:lstStyle/>
-          <a:p>
+        <p:spPr bwMode="auto"/>
+        <p:txBody>
+          <a:bodyPr/>
+          <a:lstStyle/>
+          <a:p>
+            <a:pPr>
+              <a:defRPr/>
+            </a:pPr>
             <a:fld id="{5BCAD085-E8A6-8845-BD4E-CB4CCA059FC4}" type="datetimeFigureOut">
-              <a:rPr lang="en-US" smtClean="0"/>
+              <a:rPr lang="en-US"/>
               <a:t>1/27/13</a:t>
             </a:fld>
             <a:endParaRPr lang="en-US"/>
@@ -2522,7 +3731,7 @@
       </p:sp>
       <p:sp>
         <p:nvSpPr>
-          <p:cNvPr id="6" name="Footer Placeholder 5"/>
+          <p:cNvPr id="1545485950" name="Footer Placeholder 5"/>
           <p:cNvSpPr>
             <a:spLocks noGrp="1"/>
           </p:cNvSpPr>
@@ -2530,18 +3739,21 @@
             <p:ph type="ftr" sz="quarter" idx="11"/>
           </p:nvPr>
         </p:nvSpPr>
-        <p:spPr/>
-        <p:txBody>
-          <a:bodyPr/>
-          <a:lstStyle/>
-          <a:p>
+        <p:spPr bwMode="auto"/>
+        <p:txBody>
+          <a:bodyPr/>
+          <a:lstStyle/>
+          <a:p>
+            <a:pPr>
+              <a:defRPr/>
+            </a:pPr>
             <a:endParaRPr lang="en-US"/>
           </a:p>
         </p:txBody>
       </p:sp>
       <p:sp>
         <p:nvSpPr>
-          <p:cNvPr id="7" name="Slide Number Placeholder 6"/>
+          <p:cNvPr id="1430968607" name="Slide Number Placeholder 6"/>
           <p:cNvSpPr>
             <a:spLocks noGrp="1"/>
           </p:cNvSpPr>
@@ -2549,13 +3761,16 @@
             <p:ph type="sldNum" sz="quarter" idx="12"/>
           </p:nvPr>
         </p:nvSpPr>
-        <p:spPr/>
-        <p:txBody>
-          <a:bodyPr/>
-          <a:lstStyle/>
-          <a:p>
+        <p:spPr bwMode="auto"/>
+        <p:txBody>
+          <a:bodyPr/>
+          <a:lstStyle/>
+          <a:p>
+            <a:pPr>
+              <a:defRPr/>
+            </a:pPr>
             <a:fld id="{C1FF6DA9-008F-8B48-92A6-B652298478BF}" type="slidenum">
-              <a:rPr lang="en-US" smtClean="0"/>
+              <a:rPr lang="en-US"/>
               <a:t>‹#›</a:t>
             </a:fld>
             <a:endParaRPr lang="en-US"/>
@@ -2563,11 +3778,6 @@
         </p:txBody>
       </p:sp>
     </p:spTree>
-    <p:extLst>
-      <p:ext uri="{BB962C8B-B14F-4D97-AF65-F5344CB8AC3E}">
-        <p14:creationId xmlns:p14="http://schemas.microsoft.com/office/powerpoint/2010/main" val="3889236939"/>
-      </p:ext>
-    </p:extLst>
   </p:cSld>
   <p:clrMapOvr>
     <a:masterClrMapping/>
@@ -2576,8 +3786,8 @@
 </file>
 
 <file path=ppt/slideMasters/slideMaster1.xml><?xml version="1.0" encoding="utf-8"?>
-<p:sldMaster xmlns:a="http://schemas.openxmlformats.org/drawingml/2006/main" xmlns:r="http://schemas.openxmlformats.org/officeDocument/2006/relationships" xmlns:p="http://schemas.openxmlformats.org/presentationml/2006/main">
-  <p:cSld>
+<p:sldMaster xmlns:a="http://schemas.openxmlformats.org/drawingml/2006/main" xmlns:r="http://schemas.openxmlformats.org/officeDocument/2006/relationships" xmlns:p="http://schemas.openxmlformats.org/presentationml/2006/main" xmlns:m="http://schemas.openxmlformats.org/officeDocument/2006/math" xmlns:w="http://schemas.openxmlformats.org/wordprocessingml/2006/main" preserve="0">
+  <p:cSld name="">
     <p:bg>
       <p:bgRef idx="1001">
         <a:schemeClr val="bg1"/>
@@ -2589,7 +3799,7 @@
         <p:cNvGrpSpPr/>
         <p:nvPr/>
       </p:nvGrpSpPr>
-      <p:grpSpPr>
+      <p:grpSpPr bwMode="auto">
         <a:xfrm>
           <a:off x="0" y="0"/>
           <a:ext cx="0" cy="0"/>
@@ -2599,7 +3809,7 @@
       </p:grpSpPr>
       <p:sp>
         <p:nvSpPr>
-          <p:cNvPr id="2" name="Title Placeholder 1"/>
+          <p:cNvPr id="100215718" name="Title Placeholder 1"/>
           <p:cNvSpPr>
             <a:spLocks noGrp="1"/>
           </p:cNvSpPr>
@@ -2607,7 +3817,7 @@
             <p:ph type="title"/>
           </p:nvPr>
         </p:nvSpPr>
-        <p:spPr>
+        <p:spPr bwMode="auto">
           <a:xfrm>
             <a:off x="457200" y="274638"/>
             <a:ext cx="8229600" cy="1143000"/>
@@ -2622,8 +3832,11 @@
           </a:bodyPr>
           <a:lstStyle/>
           <a:p>
-            <a:r>
-              <a:rPr lang="en-US" smtClean="0"/>
+            <a:pPr>
+              <a:defRPr/>
+            </a:pPr>
+            <a:r>
+              <a:rPr lang="en-US"/>
               <a:t>Click to edit Master title style</a:t>
             </a:r>
             <a:endParaRPr lang="en-US"/>
@@ -2632,7 +3845,7 @@
       </p:sp>
       <p:sp>
         <p:nvSpPr>
-          <p:cNvPr id="3" name="Text Placeholder 2"/>
+          <p:cNvPr id="984690257" name="Text Placeholder 2"/>
           <p:cNvSpPr>
             <a:spLocks noGrp="1"/>
           </p:cNvSpPr>
@@ -2640,7 +3853,7 @@
             <p:ph type="body" idx="1"/>
           </p:nvPr>
         </p:nvSpPr>
-        <p:spPr>
+        <p:spPr bwMode="auto">
           <a:xfrm>
             <a:off x="457200" y="1600200"/>
             <a:ext cx="8229600" cy="4525963"/>
@@ -2655,37 +3868,51 @@
           </a:bodyPr>
           <a:lstStyle/>
           <a:p>
-            <a:pPr lvl="0"/>
-            <a:r>
-              <a:rPr lang="en-US" smtClean="0"/>
+            <a:pPr lvl="0">
+              <a:defRPr/>
+            </a:pPr>
+            <a:r>
+              <a:rPr lang="en-US"/>
               <a:t>Click to edit Master text styles</a:t>
             </a:r>
-          </a:p>
-          <a:p>
-            <a:pPr lvl="1"/>
-            <a:r>
-              <a:rPr lang="en-US" smtClean="0"/>
+            <a:endParaRPr/>
+          </a:p>
+          <a:p>
+            <a:pPr lvl="1">
+              <a:defRPr/>
+            </a:pPr>
+            <a:r>
+              <a:rPr lang="en-US"/>
               <a:t>Second level</a:t>
             </a:r>
-          </a:p>
-          <a:p>
-            <a:pPr lvl="2"/>
-            <a:r>
-              <a:rPr lang="en-US" smtClean="0"/>
+            <a:endParaRPr/>
+          </a:p>
+          <a:p>
+            <a:pPr lvl="2">
+              <a:defRPr/>
+            </a:pPr>
+            <a:r>
+              <a:rPr lang="en-US"/>
               <a:t>Third level</a:t>
             </a:r>
-          </a:p>
-          <a:p>
-            <a:pPr lvl="3"/>
-            <a:r>
-              <a:rPr lang="en-US" smtClean="0"/>
+            <a:endParaRPr/>
+          </a:p>
+          <a:p>
+            <a:pPr lvl="3">
+              <a:defRPr/>
+            </a:pPr>
+            <a:r>
+              <a:rPr lang="en-US"/>
               <a:t>Fourth level</a:t>
             </a:r>
-          </a:p>
-          <a:p>
-            <a:pPr lvl="4"/>
-            <a:r>
-              <a:rPr lang="en-US" smtClean="0"/>
+            <a:endParaRPr/>
+          </a:p>
+          <a:p>
+            <a:pPr lvl="4">
+              <a:defRPr/>
+            </a:pPr>
+            <a:r>
+              <a:rPr lang="en-US"/>
               <a:t>Fifth level</a:t>
             </a:r>
             <a:endParaRPr lang="en-US"/>
@@ -2694,7 +3921,7 @@
       </p:sp>
       <p:sp>
         <p:nvSpPr>
-          <p:cNvPr id="4" name="Date Placeholder 3"/>
+          <p:cNvPr id="1574987355" name="Date Placeholder 3"/>
           <p:cNvSpPr>
             <a:spLocks noGrp="1"/>
           </p:cNvSpPr>
@@ -2702,7 +3929,7 @@
             <p:ph type="dt" sz="half" idx="2"/>
           </p:nvPr>
         </p:nvSpPr>
-        <p:spPr>
+        <p:spPr bwMode="auto">
           <a:xfrm>
             <a:off x="457200" y="6356350"/>
             <a:ext cx="2133600" cy="365125"/>
@@ -2725,8 +3952,11 @@
             </a:lvl1pPr>
           </a:lstStyle>
           <a:p>
+            <a:pPr>
+              <a:defRPr/>
+            </a:pPr>
             <a:fld id="{5BCAD085-E8A6-8845-BD4E-CB4CCA059FC4}" type="datetimeFigureOut">
-              <a:rPr lang="en-US" smtClean="0"/>
+              <a:rPr lang="en-US"/>
               <a:t>1/27/13</a:t>
             </a:fld>
             <a:endParaRPr lang="en-US"/>
@@ -2735,7 +3965,7 @@
       </p:sp>
       <p:sp>
         <p:nvSpPr>
-          <p:cNvPr id="5" name="Footer Placeholder 4"/>
+          <p:cNvPr id="335162643" name="Footer Placeholder 4"/>
           <p:cNvSpPr>
             <a:spLocks noGrp="1"/>
           </p:cNvSpPr>
@@ -2743,7 +3973,7 @@
             <p:ph type="ftr" sz="quarter" idx="3"/>
           </p:nvPr>
         </p:nvSpPr>
-        <p:spPr>
+        <p:spPr bwMode="auto">
           <a:xfrm>
             <a:off x="3124200" y="6356350"/>
             <a:ext cx="2895600" cy="365125"/>
@@ -2766,13 +3996,16 @@
             </a:lvl1pPr>
           </a:lstStyle>
           <a:p>
+            <a:pPr>
+              <a:defRPr/>
+            </a:pPr>
             <a:endParaRPr lang="en-US"/>
           </a:p>
         </p:txBody>
       </p:sp>
       <p:sp>
         <p:nvSpPr>
-          <p:cNvPr id="6" name="Slide Number Placeholder 5"/>
+          <p:cNvPr id="1630058167" name="Slide Number Placeholder 5"/>
           <p:cNvSpPr>
             <a:spLocks noGrp="1"/>
           </p:cNvSpPr>
@@ -2780,7 +4013,7 @@
             <p:ph type="sldNum" sz="quarter" idx="4"/>
           </p:nvPr>
         </p:nvSpPr>
-        <p:spPr>
+        <p:spPr bwMode="auto">
           <a:xfrm>
             <a:off x="6553200" y="6356350"/>
             <a:ext cx="2133600" cy="365125"/>
@@ -2803,8 +4036,11 @@
             </a:lvl1pPr>
           </a:lstStyle>
           <a:p>
+            <a:pPr>
+              <a:defRPr/>
+            </a:pPr>
             <a:fld id="{C1FF6DA9-008F-8B48-92A6-B652298478BF}" type="slidenum">
-              <a:rPr lang="en-US" smtClean="0"/>
+              <a:rPr lang="en-US"/>
               <a:t>‹#›</a:t>
             </a:fld>
             <a:endParaRPr lang="en-US"/>
@@ -2812,11 +4048,6 @@
         </p:txBody>
       </p:sp>
     </p:spTree>
-    <p:extLst>
-      <p:ext uri="{BB962C8B-B14F-4D97-AF65-F5344CB8AC3E}">
-        <p14:creationId xmlns:p14="http://schemas.microsoft.com/office/powerpoint/2010/main" val="2209977519"/>
-      </p:ext>
-    </p:extLst>
   </p:cSld>
   <p:clrMap bg1="lt1" tx1="dk1" bg2="lt2" tx2="dk2" accent1="accent1" accent2="accent2" accent3="accent3" accent4="accent4" accent5="accent5" accent6="accent6" hlink="hlink" folHlink="folHlink"/>
   <p:sldLayoutIdLst>
@@ -2834,12 +4065,12 @@
   </p:sldLayoutIdLst>
   <p:txStyles>
     <p:titleStyle>
-      <a:lvl1pPr algn="ctr" defTabSz="457200" rtl="0" eaLnBrk="1" latinLnBrk="0" hangingPunct="1">
+      <a:lvl1pPr algn="ctr" defTabSz="457200" rtl="0">
         <a:spcBef>
-          <a:spcPct val="0"/>
+          <a:spcPts val="0"/>
         </a:spcBef>
         <a:buNone/>
-        <a:defRPr sz="4400" kern="1200">
+        <a:defRPr sz="4400">
           <a:solidFill>
             <a:schemeClr val="tx1"/>
           </a:solidFill>
@@ -2850,13 +4081,13 @@
       </a:lvl1pPr>
     </p:titleStyle>
     <p:bodyStyle>
-      <a:lvl1pPr marL="342900" indent="-342900" algn="l" defTabSz="457200" rtl="0" eaLnBrk="1" latinLnBrk="0" hangingPunct="1">
+      <a:lvl1pPr marL="342900" indent="-342900" algn="l" defTabSz="457200" rtl="0">
         <a:spcBef>
-          <a:spcPct val="20000"/>
+          <a:spcPts val="0"/>
         </a:spcBef>
         <a:buFont typeface="Arial"/>
         <a:buChar char="•"/>
-        <a:defRPr sz="3200" kern="1200">
+        <a:defRPr sz="3200">
           <a:solidFill>
             <a:schemeClr val="tx1"/>
           </a:solidFill>
@@ -2865,13 +4096,13 @@
           <a:cs typeface="+mn-cs"/>
         </a:defRPr>
       </a:lvl1pPr>
-      <a:lvl2pPr marL="742950" indent="-285750" algn="l" defTabSz="457200" rtl="0" eaLnBrk="1" latinLnBrk="0" hangingPunct="1">
+      <a:lvl2pPr marL="742950" indent="-285750" algn="l" defTabSz="457200" rtl="0">
         <a:spcBef>
-          <a:spcPct val="20000"/>
+          <a:spcPts val="0"/>
         </a:spcBef>
         <a:buFont typeface="Arial"/>
         <a:buChar char="–"/>
-        <a:defRPr sz="2800" kern="1200">
+        <a:defRPr sz="2800">
           <a:solidFill>
             <a:schemeClr val="tx1"/>
           </a:solidFill>
@@ -2880,13 +4111,13 @@
           <a:cs typeface="+mn-cs"/>
         </a:defRPr>
       </a:lvl2pPr>
-      <a:lvl3pPr marL="1143000" indent="-228600" algn="l" defTabSz="457200" rtl="0" eaLnBrk="1" latinLnBrk="0" hangingPunct="1">
+      <a:lvl3pPr marL="1143000" indent="-228600" algn="l" defTabSz="457200" rtl="0">
         <a:spcBef>
-          <a:spcPct val="20000"/>
+          <a:spcPts val="0"/>
         </a:spcBef>
         <a:buFont typeface="Arial"/>
         <a:buChar char="•"/>
-        <a:defRPr sz="2400" kern="1200">
+        <a:defRPr sz="2400">
           <a:solidFill>
             <a:schemeClr val="tx1"/>
           </a:solidFill>
@@ -2895,13 +4126,13 @@
           <a:cs typeface="+mn-cs"/>
         </a:defRPr>
       </a:lvl3pPr>
-      <a:lvl4pPr marL="1600200" indent="-228600" algn="l" defTabSz="457200" rtl="0" eaLnBrk="1" latinLnBrk="0" hangingPunct="1">
+      <a:lvl4pPr marL="1600200" indent="-228600" algn="l" defTabSz="457200" rtl="0">
         <a:spcBef>
-          <a:spcPct val="20000"/>
+          <a:spcPts val="0"/>
         </a:spcBef>
         <a:buFont typeface="Arial"/>
         <a:buChar char="–"/>
-        <a:defRPr sz="2000" kern="1200">
+        <a:defRPr sz="2000">
           <a:solidFill>
             <a:schemeClr val="tx1"/>
           </a:solidFill>
@@ -2910,13 +4141,13 @@
           <a:cs typeface="+mn-cs"/>
         </a:defRPr>
       </a:lvl4pPr>
-      <a:lvl5pPr marL="2057400" indent="-228600" algn="l" defTabSz="457200" rtl="0" eaLnBrk="1" latinLnBrk="0" hangingPunct="1">
+      <a:lvl5pPr marL="2057400" indent="-228600" algn="l" defTabSz="457200" rtl="0">
         <a:spcBef>
-          <a:spcPct val="20000"/>
+          <a:spcPts val="0"/>
         </a:spcBef>
         <a:buFont typeface="Arial"/>
         <a:buChar char="»"/>
-        <a:defRPr sz="2000" kern="1200">
+        <a:defRPr sz="2000">
           <a:solidFill>
             <a:schemeClr val="tx1"/>
           </a:solidFill>
@@ -2925,13 +4156,13 @@
           <a:cs typeface="+mn-cs"/>
         </a:defRPr>
       </a:lvl5pPr>
-      <a:lvl6pPr marL="2514600" indent="-228600" algn="l" defTabSz="457200" rtl="0" eaLnBrk="1" latinLnBrk="0" hangingPunct="1">
+      <a:lvl6pPr marL="2514600" indent="-228600" algn="l" defTabSz="457200" rtl="0">
         <a:spcBef>
-          <a:spcPct val="20000"/>
+          <a:spcPts val="0"/>
         </a:spcBef>
         <a:buFont typeface="Arial"/>
         <a:buChar char="•"/>
-        <a:defRPr sz="2000" kern="1200">
+        <a:defRPr sz="2000">
           <a:solidFill>
             <a:schemeClr val="tx1"/>
           </a:solidFill>
@@ -2940,13 +4171,13 @@
           <a:cs typeface="+mn-cs"/>
         </a:defRPr>
       </a:lvl6pPr>
-      <a:lvl7pPr marL="2971800" indent="-228600" algn="l" defTabSz="457200" rtl="0" eaLnBrk="1" latinLnBrk="0" hangingPunct="1">
+      <a:lvl7pPr marL="2971800" indent="-228600" algn="l" defTabSz="457200" rtl="0">
         <a:spcBef>
-          <a:spcPct val="20000"/>
+          <a:spcPts val="0"/>
         </a:spcBef>
         <a:buFont typeface="Arial"/>
         <a:buChar char="•"/>
-        <a:defRPr sz="2000" kern="1200">
+        <a:defRPr sz="2000">
           <a:solidFill>
             <a:schemeClr val="tx1"/>
           </a:solidFill>
@@ -2955,13 +4186,13 @@
           <a:cs typeface="+mn-cs"/>
         </a:defRPr>
       </a:lvl7pPr>
-      <a:lvl8pPr marL="3429000" indent="-228600" algn="l" defTabSz="457200" rtl="0" eaLnBrk="1" latinLnBrk="0" hangingPunct="1">
+      <a:lvl8pPr marL="3429000" indent="-228600" algn="l" defTabSz="457200" rtl="0">
         <a:spcBef>
-          <a:spcPct val="20000"/>
+          <a:spcPts val="0"/>
         </a:spcBef>
         <a:buFont typeface="Arial"/>
         <a:buChar char="•"/>
-        <a:defRPr sz="2000" kern="1200">
+        <a:defRPr sz="2000">
           <a:solidFill>
             <a:schemeClr val="tx1"/>
           </a:solidFill>
@@ -2970,13 +4201,13 @@
           <a:cs typeface="+mn-cs"/>
         </a:defRPr>
       </a:lvl8pPr>
-      <a:lvl9pPr marL="3886200" indent="-228600" algn="l" defTabSz="457200" rtl="0" eaLnBrk="1" latinLnBrk="0" hangingPunct="1">
+      <a:lvl9pPr marL="3886200" indent="-228600" algn="l" defTabSz="457200" rtl="0">
         <a:spcBef>
-          <a:spcPct val="20000"/>
+          <a:spcPts val="0"/>
         </a:spcBef>
         <a:buFont typeface="Arial"/>
         <a:buChar char="•"/>
-        <a:defRPr sz="2000" kern="1200">
+        <a:defRPr sz="2000">
           <a:solidFill>
             <a:schemeClr val="tx1"/>
           </a:solidFill>
@@ -2990,8 +4221,8 @@
       <a:defPPr>
         <a:defRPr lang="en-US"/>
       </a:defPPr>
-      <a:lvl1pPr marL="0" algn="l" defTabSz="457200" rtl="0" eaLnBrk="1" latinLnBrk="0" hangingPunct="1">
-        <a:defRPr sz="1800" kern="1200">
+      <a:lvl1pPr marL="0" algn="l" defTabSz="457200" rtl="0">
+        <a:defRPr sz="1800">
           <a:solidFill>
             <a:schemeClr val="tx1"/>
           </a:solidFill>
@@ -3000,8 +4231,8 @@
           <a:cs typeface="+mn-cs"/>
         </a:defRPr>
       </a:lvl1pPr>
-      <a:lvl2pPr marL="457200" algn="l" defTabSz="457200" rtl="0" eaLnBrk="1" latinLnBrk="0" hangingPunct="1">
-        <a:defRPr sz="1800" kern="1200">
+      <a:lvl2pPr marL="457200" algn="l" defTabSz="457200" rtl="0">
+        <a:defRPr sz="1800">
           <a:solidFill>
             <a:schemeClr val="tx1"/>
           </a:solidFill>
@@ -3010,8 +4241,8 @@
           <a:cs typeface="+mn-cs"/>
         </a:defRPr>
       </a:lvl2pPr>
-      <a:lvl3pPr marL="914400" algn="l" defTabSz="457200" rtl="0" eaLnBrk="1" latinLnBrk="0" hangingPunct="1">
-        <a:defRPr sz="1800" kern="1200">
+      <a:lvl3pPr marL="914400" algn="l" defTabSz="457200" rtl="0">
+        <a:defRPr sz="1800">
           <a:solidFill>
             <a:schemeClr val="tx1"/>
           </a:solidFill>
@@ -3020,8 +4251,8 @@
           <a:cs typeface="+mn-cs"/>
         </a:defRPr>
       </a:lvl3pPr>
-      <a:lvl4pPr marL="1371600" algn="l" defTabSz="457200" rtl="0" eaLnBrk="1" latinLnBrk="0" hangingPunct="1">
-        <a:defRPr sz="1800" kern="1200">
+      <a:lvl4pPr marL="1371600" algn="l" defTabSz="457200" rtl="0">
+        <a:defRPr sz="1800">
           <a:solidFill>
             <a:schemeClr val="tx1"/>
           </a:solidFill>
@@ -3030,8 +4261,8 @@
           <a:cs typeface="+mn-cs"/>
         </a:defRPr>
       </a:lvl4pPr>
-      <a:lvl5pPr marL="1828800" algn="l" defTabSz="457200" rtl="0" eaLnBrk="1" latinLnBrk="0" hangingPunct="1">
-        <a:defRPr sz="1800" kern="1200">
+      <a:lvl5pPr marL="1828800" algn="l" defTabSz="457200" rtl="0">
+        <a:defRPr sz="1800">
           <a:solidFill>
             <a:schemeClr val="tx1"/>
           </a:solidFill>
@@ -3040,8 +4271,8 @@
           <a:cs typeface="+mn-cs"/>
         </a:defRPr>
       </a:lvl5pPr>
-      <a:lvl6pPr marL="2286000" algn="l" defTabSz="457200" rtl="0" eaLnBrk="1" latinLnBrk="0" hangingPunct="1">
-        <a:defRPr sz="1800" kern="1200">
+      <a:lvl6pPr marL="2286000" algn="l" defTabSz="457200" rtl="0">
+        <a:defRPr sz="1800">
           <a:solidFill>
             <a:schemeClr val="tx1"/>
           </a:solidFill>
@@ -3050,8 +4281,8 @@
           <a:cs typeface="+mn-cs"/>
         </a:defRPr>
       </a:lvl6pPr>
-      <a:lvl7pPr marL="2743200" algn="l" defTabSz="457200" rtl="0" eaLnBrk="1" latinLnBrk="0" hangingPunct="1">
-        <a:defRPr sz="1800" kern="1200">
+      <a:lvl7pPr marL="2743200" algn="l" defTabSz="457200" rtl="0">
+        <a:defRPr sz="1800">
           <a:solidFill>
             <a:schemeClr val="tx1"/>
           </a:solidFill>
@@ -3060,8 +4291,8 @@
           <a:cs typeface="+mn-cs"/>
         </a:defRPr>
       </a:lvl7pPr>
-      <a:lvl8pPr marL="3200400" algn="l" defTabSz="457200" rtl="0" eaLnBrk="1" latinLnBrk="0" hangingPunct="1">
-        <a:defRPr sz="1800" kern="1200">
+      <a:lvl8pPr marL="3200400" algn="l" defTabSz="457200" rtl="0">
+        <a:defRPr sz="1800">
           <a:solidFill>
             <a:schemeClr val="tx1"/>
           </a:solidFill>
@@ -3070,8 +4301,8 @@
           <a:cs typeface="+mn-cs"/>
         </a:defRPr>
       </a:lvl8pPr>
-      <a:lvl9pPr marL="3657600" algn="l" defTabSz="457200" rtl="0" eaLnBrk="1" latinLnBrk="0" hangingPunct="1">
-        <a:defRPr sz="1800" kern="1200">
+      <a:lvl9pPr marL="3657600" algn="l" defTabSz="457200" rtl="0">
+        <a:defRPr sz="1800">
           <a:solidFill>
             <a:schemeClr val="tx1"/>
           </a:solidFill>
@@ -3086,18 +4317,25 @@
 </file>
 
 <file path=ppt/slides/slide1.xml><?xml version="1.0" encoding="utf-8"?>
-<p:sld xmlns:a="http://schemas.openxmlformats.org/drawingml/2006/main" xmlns:p="http://schemas.openxmlformats.org/presentationml/2006/main" xmlns:r="http://schemas.openxmlformats.org/officeDocument/2006/relationships">
-  <p:cSld>
+<p:sld xmlns:a="http://schemas.openxmlformats.org/drawingml/2006/main" xmlns:r="http://schemas.openxmlformats.org/officeDocument/2006/relationships" xmlns:p="http://schemas.openxmlformats.org/presentationml/2006/main" xmlns:m="http://schemas.openxmlformats.org/officeDocument/2006/math" xmlns:w="http://schemas.openxmlformats.org/wordprocessingml/2006/main" xmlns:mc="http://schemas.openxmlformats.org/markup-compatibility/2006" showMasterPhAnim="0" showMasterSp="1" show="1">
+  <p:cSld name="">
     <p:spTree>
       <p:nvGrpSpPr>
         <p:cNvPr id="1" name=""/>
         <p:cNvGrpSpPr/>
         <p:nvPr/>
       </p:nvGrpSpPr>
-      <p:grpSpPr/>
-      <p:sp>
-        <p:nvSpPr>
-          <p:cNvPr id="2" name="Title 1"/>
+      <p:grpSpPr bwMode="auto">
+        <a:xfrm>
+          <a:off x="0" y="0"/>
+          <a:ext cx="0" cy="0"/>
+          <a:chOff x="0" y="0"/>
+          <a:chExt cx="0" cy="0"/>
+        </a:xfrm>
+      </p:grpSpPr>
+      <p:sp>
+        <p:nvSpPr>
+          <p:cNvPr id="1809047543" name="Title 1"/>
           <p:cNvSpPr>
             <a:spLocks noGrp="1"/>
           </p:cNvSpPr>
@@ -3105,20 +4343,25 @@
             <p:ph type="ctrTitle"/>
           </p:nvPr>
         </p:nvSpPr>
-        <p:spPr/>
-        <p:txBody>
-          <a:bodyPr/>
-          <a:lstStyle/>
-          <a:p>
-            <a:r>
+        <p:spPr bwMode="auto"/>
+        <p:txBody>
+          <a:bodyPr/>
+          <a:lstStyle/>
+          <a:p>
+            <a:pPr>
+              <a:defRPr/>
+            </a:pPr>
+            <a:r>
+              <a:rPr/>
               <a:t>Alur Sistem Aplikasi Kredit</a:t>
             </a:r>
-          </a:p>
-        </p:txBody>
-      </p:sp>
-      <p:sp>
-        <p:nvSpPr>
-          <p:cNvPr id="3" name="Subtitle 2"/>
+            <a:endParaRPr/>
+          </a:p>
+        </p:txBody>
+      </p:sp>
+      <p:sp>
+        <p:nvSpPr>
+          <p:cNvPr id="336249057" name="Subtitle 2"/>
           <p:cNvSpPr>
             <a:spLocks noGrp="1"/>
           </p:cNvSpPr>
@@ -3126,37 +4369,49 @@
             <p:ph type="subTitle" idx="1"/>
           </p:nvPr>
         </p:nvSpPr>
-        <p:spPr/>
-        <p:txBody>
-          <a:bodyPr/>
-          <a:lstStyle/>
-          <a:p>
-            <a:r>
+        <p:spPr bwMode="auto"/>
+        <p:txBody>
+          <a:bodyPr/>
+          <a:lstStyle/>
+          <a:p>
+            <a:pPr>
+              <a:defRPr/>
+            </a:pPr>
+            <a:r>
+              <a:rPr/>
               <a:t>Presentasi interaktif untuk pimpinan</a:t>
             </a:r>
-          </a:p>
-          <a:p>
-            <a:r>
+            <a:endParaRPr/>
+          </a:p>
+          <a:p>
+            <a:pPr>
+              <a:defRPr/>
+            </a:pPr>
+            <a:r>
+              <a:rPr/>
               <a:t>Sistem approval kredit dengan compliance terintegrasi</a:t>
             </a:r>
-          </a:p>
-        </p:txBody>
-      </p:sp>
-      <p:sp>
-        <p:nvSpPr>
-          <p:cNvPr id="4" name="Rounded Rectangle 3">
-            <a:hlinkClick action="ppaction://hlinksldjump" r:id="rId2"/>
+            <a:endParaRPr/>
+          </a:p>
+        </p:txBody>
+      </p:sp>
+      <p:sp>
+        <p:nvSpPr>
+          <p:cNvPr id="201686325" name="Rounded Rectangle 3">
+            <a:hlinkClick r:id="rId3" action="ppaction://hlinksldjump"/>
           </p:cNvPr>
           <p:cNvSpPr/>
           <p:nvPr/>
         </p:nvSpPr>
-        <p:spPr>
+        <p:spPr bwMode="auto">
           <a:xfrm>
             <a:off x="6583680" y="5303520"/>
             <a:ext cx="1828800" cy="548640"/>
           </a:xfrm>
           <a:prstGeom prst="roundRect">
-            <a:avLst/>
+            <a:avLst>
+              <a:gd name="adj" fmla="val 16667"/>
+            </a:avLst>
           </a:prstGeom>
           <a:solidFill>
             <a:srgbClr val="3182CE"/>
@@ -3186,15 +4441,17 @@
           <a:lstStyle/>
           <a:p>
             <a:pPr algn="ctr">
-              <a:defRPr b="1" sz="1400">
+              <a:defRPr sz="1400" b="1">
                 <a:solidFill>
                   <a:srgbClr val="FFFFFF"/>
                 </a:solidFill>
               </a:defRPr>
             </a:pPr>
             <a:r>
+              <a:rPr/>
               <a:t>Lihat Menu</a:t>
             </a:r>
+            <a:endParaRPr/>
           </a:p>
         </p:txBody>
       </p:sp>
@@ -3203,22 +4460,37 @@
   <p:clrMapOvr>
     <a:masterClrMapping/>
   </p:clrMapOvr>
+  <mc:AlternateContent xmlns:mc="http://schemas.openxmlformats.org/markup-compatibility/2006">
+    <mc:Choice xmlns:p159="http://schemas.microsoft.com/office/powerpoint/2015/09/main" xmlns:p14="http://schemas.microsoft.com/office/powerpoint/2010/main" Requires="p159">
+      <p:transition p14:dur="500" advClick="1"/>
+    </mc:Choice>
+    <mc:Fallback>
+      <p:transition advClick="1"/>
+    </mc:Fallback>
+  </mc:AlternateContent>
 </p:sld>
 </file>
 
 <file path=ppt/slides/slide2.xml><?xml version="1.0" encoding="utf-8"?>
-<p:sld xmlns:a="http://schemas.openxmlformats.org/drawingml/2006/main" xmlns:p="http://schemas.openxmlformats.org/presentationml/2006/main" xmlns:r="http://schemas.openxmlformats.org/officeDocument/2006/relationships">
-  <p:cSld>
+<p:sld xmlns:a="http://schemas.openxmlformats.org/drawingml/2006/main" xmlns:r="http://schemas.openxmlformats.org/officeDocument/2006/relationships" xmlns:p="http://schemas.openxmlformats.org/presentationml/2006/main" xmlns:m="http://schemas.openxmlformats.org/officeDocument/2006/math" xmlns:w="http://schemas.openxmlformats.org/wordprocessingml/2006/main" xmlns:mc="http://schemas.openxmlformats.org/markup-compatibility/2006" showMasterPhAnim="0" showMasterSp="1" show="1">
+  <p:cSld name="">
     <p:spTree>
       <p:nvGrpSpPr>
         <p:cNvPr id="1" name=""/>
         <p:cNvGrpSpPr/>
         <p:nvPr/>
       </p:nvGrpSpPr>
-      <p:grpSpPr/>
-      <p:sp>
-        <p:nvSpPr>
-          <p:cNvPr id="2" name="Title 1"/>
+      <p:grpSpPr bwMode="auto">
+        <a:xfrm>
+          <a:off x="0" y="0"/>
+          <a:ext cx="0" cy="0"/>
+          <a:chOff x="0" y="0"/>
+          <a:chExt cx="0" cy="0"/>
+        </a:xfrm>
+      </p:grpSpPr>
+      <p:sp>
+        <p:nvSpPr>
+          <p:cNvPr id="45429974" name="Title 1"/>
           <p:cNvSpPr>
             <a:spLocks noGrp="1"/>
           </p:cNvSpPr>
@@ -3226,20 +4498,25 @@
             <p:ph type="title"/>
           </p:nvPr>
         </p:nvSpPr>
-        <p:spPr/>
-        <p:txBody>
-          <a:bodyPr/>
-          <a:lstStyle/>
-          <a:p>
-            <a:r>
+        <p:spPr bwMode="auto"/>
+        <p:txBody>
+          <a:bodyPr/>
+          <a:lstStyle/>
+          <a:p>
+            <a:pPr>
+              <a:defRPr/>
+            </a:pPr>
+            <a:r>
+              <a:rPr/>
               <a:t>Menu Interaktif</a:t>
             </a:r>
-          </a:p>
-        </p:txBody>
-      </p:sp>
-      <p:sp>
-        <p:nvSpPr>
-          <p:cNvPr id="3" name="Content Placeholder 2"/>
+            <a:endParaRPr/>
+          </a:p>
+        </p:txBody>
+      </p:sp>
+      <p:sp>
+        <p:nvSpPr>
+          <p:cNvPr id="1878809293" name="Content Placeholder 2"/>
           <p:cNvSpPr>
             <a:spLocks noGrp="1"/>
           </p:cNvSpPr>
@@ -3247,80 +4524,99 @@
             <p:ph idx="1"/>
           </p:nvPr>
         </p:nvSpPr>
-        <p:spPr/>
-        <p:txBody>
-          <a:bodyPr/>
-          <a:lstStyle/>
-          <a:p>
-            <a:r>
+        <p:spPr bwMode="auto"/>
+        <p:txBody>
+          <a:bodyPr/>
+          <a:lstStyle/>
+          <a:p>
+            <a:pPr>
+              <a:defRPr/>
+            </a:pPr>
+            <a:r>
+              <a:rPr/>
               <a:t>Klik salah satu bagian untuk langsung menuju topik:</a:t>
             </a:r>
+            <a:endParaRPr/>
           </a:p>
           <a:p>
             <a:pPr>
               <a:defRPr sz="1800"/>
             </a:pPr>
             <a:r>
+              <a:rPr/>
               <a:t>1. Inti Sistem</a:t>
             </a:r>
+            <a:endParaRPr/>
           </a:p>
           <a:p>
             <a:pPr>
               <a:defRPr sz="1800"/>
             </a:pPr>
             <a:r>
+              <a:rPr/>
               <a:t>2. Alur Pengajuan</a:t>
             </a:r>
+            <a:endParaRPr/>
           </a:p>
           <a:p>
             <a:pPr>
               <a:defRPr sz="1800"/>
             </a:pPr>
             <a:r>
+              <a:rPr/>
               <a:t>3. Approval Chain</a:t>
             </a:r>
+            <a:endParaRPr/>
           </a:p>
           <a:p>
             <a:pPr>
               <a:defRPr sz="1800"/>
             </a:pPr>
             <a:r>
+              <a:rPr/>
               <a:t>4. Revisi &amp; Tolak</a:t>
             </a:r>
+            <a:endParaRPr/>
           </a:p>
           <a:p>
             <a:pPr>
               <a:defRPr sz="1800"/>
             </a:pPr>
             <a:r>
+              <a:rPr/>
               <a:t>5. Nilai Bisnis</a:t>
             </a:r>
+            <a:endParaRPr/>
           </a:p>
           <a:p>
             <a:pPr>
               <a:defRPr sz="1800"/>
             </a:pPr>
             <a:r>
+              <a:rPr/>
               <a:t>6. Diagram Alur Sistem</a:t>
             </a:r>
-          </a:p>
-        </p:txBody>
-      </p:sp>
-      <p:sp>
-        <p:nvSpPr>
-          <p:cNvPr id="4" name="Rounded Rectangle 3">
-            <a:hlinkClick action="ppaction://hlinksldjump" r:id="rId2"/>
+            <a:endParaRPr/>
+          </a:p>
+        </p:txBody>
+      </p:sp>
+      <p:sp>
+        <p:nvSpPr>
+          <p:cNvPr id="1268079750" name="Rounded Rectangle 3">
+            <a:hlinkClick r:id="rId3" action="ppaction://hlinksldjump"/>
           </p:cNvPr>
           <p:cNvSpPr/>
           <p:nvPr/>
         </p:nvSpPr>
-        <p:spPr>
+        <p:spPr bwMode="auto">
           <a:xfrm>
             <a:off x="457200" y="2743200"/>
             <a:ext cx="3657600" cy="640080"/>
           </a:xfrm>
           <a:prstGeom prst="roundRect">
-            <a:avLst/>
+            <a:avLst>
+              <a:gd name="adj" fmla="val 16667"/>
+            </a:avLst>
           </a:prstGeom>
           <a:solidFill>
             <a:srgbClr val="3182CE"/>
@@ -3350,33 +4646,37 @@
           <a:lstStyle/>
           <a:p>
             <a:pPr algn="ctr">
-              <a:defRPr b="1" sz="1400">
+              <a:defRPr sz="1400" b="1">
                 <a:solidFill>
                   <a:srgbClr val="FFFFFF"/>
                 </a:solidFill>
               </a:defRPr>
             </a:pPr>
             <a:r>
+              <a:rPr/>
               <a:t>Inti Sistem</a:t>
             </a:r>
-          </a:p>
-        </p:txBody>
-      </p:sp>
-      <p:sp>
-        <p:nvSpPr>
-          <p:cNvPr id="5" name="Rounded Rectangle 4">
-            <a:hlinkClick action="ppaction://hlinksldjump" r:id="rId3"/>
+            <a:endParaRPr/>
+          </a:p>
+        </p:txBody>
+      </p:sp>
+      <p:sp>
+        <p:nvSpPr>
+          <p:cNvPr id="563794927" name="Rounded Rectangle 4">
+            <a:hlinkClick r:id="rId4" action="ppaction://hlinksldjump"/>
           </p:cNvPr>
           <p:cNvSpPr/>
           <p:nvPr/>
         </p:nvSpPr>
-        <p:spPr>
+        <p:spPr bwMode="auto">
           <a:xfrm>
             <a:off x="4572000" y="2743200"/>
             <a:ext cx="3657600" cy="640080"/>
           </a:xfrm>
           <a:prstGeom prst="roundRect">
-            <a:avLst/>
+            <a:avLst>
+              <a:gd name="adj" fmla="val 16667"/>
+            </a:avLst>
           </a:prstGeom>
           <a:solidFill>
             <a:srgbClr val="3182CE"/>
@@ -3406,33 +4706,37 @@
           <a:lstStyle/>
           <a:p>
             <a:pPr algn="ctr">
-              <a:defRPr b="1" sz="1400">
+              <a:defRPr sz="1400" b="1">
                 <a:solidFill>
                   <a:srgbClr val="FFFFFF"/>
                 </a:solidFill>
               </a:defRPr>
             </a:pPr>
             <a:r>
+              <a:rPr/>
               <a:t>Alur Pengajuan</a:t>
             </a:r>
-          </a:p>
-        </p:txBody>
-      </p:sp>
-      <p:sp>
-        <p:nvSpPr>
-          <p:cNvPr id="6" name="Rounded Rectangle 5">
-            <a:hlinkClick action="ppaction://hlinksldjump" r:id="rId4"/>
+            <a:endParaRPr/>
+          </a:p>
+        </p:txBody>
+      </p:sp>
+      <p:sp>
+        <p:nvSpPr>
+          <p:cNvPr id="700212693" name="Rounded Rectangle 5">
+            <a:hlinkClick r:id="rId5" action="ppaction://hlinksldjump"/>
           </p:cNvPr>
           <p:cNvSpPr/>
           <p:nvPr/>
         </p:nvSpPr>
-        <p:spPr>
+        <p:spPr bwMode="auto">
           <a:xfrm>
             <a:off x="457200" y="3566160"/>
             <a:ext cx="3657600" cy="640080"/>
           </a:xfrm>
           <a:prstGeom prst="roundRect">
-            <a:avLst/>
+            <a:avLst>
+              <a:gd name="adj" fmla="val 16667"/>
+            </a:avLst>
           </a:prstGeom>
           <a:solidFill>
             <a:srgbClr val="3182CE"/>
@@ -3462,33 +4766,37 @@
           <a:lstStyle/>
           <a:p>
             <a:pPr algn="ctr">
-              <a:defRPr b="1" sz="1400">
+              <a:defRPr sz="1400" b="1">
                 <a:solidFill>
                   <a:srgbClr val="FFFFFF"/>
                 </a:solidFill>
               </a:defRPr>
             </a:pPr>
             <a:r>
+              <a:rPr/>
               <a:t>Approval Chain</a:t>
             </a:r>
-          </a:p>
-        </p:txBody>
-      </p:sp>
-      <p:sp>
-        <p:nvSpPr>
-          <p:cNvPr id="7" name="Rounded Rectangle 6">
-            <a:hlinkClick action="ppaction://hlinksldjump" r:id="rId5"/>
+            <a:endParaRPr/>
+          </a:p>
+        </p:txBody>
+      </p:sp>
+      <p:sp>
+        <p:nvSpPr>
+          <p:cNvPr id="1541631280" name="Rounded Rectangle 6">
+            <a:hlinkClick r:id="rId6" action="ppaction://hlinksldjump"/>
           </p:cNvPr>
           <p:cNvSpPr/>
           <p:nvPr/>
         </p:nvSpPr>
-        <p:spPr>
+        <p:spPr bwMode="auto">
           <a:xfrm>
             <a:off x="4572000" y="3566160"/>
             <a:ext cx="3657600" cy="640080"/>
           </a:xfrm>
           <a:prstGeom prst="roundRect">
-            <a:avLst/>
+            <a:avLst>
+              <a:gd name="adj" fmla="val 16667"/>
+            </a:avLst>
           </a:prstGeom>
           <a:solidFill>
             <a:srgbClr val="3182CE"/>
@@ -3518,33 +4826,37 @@
           <a:lstStyle/>
           <a:p>
             <a:pPr algn="ctr">
-              <a:defRPr b="1" sz="1400">
+              <a:defRPr sz="1400" b="1">
                 <a:solidFill>
                   <a:srgbClr val="FFFFFF"/>
                 </a:solidFill>
               </a:defRPr>
             </a:pPr>
             <a:r>
+              <a:rPr/>
               <a:t>Revisi &amp; Tolak</a:t>
             </a:r>
-          </a:p>
-        </p:txBody>
-      </p:sp>
-      <p:sp>
-        <p:nvSpPr>
-          <p:cNvPr id="8" name="Rounded Rectangle 7">
-            <a:hlinkClick action="ppaction://hlinksldjump" r:id="rId6"/>
+            <a:endParaRPr/>
+          </a:p>
+        </p:txBody>
+      </p:sp>
+      <p:sp>
+        <p:nvSpPr>
+          <p:cNvPr id="588788703" name="Rounded Rectangle 7">
+            <a:hlinkClick r:id="rId7" action="ppaction://hlinksldjump"/>
           </p:cNvPr>
           <p:cNvSpPr/>
           <p:nvPr/>
         </p:nvSpPr>
-        <p:spPr>
+        <p:spPr bwMode="auto">
           <a:xfrm>
             <a:off x="457200" y="4389120"/>
             <a:ext cx="3657600" cy="640080"/>
           </a:xfrm>
           <a:prstGeom prst="roundRect">
-            <a:avLst/>
+            <a:avLst>
+              <a:gd name="adj" fmla="val 16667"/>
+            </a:avLst>
           </a:prstGeom>
           <a:solidFill>
             <a:srgbClr val="3182CE"/>
@@ -3574,15 +4886,17 @@
           <a:lstStyle/>
           <a:p>
             <a:pPr algn="ctr">
-              <a:defRPr b="1" sz="1400">
+              <a:defRPr sz="1400" b="1">
                 <a:solidFill>
                   <a:srgbClr val="FFFFFF"/>
                 </a:solidFill>
               </a:defRPr>
             </a:pPr>
             <a:r>
+              <a:rPr/>
               <a:t>Nilai Bisnis</a:t>
             </a:r>
+            <a:endParaRPr/>
           </a:p>
         </p:txBody>
       </p:sp>
@@ -3591,22 +4905,37 @@
   <p:clrMapOvr>
     <a:masterClrMapping/>
   </p:clrMapOvr>
+  <mc:AlternateContent xmlns:mc="http://schemas.openxmlformats.org/markup-compatibility/2006">
+    <mc:Choice xmlns:p159="http://schemas.microsoft.com/office/powerpoint/2015/09/main" xmlns:p14="http://schemas.microsoft.com/office/powerpoint/2010/main" Requires="p159">
+      <p:transition p14:dur="500" advClick="1"/>
+    </mc:Choice>
+    <mc:Fallback>
+      <p:transition advClick="1"/>
+    </mc:Fallback>
+  </mc:AlternateContent>
 </p:sld>
 </file>
 
 <file path=ppt/slides/slide3.xml><?xml version="1.0" encoding="utf-8"?>
-<p:sld xmlns:a="http://schemas.openxmlformats.org/drawingml/2006/main" xmlns:p="http://schemas.openxmlformats.org/presentationml/2006/main" xmlns:r="http://schemas.openxmlformats.org/officeDocument/2006/relationships">
-  <p:cSld>
+<p:sld xmlns:a="http://schemas.openxmlformats.org/drawingml/2006/main" xmlns:r="http://schemas.openxmlformats.org/officeDocument/2006/relationships" xmlns:p="http://schemas.openxmlformats.org/presentationml/2006/main" xmlns:m="http://schemas.openxmlformats.org/officeDocument/2006/math" xmlns:w="http://schemas.openxmlformats.org/wordprocessingml/2006/main" xmlns:mc="http://schemas.openxmlformats.org/markup-compatibility/2006" showMasterPhAnim="0" showMasterSp="1" show="1">
+  <p:cSld name="">
     <p:spTree>
       <p:nvGrpSpPr>
         <p:cNvPr id="1" name=""/>
         <p:cNvGrpSpPr/>
         <p:nvPr/>
       </p:nvGrpSpPr>
-      <p:grpSpPr/>
-      <p:sp>
-        <p:nvSpPr>
-          <p:cNvPr id="2" name="Title 1"/>
+      <p:grpSpPr bwMode="auto">
+        <a:xfrm>
+          <a:off x="0" y="0"/>
+          <a:ext cx="0" cy="0"/>
+          <a:chOff x="0" y="0"/>
+          <a:chExt cx="0" cy="0"/>
+        </a:xfrm>
+      </p:grpSpPr>
+      <p:sp>
+        <p:nvSpPr>
+          <p:cNvPr id="215651819" name="Title 1"/>
           <p:cNvSpPr>
             <a:spLocks noGrp="1"/>
           </p:cNvSpPr>
@@ -3614,20 +4943,25 @@
             <p:ph type="title"/>
           </p:nvPr>
         </p:nvSpPr>
-        <p:spPr/>
-        <p:txBody>
-          <a:bodyPr/>
-          <a:lstStyle/>
-          <a:p>
-            <a:r>
+        <p:spPr bwMode="auto"/>
+        <p:txBody>
+          <a:bodyPr/>
+          <a:lstStyle/>
+          <a:p>
+            <a:pPr>
+              <a:defRPr/>
+            </a:pPr>
+            <a:r>
+              <a:rPr/>
               <a:t>Inti Sistem</a:t>
             </a:r>
-          </a:p>
-        </p:txBody>
-      </p:sp>
-      <p:sp>
-        <p:nvSpPr>
-          <p:cNvPr id="3" name="Content Placeholder 2"/>
+            <a:endParaRPr/>
+          </a:p>
+        </p:txBody>
+      </p:sp>
+      <p:sp>
+        <p:nvSpPr>
+          <p:cNvPr id="1158112664" name="Content Placeholder 2"/>
           <p:cNvSpPr>
             <a:spLocks noGrp="1"/>
           </p:cNvSpPr>
@@ -3635,30 +4969,39 @@
             <p:ph idx="1"/>
           </p:nvPr>
         </p:nvSpPr>
-        <p:spPr/>
-        <p:txBody>
-          <a:bodyPr/>
-          <a:lstStyle/>
-          <a:p>
-            <a:r>
+        <p:spPr bwMode="auto"/>
+        <p:txBody>
+          <a:bodyPr/>
+          <a:lstStyle/>
+          <a:p>
+            <a:pPr>
+              <a:defRPr/>
+            </a:pPr>
+            <a:r>
+              <a:rPr/>
               <a:t>Sistem ini menangani seluruh proses pengajuan kredit: input analis, compliance, approval, dan cetak laporan.</a:t>
             </a:r>
+            <a:endParaRPr/>
           </a:p>
           <a:p>
             <a:pPr>
               <a:defRPr sz="1800"/>
             </a:pPr>
             <a:r>
+              <a:rPr/>
               <a:t>Memastikan data credit scoring, cashflow, agunan, dan kepatuhan tersimpan lengkap.</a:t>
             </a:r>
+            <a:endParaRPr/>
           </a:p>
           <a:p>
             <a:pPr>
               <a:defRPr sz="1800"/>
             </a:pPr>
             <a:r>
+              <a:rPr/>
               <a:t>Otomatis mengarahkan proses approval sesuai jabatan aktif dan batas nominal kredit.</a:t>
             </a:r>
+            <a:endParaRPr/>
           </a:p>
         </p:txBody>
       </p:sp>
@@ -3667,22 +5010,37 @@
   <p:clrMapOvr>
     <a:masterClrMapping/>
   </p:clrMapOvr>
+  <mc:AlternateContent xmlns:mc="http://schemas.openxmlformats.org/markup-compatibility/2006">
+    <mc:Choice xmlns:p159="http://schemas.microsoft.com/office/powerpoint/2015/09/main" xmlns:p14="http://schemas.microsoft.com/office/powerpoint/2010/main" Requires="p159">
+      <p:transition p14:dur="500" advClick="1"/>
+    </mc:Choice>
+    <mc:Fallback>
+      <p:transition advClick="1"/>
+    </mc:Fallback>
+  </mc:AlternateContent>
 </p:sld>
 </file>
 
 <file path=ppt/slides/slide4.xml><?xml version="1.0" encoding="utf-8"?>
-<p:sld xmlns:a="http://schemas.openxmlformats.org/drawingml/2006/main" xmlns:p="http://schemas.openxmlformats.org/presentationml/2006/main" xmlns:r="http://schemas.openxmlformats.org/officeDocument/2006/relationships">
-  <p:cSld>
+<p:sld xmlns:a="http://schemas.openxmlformats.org/drawingml/2006/main" xmlns:r="http://schemas.openxmlformats.org/officeDocument/2006/relationships" xmlns:p="http://schemas.openxmlformats.org/presentationml/2006/main" xmlns:m="http://schemas.openxmlformats.org/officeDocument/2006/math" xmlns:w="http://schemas.openxmlformats.org/wordprocessingml/2006/main" xmlns:mc="http://schemas.openxmlformats.org/markup-compatibility/2006" showMasterPhAnim="0" showMasterSp="1" show="1">
+  <p:cSld name="">
     <p:spTree>
       <p:nvGrpSpPr>
         <p:cNvPr id="1" name=""/>
         <p:cNvGrpSpPr/>
         <p:nvPr/>
       </p:nvGrpSpPr>
-      <p:grpSpPr/>
-      <p:sp>
-        <p:nvSpPr>
-          <p:cNvPr id="2" name="Title 1"/>
+      <p:grpSpPr bwMode="auto">
+        <a:xfrm>
+          <a:off x="0" y="0"/>
+          <a:ext cx="0" cy="0"/>
+          <a:chOff x="0" y="0"/>
+          <a:chExt cx="0" cy="0"/>
+        </a:xfrm>
+      </p:grpSpPr>
+      <p:sp>
+        <p:nvSpPr>
+          <p:cNvPr id="577220006" name="Title 1"/>
           <p:cNvSpPr>
             <a:spLocks noGrp="1"/>
           </p:cNvSpPr>
@@ -3690,20 +5048,25 @@
             <p:ph type="title"/>
           </p:nvPr>
         </p:nvSpPr>
-        <p:spPr/>
-        <p:txBody>
-          <a:bodyPr/>
-          <a:lstStyle/>
-          <a:p>
-            <a:r>
+        <p:spPr bwMode="auto"/>
+        <p:txBody>
+          <a:bodyPr/>
+          <a:lstStyle/>
+          <a:p>
+            <a:pPr>
+              <a:defRPr/>
+            </a:pPr>
+            <a:r>
+              <a:rPr/>
               <a:t>Alur Pengajuan</a:t>
             </a:r>
-          </a:p>
-        </p:txBody>
-      </p:sp>
-      <p:sp>
-        <p:nvSpPr>
-          <p:cNvPr id="3" name="Content Placeholder 2"/>
+            <a:endParaRPr/>
+          </a:p>
+        </p:txBody>
+      </p:sp>
+      <p:sp>
+        <p:nvSpPr>
+          <p:cNvPr id="637863560" name="Content Placeholder 2"/>
           <p:cNvSpPr>
             <a:spLocks noGrp="1"/>
           </p:cNvSpPr>
@@ -3711,38 +5074,49 @@
             <p:ph idx="1"/>
           </p:nvPr>
         </p:nvSpPr>
-        <p:spPr/>
-        <p:txBody>
-          <a:bodyPr/>
-          <a:lstStyle/>
-          <a:p>
-            <a:r>
+        <p:spPr bwMode="auto"/>
+        <p:txBody>
+          <a:bodyPr/>
+          <a:lstStyle/>
+          <a:p>
+            <a:pPr>
+              <a:defRPr/>
+            </a:pPr>
+            <a:r>
+              <a:rPr/>
               <a:t>1. Analis mengisi data debitur, usaha, cashflow, neraca, dan agunan.</a:t>
             </a:r>
+            <a:endParaRPr/>
           </a:p>
           <a:p>
             <a:pPr>
               <a:defRPr sz="1800"/>
             </a:pPr>
             <a:r>
+              <a:rPr/>
               <a:t>2. Data disimpan ke tabel pengajuan_kredit, analisa_neraca, assessment_kepatuhan, dan jaminan_.</a:t>
             </a:r>
+            <a:endParaRPr/>
           </a:p>
           <a:p>
             <a:pPr>
               <a:defRPr sz="1800"/>
             </a:pPr>
             <a:r>
+              <a:rPr/>
               <a:t>3. Status berubah menjadi diajukan / proses, dan sistem mengarahkan ke tahap approval berikutnya.</a:t>
             </a:r>
+            <a:endParaRPr/>
           </a:p>
           <a:p>
             <a:pPr>
               <a:defRPr sz="1800"/>
             </a:pPr>
             <a:r>
+              <a:rPr/>
               <a:t>4. Jika ada role tidak aktif, sistem auto-skip ke role berikutnya.</a:t>
             </a:r>
+            <a:endParaRPr/>
           </a:p>
         </p:txBody>
       </p:sp>
@@ -3751,22 +5125,37 @@
   <p:clrMapOvr>
     <a:masterClrMapping/>
   </p:clrMapOvr>
+  <mc:AlternateContent xmlns:mc="http://schemas.openxmlformats.org/markup-compatibility/2006">
+    <mc:Choice xmlns:p159="http://schemas.microsoft.com/office/powerpoint/2015/09/main" xmlns:p14="http://schemas.microsoft.com/office/powerpoint/2010/main" Requires="p159">
+      <p:transition p14:dur="500" advClick="1"/>
+    </mc:Choice>
+    <mc:Fallback>
+      <p:transition advClick="1"/>
+    </mc:Fallback>
+  </mc:AlternateContent>
 </p:sld>
 </file>
 
 <file path=ppt/slides/slide5.xml><?xml version="1.0" encoding="utf-8"?>
-<p:sld xmlns:a="http://schemas.openxmlformats.org/drawingml/2006/main" xmlns:p="http://schemas.openxmlformats.org/presentationml/2006/main" xmlns:r="http://schemas.openxmlformats.org/officeDocument/2006/relationships">
-  <p:cSld>
+<p:sld xmlns:a="http://schemas.openxmlformats.org/drawingml/2006/main" xmlns:r="http://schemas.openxmlformats.org/officeDocument/2006/relationships" xmlns:p="http://schemas.openxmlformats.org/presentationml/2006/main" xmlns:m="http://schemas.openxmlformats.org/officeDocument/2006/math" xmlns:w="http://schemas.openxmlformats.org/wordprocessingml/2006/main" xmlns:mc="http://schemas.openxmlformats.org/markup-compatibility/2006" showMasterPhAnim="0" showMasterSp="1" show="1">
+  <p:cSld name="">
     <p:spTree>
       <p:nvGrpSpPr>
         <p:cNvPr id="1" name=""/>
         <p:cNvGrpSpPr/>
         <p:nvPr/>
       </p:nvGrpSpPr>
-      <p:grpSpPr/>
-      <p:sp>
-        <p:nvSpPr>
-          <p:cNvPr id="2" name="Title 1"/>
+      <p:grpSpPr bwMode="auto">
+        <a:xfrm>
+          <a:off x="0" y="0"/>
+          <a:ext cx="0" cy="0"/>
+          <a:chOff x="0" y="0"/>
+          <a:chExt cx="0" cy="0"/>
+        </a:xfrm>
+      </p:grpSpPr>
+      <p:sp>
+        <p:nvSpPr>
+          <p:cNvPr id="678989983" name="Title 1"/>
           <p:cNvSpPr>
             <a:spLocks noGrp="1"/>
           </p:cNvSpPr>
@@ -3774,20 +5163,25 @@
             <p:ph type="title"/>
           </p:nvPr>
         </p:nvSpPr>
-        <p:spPr/>
-        <p:txBody>
-          <a:bodyPr/>
-          <a:lstStyle/>
-          <a:p>
-            <a:r>
+        <p:spPr bwMode="auto"/>
+        <p:txBody>
+          <a:bodyPr/>
+          <a:lstStyle/>
+          <a:p>
+            <a:pPr>
+              <a:defRPr/>
+            </a:pPr>
+            <a:r>
+              <a:rPr/>
               <a:t>Approval Chain</a:t>
             </a:r>
-          </a:p>
-        </p:txBody>
-      </p:sp>
-      <p:sp>
-        <p:nvSpPr>
-          <p:cNvPr id="3" name="Content Placeholder 2"/>
+            <a:endParaRPr/>
+          </a:p>
+        </p:txBody>
+      </p:sp>
+      <p:sp>
+        <p:nvSpPr>
+          <p:cNvPr id="735548972" name="Content Placeholder 2"/>
           <p:cNvSpPr>
             <a:spLocks noGrp="1"/>
           </p:cNvSpPr>
@@ -3795,30 +5189,39 @@
             <p:ph idx="1"/>
           </p:nvPr>
         </p:nvSpPr>
-        <p:spPr/>
-        <p:txBody>
-          <a:bodyPr/>
-          <a:lstStyle/>
-          <a:p>
-            <a:r>
+        <p:spPr bwMode="auto"/>
+        <p:txBody>
+          <a:bodyPr/>
+          <a:lstStyle/>
+          <a:p>
+            <a:pPr>
+              <a:defRPr/>
+            </a:pPr>
+            <a:r>
+              <a:rPr/>
               <a:t>Alur default: Analis → Kasubag Analis → Kabag Kredit → Kadiv Bisnis → Direktur Utama.</a:t>
             </a:r>
+            <a:endParaRPr/>
           </a:p>
           <a:p>
             <a:pPr>
               <a:defRPr sz="1800"/>
             </a:pPr>
             <a:r>
+              <a:rPr/>
               <a:t>Setiap role memiliki halaman kerja khusus untuk melihat pengajuan berdasarkan posisi_saat_ini.</a:t>
             </a:r>
+            <a:endParaRPr/>
           </a:p>
           <a:p>
             <a:pPr>
               <a:defRPr sz="1800"/>
             </a:pPr>
             <a:r>
+              <a:rPr/>
               <a:t>Approval dicatat di tabel approval_kredit sebagai audit trail.</a:t>
             </a:r>
+            <a:endParaRPr/>
           </a:p>
         </p:txBody>
       </p:sp>
@@ -3827,22 +5230,37 @@
   <p:clrMapOvr>
     <a:masterClrMapping/>
   </p:clrMapOvr>
+  <mc:AlternateContent xmlns:mc="http://schemas.openxmlformats.org/markup-compatibility/2006">
+    <mc:Choice xmlns:p159="http://schemas.microsoft.com/office/powerpoint/2015/09/main" xmlns:p14="http://schemas.microsoft.com/office/powerpoint/2010/main" Requires="p159">
+      <p:transition p14:dur="500" advClick="1"/>
+    </mc:Choice>
+    <mc:Fallback>
+      <p:transition advClick="1"/>
+    </mc:Fallback>
+  </mc:AlternateContent>
 </p:sld>
 </file>
 
 <file path=ppt/slides/slide6.xml><?xml version="1.0" encoding="utf-8"?>
-<p:sld xmlns:a="http://schemas.openxmlformats.org/drawingml/2006/main" xmlns:p="http://schemas.openxmlformats.org/presentationml/2006/main" xmlns:r="http://schemas.openxmlformats.org/officeDocument/2006/relationships">
-  <p:cSld>
+<p:sld xmlns:a="http://schemas.openxmlformats.org/drawingml/2006/main" xmlns:r="http://schemas.openxmlformats.org/officeDocument/2006/relationships" xmlns:p="http://schemas.openxmlformats.org/presentationml/2006/main" xmlns:m="http://schemas.openxmlformats.org/officeDocument/2006/math" xmlns:w="http://schemas.openxmlformats.org/wordprocessingml/2006/main" xmlns:mc="http://schemas.openxmlformats.org/markup-compatibility/2006" showMasterPhAnim="0" showMasterSp="1" show="1">
+  <p:cSld name="">
     <p:spTree>
       <p:nvGrpSpPr>
         <p:cNvPr id="1" name=""/>
         <p:cNvGrpSpPr/>
         <p:nvPr/>
       </p:nvGrpSpPr>
-      <p:grpSpPr/>
-      <p:sp>
-        <p:nvSpPr>
-          <p:cNvPr id="2" name="Title 1"/>
+      <p:grpSpPr bwMode="auto">
+        <a:xfrm>
+          <a:off x="0" y="0"/>
+          <a:ext cx="0" cy="0"/>
+          <a:chOff x="0" y="0"/>
+          <a:chExt cx="0" cy="0"/>
+        </a:xfrm>
+      </p:grpSpPr>
+      <p:sp>
+        <p:nvSpPr>
+          <p:cNvPr id="315779972" name="Title 1"/>
           <p:cNvSpPr>
             <a:spLocks noGrp="1"/>
           </p:cNvSpPr>
@@ -3850,20 +5268,25 @@
             <p:ph type="title"/>
           </p:nvPr>
         </p:nvSpPr>
-        <p:spPr/>
-        <p:txBody>
-          <a:bodyPr/>
-          <a:lstStyle/>
-          <a:p>
-            <a:r>
+        <p:spPr bwMode="auto"/>
+        <p:txBody>
+          <a:bodyPr/>
+          <a:lstStyle/>
+          <a:p>
+            <a:pPr>
+              <a:defRPr/>
+            </a:pPr>
+            <a:r>
+              <a:rPr/>
               <a:t>Revisi &amp; Tolak</a:t>
             </a:r>
-          </a:p>
-        </p:txBody>
-      </p:sp>
-      <p:sp>
-        <p:nvSpPr>
-          <p:cNvPr id="3" name="Content Placeholder 2"/>
+            <a:endParaRPr/>
+          </a:p>
+        </p:txBody>
+      </p:sp>
+      <p:sp>
+        <p:nvSpPr>
+          <p:cNvPr id="810548853" name="Content Placeholder 2"/>
           <p:cNvSpPr>
             <a:spLocks noGrp="1"/>
           </p:cNvSpPr>
@@ -3871,30 +5294,39 @@
             <p:ph idx="1"/>
           </p:nvPr>
         </p:nvSpPr>
-        <p:spPr/>
-        <p:txBody>
-          <a:bodyPr/>
-          <a:lstStyle/>
-          <a:p>
-            <a:r>
+        <p:spPr bwMode="auto"/>
+        <p:txBody>
+          <a:bodyPr/>
+          <a:lstStyle/>
+          <a:p>
+            <a:pPr>
+              <a:defRPr/>
+            </a:pPr>
+            <a:r>
+              <a:rPr/>
               <a:t>Setuju: lanjut ke stage berikutnya atau selesai jika akhir chain.</a:t>
             </a:r>
+            <a:endParaRPr/>
           </a:p>
           <a:p>
             <a:pPr>
               <a:defRPr sz="1800"/>
             </a:pPr>
             <a:r>
+              <a:rPr/>
               <a:t>Revisi: kembali ke analis, catatan revisi disimpan, analis dapat perbaiki dan submit ulang.</a:t>
             </a:r>
+            <a:endParaRPr/>
           </a:p>
           <a:p>
             <a:pPr>
               <a:defRPr sz="1800"/>
             </a:pPr>
             <a:r>
+              <a:rPr/>
               <a:t>Tolak: status ditolak, analis dapat lihat alasan dan lakukan pengajuan ulang jika perlu.</a:t>
             </a:r>
+            <a:endParaRPr/>
           </a:p>
         </p:txBody>
       </p:sp>
@@ -3903,22 +5335,37 @@
   <p:clrMapOvr>
     <a:masterClrMapping/>
   </p:clrMapOvr>
+  <mc:AlternateContent xmlns:mc="http://schemas.openxmlformats.org/markup-compatibility/2006">
+    <mc:Choice xmlns:p159="http://schemas.microsoft.com/office/powerpoint/2015/09/main" xmlns:p14="http://schemas.microsoft.com/office/powerpoint/2010/main" Requires="p159">
+      <p:transition p14:dur="500" advClick="1"/>
+    </mc:Choice>
+    <mc:Fallback>
+      <p:transition advClick="1"/>
+    </mc:Fallback>
+  </mc:AlternateContent>
 </p:sld>
 </file>
 
 <file path=ppt/slides/slide7.xml><?xml version="1.0" encoding="utf-8"?>
-<p:sld xmlns:a="http://schemas.openxmlformats.org/drawingml/2006/main" xmlns:p="http://schemas.openxmlformats.org/presentationml/2006/main" xmlns:r="http://schemas.openxmlformats.org/officeDocument/2006/relationships">
-  <p:cSld>
+<p:sld xmlns:a="http://schemas.openxmlformats.org/drawingml/2006/main" xmlns:r="http://schemas.openxmlformats.org/officeDocument/2006/relationships" xmlns:p="http://schemas.openxmlformats.org/presentationml/2006/main" xmlns:m="http://schemas.openxmlformats.org/officeDocument/2006/math" xmlns:w="http://schemas.openxmlformats.org/wordprocessingml/2006/main" xmlns:mc="http://schemas.openxmlformats.org/markup-compatibility/2006" showMasterPhAnim="0" showMasterSp="1" show="1">
+  <p:cSld name="">
     <p:spTree>
       <p:nvGrpSpPr>
         <p:cNvPr id="1" name=""/>
         <p:cNvGrpSpPr/>
         <p:nvPr/>
       </p:nvGrpSpPr>
-      <p:grpSpPr/>
-      <p:sp>
-        <p:nvSpPr>
-          <p:cNvPr id="2" name="Title 1"/>
+      <p:grpSpPr bwMode="auto">
+        <a:xfrm>
+          <a:off x="0" y="0"/>
+          <a:ext cx="0" cy="0"/>
+          <a:chOff x="0" y="0"/>
+          <a:chExt cx="0" cy="0"/>
+        </a:xfrm>
+      </p:grpSpPr>
+      <p:sp>
+        <p:nvSpPr>
+          <p:cNvPr id="390038110" name="Title 1"/>
           <p:cNvSpPr>
             <a:spLocks noGrp="1"/>
           </p:cNvSpPr>
@@ -3926,20 +5373,25 @@
             <p:ph type="title"/>
           </p:nvPr>
         </p:nvSpPr>
-        <p:spPr/>
-        <p:txBody>
-          <a:bodyPr/>
-          <a:lstStyle/>
-          <a:p>
-            <a:r>
+        <p:spPr bwMode="auto"/>
+        <p:txBody>
+          <a:bodyPr/>
+          <a:lstStyle/>
+          <a:p>
+            <a:pPr>
+              <a:defRPr/>
+            </a:pPr>
+            <a:r>
+              <a:rPr/>
               <a:t>Nilai Bisnis</a:t>
             </a:r>
-          </a:p>
-        </p:txBody>
-      </p:sp>
-      <p:sp>
-        <p:nvSpPr>
-          <p:cNvPr id="3" name="Content Placeholder 2"/>
+            <a:endParaRPr/>
+          </a:p>
+        </p:txBody>
+      </p:sp>
+      <p:sp>
+        <p:nvSpPr>
+          <p:cNvPr id="1038292378" name="Content Placeholder 2"/>
           <p:cNvSpPr>
             <a:spLocks noGrp="1"/>
           </p:cNvSpPr>
@@ -3947,30 +5399,39 @@
             <p:ph idx="1"/>
           </p:nvPr>
         </p:nvSpPr>
-        <p:spPr/>
-        <p:txBody>
-          <a:bodyPr/>
-          <a:lstStyle/>
-          <a:p>
-            <a:r>
+        <p:spPr bwMode="auto"/>
+        <p:txBody>
+          <a:bodyPr/>
+          <a:lstStyle/>
+          <a:p>
+            <a:pPr>
+              <a:defRPr/>
+            </a:pPr>
+            <a:r>
+              <a:rPr/>
               <a:t>Sistem mempercepat keputusan untuk kredit &lt; 500 juta dengan berhenti di Kadiv Bisnis.</a:t>
             </a:r>
+            <a:endParaRPr/>
           </a:p>
           <a:p>
             <a:pPr>
               <a:defRPr sz="1800"/>
             </a:pPr>
             <a:r>
+              <a:rPr/>
               <a:t>Kredit ≥ 500 juta memerlukan approval final dari Direktur Utama.</a:t>
             </a:r>
+            <a:endParaRPr/>
           </a:p>
           <a:p>
             <a:pPr>
               <a:defRPr sz="1800"/>
             </a:pPr>
             <a:r>
+              <a:rPr/>
               <a:t>Model ini menjaga keseimbangan antara efisiensi dan kontrol risiko.</a:t>
             </a:r>
+            <a:endParaRPr/>
           </a:p>
         </p:txBody>
       </p:sp>
@@ -3979,46 +5440,44 @@
   <p:clrMapOvr>
     <a:masterClrMapping/>
   </p:clrMapOvr>
+  <mc:AlternateContent xmlns:mc="http://schemas.openxmlformats.org/markup-compatibility/2006">
+    <mc:Choice xmlns:p159="http://schemas.microsoft.com/office/powerpoint/2015/09/main" xmlns:p14="http://schemas.microsoft.com/office/powerpoint/2010/main" Requires="p159">
+      <p:transition p14:dur="500" advClick="1"/>
+    </mc:Choice>
+    <mc:Fallback>
+      <p:transition advClick="1"/>
+    </mc:Fallback>
+  </mc:AlternateContent>
 </p:sld>
 </file>
 
 <file path=ppt/slides/slide8.xml><?xml version="1.0" encoding="utf-8"?>
-<p:sld xmlns:a="http://schemas.openxmlformats.org/drawingml/2006/main" xmlns:p="http://schemas.openxmlformats.org/presentationml/2006/main" xmlns:r="http://schemas.openxmlformats.org/officeDocument/2006/relationships">
-  <p:cSld>
+<p:sld xmlns:a="http://schemas.openxmlformats.org/drawingml/2006/main" xmlns:r="http://schemas.openxmlformats.org/officeDocument/2006/relationships" xmlns:p="http://schemas.openxmlformats.org/presentationml/2006/main" xmlns:m="http://schemas.openxmlformats.org/officeDocument/2006/math" xmlns:w="http://schemas.openxmlformats.org/wordprocessingml/2006/main" xmlns:mc="http://schemas.openxmlformats.org/markup-compatibility/2006" showMasterPhAnim="0" showMasterSp="1" show="1">
+  <p:cSld name="">
     <p:spTree>
       <p:nvGrpSpPr>
         <p:cNvPr id="1" name=""/>
         <p:cNvGrpSpPr/>
         <p:nvPr/>
       </p:nvGrpSpPr>
-      <p:grpSpPr/>
-      <p:sp>
-        <p:nvSpPr>
-          <p:cNvPr id="2" name="Title 1"/>
-          <p:cNvSpPr>
-            <a:spLocks noGrp="1"/>
-          </p:cNvSpPr>
-          <p:nvPr>
-            <p:ph type="title"/>
-          </p:nvPr>
-        </p:nvSpPr>
-        <p:spPr/>
-        <p:txBody>
-          <a:bodyPr/>
-          <a:lstStyle/>
-          <a:p/>
-        </p:txBody>
-      </p:sp>
-      <p:sp>
-        <p:nvSpPr>
-          <p:cNvPr id="3" name="TextBox 2"/>
+      <p:grpSpPr bwMode="auto">
+        <a:xfrm>
+          <a:off x="0" y="0"/>
+          <a:ext cx="0" cy="0"/>
+          <a:chOff x="0" y="0"/>
+          <a:chExt cx="0" cy="0"/>
+        </a:xfrm>
+      </p:grpSpPr>
+      <p:sp>
+        <p:nvSpPr>
+          <p:cNvPr id="837272989" name="TextBox 2"/>
           <p:cNvSpPr txBox="1"/>
           <p:nvPr/>
         </p:nvSpPr>
-        <p:spPr>
+        <p:spPr bwMode="auto">
           <a:xfrm>
-            <a:off x="457200" y="182880"/>
-            <a:ext cx="8229600" cy="914400"/>
+            <a:off x="2756481" y="628002"/>
+            <a:ext cx="3631037" cy="579479"/>
           </a:xfrm>
           <a:prstGeom prst="rect">
             <a:avLst/>
@@ -4031,28 +5490,32 @@
           </a:bodyPr>
           <a:lstStyle/>
           <a:p>
-            <a:pPr>
+            <a:pPr algn="ctr">
               <a:defRPr sz="3200" b="1"/>
             </a:pPr>
             <a:r>
+              <a:rPr/>
               <a:t>Diagram Alur Sistem</a:t>
             </a:r>
-          </a:p>
-        </p:txBody>
-      </p:sp>
-      <p:sp>
-        <p:nvSpPr>
-          <p:cNvPr id="4" name="Rounded Rectangle 3"/>
+            <a:endParaRPr/>
+          </a:p>
+        </p:txBody>
+      </p:sp>
+      <p:sp>
+        <p:nvSpPr>
+          <p:cNvPr id="223612743" name="Rounded Rectangle 3"/>
           <p:cNvSpPr/>
           <p:nvPr/>
         </p:nvSpPr>
-        <p:spPr>
+        <p:spPr bwMode="auto">
           <a:xfrm>
-            <a:off x="365760" y="1371600"/>
+            <a:off x="168071" y="1910750"/>
             <a:ext cx="1645920" cy="777240"/>
           </a:xfrm>
           <a:prstGeom prst="roundRect">
-            <a:avLst/>
+            <a:avLst>
+              <a:gd name="adj" fmla="val 16667"/>
+            </a:avLst>
           </a:prstGeom>
           <a:solidFill>
             <a:srgbClr val="EBF8FF"/>
@@ -4085,24 +5548,32 @@
               <a:defRPr sz="1400" b="1"/>
             </a:pPr>
             <a:r>
+              <a:rPr>
+                <a:solidFill>
+                  <a:schemeClr val="tx1"/>
+                </a:solidFill>
+              </a:rPr>
               <a:t>Analis</a:t>
             </a:r>
-          </a:p>
-        </p:txBody>
-      </p:sp>
-      <p:sp>
-        <p:nvSpPr>
-          <p:cNvPr id="5" name="Rounded Rectangle 4"/>
+            <a:endParaRPr/>
+          </a:p>
+        </p:txBody>
+      </p:sp>
+      <p:sp>
+        <p:nvSpPr>
+          <p:cNvPr id="704991813" name="Rounded Rectangle 4"/>
           <p:cNvSpPr/>
           <p:nvPr/>
         </p:nvSpPr>
-        <p:spPr>
+        <p:spPr bwMode="auto">
           <a:xfrm>
-            <a:off x="2212848" y="1371600"/>
+            <a:off x="2033130" y="1910750"/>
             <a:ext cx="1645920" cy="777240"/>
           </a:xfrm>
           <a:prstGeom prst="roundRect">
-            <a:avLst/>
+            <a:avLst>
+              <a:gd name="adj" fmla="val 16667"/>
+            </a:avLst>
           </a:prstGeom>
           <a:solidFill>
             <a:srgbClr val="EBF8FF"/>
@@ -4135,24 +5606,32 @@
               <a:defRPr sz="1400" b="1"/>
             </a:pPr>
             <a:r>
+              <a:rPr>
+                <a:solidFill>
+                  <a:schemeClr val="tx1"/>
+                </a:solidFill>
+              </a:rPr>
               <a:t>Kasubag Analis</a:t>
             </a:r>
-          </a:p>
-        </p:txBody>
-      </p:sp>
-      <p:sp>
-        <p:nvSpPr>
-          <p:cNvPr id="6" name="Rounded Rectangle 5"/>
+            <a:endParaRPr/>
+          </a:p>
+        </p:txBody>
+      </p:sp>
+      <p:sp>
+        <p:nvSpPr>
+          <p:cNvPr id="328767098" name="Rounded Rectangle 5"/>
           <p:cNvSpPr/>
           <p:nvPr/>
         </p:nvSpPr>
-        <p:spPr>
+        <p:spPr bwMode="auto">
           <a:xfrm>
-            <a:off x="4059936" y="1371600"/>
+            <a:off x="3880218" y="1910750"/>
             <a:ext cx="1645920" cy="777240"/>
           </a:xfrm>
           <a:prstGeom prst="roundRect">
-            <a:avLst/>
+            <a:avLst>
+              <a:gd name="adj" fmla="val 16667"/>
+            </a:avLst>
           </a:prstGeom>
           <a:solidFill>
             <a:srgbClr val="EBF8FF"/>
@@ -4185,24 +5664,32 @@
               <a:defRPr sz="1400" b="1"/>
             </a:pPr>
             <a:r>
+              <a:rPr>
+                <a:solidFill>
+                  <a:schemeClr val="tx1"/>
+                </a:solidFill>
+              </a:rPr>
               <a:t>Kabag Kredit</a:t>
             </a:r>
-          </a:p>
-        </p:txBody>
-      </p:sp>
-      <p:sp>
-        <p:nvSpPr>
-          <p:cNvPr id="7" name="Rounded Rectangle 6"/>
+            <a:endParaRPr/>
+          </a:p>
+        </p:txBody>
+      </p:sp>
+      <p:sp>
+        <p:nvSpPr>
+          <p:cNvPr id="1318382110" name="Rounded Rectangle 6"/>
           <p:cNvSpPr/>
           <p:nvPr/>
         </p:nvSpPr>
-        <p:spPr>
+        <p:spPr bwMode="auto">
           <a:xfrm>
-            <a:off x="5907024" y="1371600"/>
+            <a:off x="5762301" y="1910750"/>
             <a:ext cx="1645920" cy="777240"/>
           </a:xfrm>
           <a:prstGeom prst="roundRect">
-            <a:avLst/>
+            <a:avLst>
+              <a:gd name="adj" fmla="val 16667"/>
+            </a:avLst>
           </a:prstGeom>
           <a:solidFill>
             <a:srgbClr val="EBF8FF"/>
@@ -4235,24 +5722,32 @@
               <a:defRPr sz="1400" b="1"/>
             </a:pPr>
             <a:r>
+              <a:rPr>
+                <a:solidFill>
+                  <a:schemeClr val="tx1"/>
+                </a:solidFill>
+              </a:rPr>
               <a:t>Kadiv Bisnis</a:t>
             </a:r>
-          </a:p>
-        </p:txBody>
-      </p:sp>
-      <p:sp>
-        <p:nvSpPr>
-          <p:cNvPr id="8" name="Rounded Rectangle 7"/>
+            <a:endParaRPr/>
+          </a:p>
+        </p:txBody>
+      </p:sp>
+      <p:sp>
+        <p:nvSpPr>
+          <p:cNvPr id="88273557" name="Rounded Rectangle 7"/>
           <p:cNvSpPr/>
           <p:nvPr/>
         </p:nvSpPr>
-        <p:spPr>
-          <a:xfrm>
-            <a:off x="7754112" y="1371600"/>
-            <a:ext cx="1645920" cy="777240"/>
+        <p:spPr bwMode="auto">
+          <a:xfrm flipH="0" flipV="0">
+            <a:off x="7574394" y="1910750"/>
+            <a:ext cx="1503151" cy="777240"/>
           </a:xfrm>
           <a:prstGeom prst="roundRect">
-            <a:avLst/>
+            <a:avLst>
+              <a:gd name="adj" fmla="val 16667"/>
+            </a:avLst>
           </a:prstGeom>
           <a:solidFill>
             <a:srgbClr val="EBF8FF"/>
@@ -4285,21 +5780,27 @@
               <a:defRPr sz="1400" b="1"/>
             </a:pPr>
             <a:r>
+              <a:rPr>
+                <a:solidFill>
+                  <a:schemeClr val="tx1"/>
+                </a:solidFill>
+              </a:rPr>
               <a:t>Direktur Utama</a:t>
             </a:r>
+            <a:endParaRPr/>
           </a:p>
         </p:txBody>
       </p:sp>
       <p:cxnSp>
         <p:nvCxnSpPr>
-          <p:cNvPr id="9" name="Connector 8"/>
+          <p:cNvPr id="1850094102" name="Connector 8"/>
           <p:cNvCxnSpPr/>
           <p:nvPr/>
         </p:nvCxnSpPr>
-        <p:spPr>
+        <p:spPr bwMode="auto">
           <a:xfrm>
-            <a:off x="2185416" y="1760220.0"/>
-            <a:ext cx="201168" cy="0.0"/>
+            <a:off x="1825981" y="2389229"/>
+            <a:ext cx="201168" cy="0"/>
           </a:xfrm>
           <a:prstGeom prst="line">
             <a:avLst/>
@@ -4327,14 +5828,14 @@
       </p:cxnSp>
       <p:cxnSp>
         <p:nvCxnSpPr>
-          <p:cNvPr id="10" name="Connector 9"/>
+          <p:cNvPr id="76355866" name="Connector 9"/>
           <p:cNvCxnSpPr/>
           <p:nvPr/>
         </p:nvCxnSpPr>
-        <p:spPr>
+        <p:spPr bwMode="auto">
           <a:xfrm>
-            <a:off x="4032504" y="1760220.0"/>
-            <a:ext cx="201168" cy="0.0"/>
+            <a:off x="3673069" y="2299370"/>
+            <a:ext cx="201168" cy="0"/>
           </a:xfrm>
           <a:prstGeom prst="line">
             <a:avLst/>
@@ -4362,14 +5863,14 @@
       </p:cxnSp>
       <p:cxnSp>
         <p:nvCxnSpPr>
-          <p:cNvPr id="11" name="Connector 10"/>
+          <p:cNvPr id="80576792" name="Connector 10"/>
           <p:cNvCxnSpPr/>
           <p:nvPr/>
         </p:nvCxnSpPr>
-        <p:spPr>
+        <p:spPr bwMode="auto">
           <a:xfrm>
-            <a:off x="5879592" y="1760220.0"/>
-            <a:ext cx="201168" cy="0.0"/>
+            <a:off x="5520157" y="2299370"/>
+            <a:ext cx="201168" cy="0"/>
           </a:xfrm>
           <a:prstGeom prst="line">
             <a:avLst/>
@@ -4397,14 +5898,16 @@
       </p:cxnSp>
       <p:cxnSp>
         <p:nvCxnSpPr>
-          <p:cNvPr id="12" name="Connector 11"/>
-          <p:cNvCxnSpPr/>
+          <p:cNvPr id="1139476757" name="Connector 11"/>
+          <p:cNvCxnSpPr>
+            <a:stCxn id="1318382110" idx="3"/>
+          </p:cNvCxnSpPr>
           <p:nvPr/>
         </p:nvCxnSpPr>
-        <p:spPr>
-          <a:xfrm>
-            <a:off x="7726680" y="1760220.0"/>
-            <a:ext cx="201168" cy="0.0"/>
+        <p:spPr bwMode="auto">
+          <a:xfrm rot="0" flipH="0" flipV="0">
+            <a:off x="7408221" y="2299370"/>
+            <a:ext cx="160192" cy="0"/>
           </a:xfrm>
           <a:prstGeom prst="line">
             <a:avLst/>
@@ -4432,14 +5935,14 @@
       </p:cxnSp>
       <p:sp>
         <p:nvSpPr>
-          <p:cNvPr id="13" name="TextBox 12"/>
+          <p:cNvPr id="1106078317" name="TextBox 12"/>
           <p:cNvSpPr txBox="1"/>
           <p:nvPr/>
         </p:nvSpPr>
-        <p:spPr>
+        <p:spPr bwMode="auto">
           <a:xfrm>
             <a:off x="457200" y="3291840"/>
-            <a:ext cx="8229600" cy="1097280"/>
+            <a:ext cx="7224278" cy="579479"/>
           </a:xfrm>
           <a:prstGeom prst="rect">
             <a:avLst/>
@@ -4456,26 +5959,40 @@
               <a:defRPr sz="1600"/>
             </a:pPr>
             <a:r>
-              <a:t>Pengajuan kredit diproses secara berjenjang dengan auto-skip jika jabatan tidak aktif, dan routing nominal &lt; 500 juta berhenti di Kadiv Bisnis.</a:t>
-            </a:r>
-          </a:p>
-        </p:txBody>
-      </p:sp>
-      <p:sp>
-        <p:nvSpPr>
-          <p:cNvPr id="14" name="Rounded Rectangle 13">
-            <a:hlinkClick action="ppaction://hlinksldjump" r:id="rId2"/>
+              <a:rPr/>
+              <a:t>Pengajuan kredit diproses secara berjenjang dengan auto-skip jika jabatan tidak aktif, </a:t>
+            </a:r>
+            <a:endParaRPr/>
+          </a:p>
+          <a:p>
+            <a:pPr algn="l">
+              <a:defRPr sz="1600"/>
+            </a:pPr>
+            <a:r>
+              <a:rPr/>
+              <a:t>dan routing nominal &lt; 500 juta berhenti di Kadiv Bisnis.</a:t>
+            </a:r>
+            <a:endParaRPr/>
+          </a:p>
+        </p:txBody>
+      </p:sp>
+      <p:sp>
+        <p:nvSpPr>
+          <p:cNvPr id="800630069" name="Rounded Rectangle 13">
+            <a:hlinkClick r:id="rId3" action="ppaction://hlinksldjump"/>
           </p:cNvPr>
           <p:cNvSpPr/>
           <p:nvPr/>
         </p:nvSpPr>
-        <p:spPr>
+        <p:spPr bwMode="auto">
           <a:xfrm>
             <a:off x="6583680" y="5303520"/>
             <a:ext cx="1828800" cy="548640"/>
           </a:xfrm>
           <a:prstGeom prst="roundRect">
-            <a:avLst/>
+            <a:avLst>
+              <a:gd name="adj" fmla="val 16667"/>
+            </a:avLst>
           </a:prstGeom>
           <a:solidFill>
             <a:srgbClr val="3182CE"/>
@@ -4505,15 +6022,17 @@
           <a:lstStyle/>
           <a:p>
             <a:pPr algn="ctr">
-              <a:defRPr b="1" sz="1400">
+              <a:defRPr sz="1400" b="1">
                 <a:solidFill>
                   <a:srgbClr val="FFFFFF"/>
                 </a:solidFill>
               </a:defRPr>
             </a:pPr>
             <a:r>
+              <a:rPr/>
               <a:t>Kembali ke Menu</a:t>
             </a:r>
+            <a:endParaRPr/>
           </a:p>
         </p:txBody>
       </p:sp>
@@ -4522,11 +6041,19 @@
   <p:clrMapOvr>
     <a:masterClrMapping/>
   </p:clrMapOvr>
+  <mc:AlternateContent xmlns:mc="http://schemas.openxmlformats.org/markup-compatibility/2006">
+    <mc:Choice xmlns:p159="http://schemas.microsoft.com/office/powerpoint/2015/09/main" xmlns:p14="http://schemas.microsoft.com/office/powerpoint/2010/main" Requires="p159">
+      <p:transition p14:dur="500" advClick="1"/>
+    </mc:Choice>
+    <mc:Fallback>
+      <p:transition advClick="1"/>
+    </mc:Fallback>
+  </mc:AlternateContent>
 </p:sld>
 </file>
 
 <file path=ppt/theme/theme1.xml><?xml version="1.0" encoding="utf-8"?>
-<a:theme xmlns:a="http://schemas.openxmlformats.org/drawingml/2006/main" name="Office Theme">
+<a:theme xmlns:a="http://schemas.openxmlformats.org/drawingml/2006/main" xmlns:r="http://schemas.openxmlformats.org/officeDocument/2006/relationships" xmlns:p="http://schemas.openxmlformats.org/presentationml/2006/main" name="Office Theme">
   <a:themeElements>
     <a:clrScheme name="Office">
       <a:dk1>
@@ -4569,73 +6096,13 @@
     <a:fontScheme name="Office">
       <a:majorFont>
         <a:latin typeface="Calibri"/>
-        <a:ea typeface=""/>
-        <a:cs typeface=""/>
-        <a:font script="Jpan" typeface="ＭＳ Ｐゴシック"/>
-        <a:font script="Hang" typeface="맑은 고딕"/>
-        <a:font script="Hans" typeface="宋体"/>
-        <a:font script="Hant" typeface="新細明體"/>
-        <a:font script="Arab" typeface="Times New Roman"/>
-        <a:font script="Hebr" typeface="Times New Roman"/>
-        <a:font script="Thai" typeface="Angsana New"/>
-        <a:font script="Ethi" typeface="Nyala"/>
-        <a:font script="Beng" typeface="Vrinda"/>
-        <a:font script="Gujr" typeface="Shruti"/>
-        <a:font script="Khmr" typeface="MoolBoran"/>
-        <a:font script="Knda" typeface="Tunga"/>
-        <a:font script="Guru" typeface="Raavi"/>
-        <a:font script="Cans" typeface="Euphemia"/>
-        <a:font script="Cher" typeface="Plantagenet Cherokee"/>
-        <a:font script="Yiii" typeface="Microsoft Yi Baiti"/>
-        <a:font script="Tibt" typeface="Microsoft Himalaya"/>
-        <a:font script="Thaa" typeface="MV Boli"/>
-        <a:font script="Deva" typeface="Mangal"/>
-        <a:font script="Telu" typeface="Gautami"/>
-        <a:font script="Taml" typeface="Latha"/>
-        <a:font script="Syrc" typeface="Estrangelo Edessa"/>
-        <a:font script="Orya" typeface="Kalinga"/>
-        <a:font script="Mlym" typeface="Kartika"/>
-        <a:font script="Laoo" typeface="DokChampa"/>
-        <a:font script="Sinh" typeface="Iskoola Pota"/>
-        <a:font script="Mong" typeface="Mongolian Baiti"/>
-        <a:font script="Viet" typeface="Times New Roman"/>
-        <a:font script="Uigh" typeface="Microsoft Uighur"/>
-        <a:font script="Geor" typeface="Sylfaen"/>
+        <a:ea typeface="Arial"/>
+        <a:cs typeface="Arial"/>
       </a:majorFont>
       <a:minorFont>
         <a:latin typeface="Calibri"/>
-        <a:ea typeface=""/>
-        <a:cs typeface=""/>
-        <a:font script="Jpan" typeface="ＭＳ Ｐゴシック"/>
-        <a:font script="Hang" typeface="맑은 고딕"/>
-        <a:font script="Hans" typeface="宋体"/>
-        <a:font script="Hant" typeface="新細明體"/>
-        <a:font script="Arab" typeface="Arial"/>
-        <a:font script="Hebr" typeface="Arial"/>
-        <a:font script="Thai" typeface="Cordia New"/>
-        <a:font script="Ethi" typeface="Nyala"/>
-        <a:font script="Beng" typeface="Vrinda"/>
-        <a:font script="Gujr" typeface="Shruti"/>
-        <a:font script="Khmr" typeface="DaunPenh"/>
-        <a:font script="Knda" typeface="Tunga"/>
-        <a:font script="Guru" typeface="Raavi"/>
-        <a:font script="Cans" typeface="Euphemia"/>
-        <a:font script="Cher" typeface="Plantagenet Cherokee"/>
-        <a:font script="Yiii" typeface="Microsoft Yi Baiti"/>
-        <a:font script="Tibt" typeface="Microsoft Himalaya"/>
-        <a:font script="Thaa" typeface="MV Boli"/>
-        <a:font script="Deva" typeface="Mangal"/>
-        <a:font script="Telu" typeface="Gautami"/>
-        <a:font script="Taml" typeface="Latha"/>
-        <a:font script="Syrc" typeface="Estrangelo Edessa"/>
-        <a:font script="Orya" typeface="Kalinga"/>
-        <a:font script="Mlym" typeface="Kartika"/>
-        <a:font script="Laoo" typeface="DokChampa"/>
-        <a:font script="Sinh" typeface="Iskoola Pota"/>
-        <a:font script="Mong" typeface="Mongolian Baiti"/>
-        <a:font script="Viet" typeface="Arial"/>
-        <a:font script="Uigh" typeface="Microsoft Uighur"/>
-        <a:font script="Geor" typeface="Sylfaen"/>
+        <a:ea typeface="Arial"/>
+        <a:cs typeface="Arial"/>
       </a:minorFont>
     </a:fontScheme>
     <a:fmtScheme name="Office">
@@ -4643,7 +6110,7 @@
         <a:solidFill>
           <a:schemeClr val="phClr"/>
         </a:solidFill>
-        <a:gradFill rotWithShape="1">
+        <a:gradFill>
           <a:gsLst>
             <a:gs pos="0">
               <a:schemeClr val="phClr">
@@ -4666,7 +6133,7 @@
           </a:gsLst>
           <a:lin ang="16200000" scaled="1"/>
         </a:gradFill>
-        <a:gradFill rotWithShape="1">
+        <a:gradFill>
           <a:gsLst>
             <a:gs pos="0">
               <a:schemeClr val="phClr">
@@ -4753,7 +6220,7 @@
         <a:solidFill>
           <a:schemeClr val="phClr"/>
         </a:solidFill>
-        <a:gradFill rotWithShape="1">
+        <a:gradFill>
           <a:gsLst>
             <a:gs pos="0">
               <a:schemeClr val="phClr">
@@ -4775,11 +6242,9 @@
               </a:schemeClr>
             </a:gs>
           </a:gsLst>
-          <a:path path="circle">
-            <a:fillToRect l="50000" t="-80000" r="50000" b="180000"/>
-          </a:path>
+          <a:path path="circle"/>
         </a:gradFill>
-        <a:gradFill rotWithShape="1">
+        <a:gradFill>
           <a:gsLst>
             <a:gs pos="0">
               <a:schemeClr val="phClr">
@@ -4794,16 +6259,14 @@
               </a:schemeClr>
             </a:gs>
           </a:gsLst>
-          <a:path path="circle">
-            <a:fillToRect l="50000" t="50000" r="50000" b="50000"/>
-          </a:path>
+          <a:path path="circle"/>
         </a:gradFill>
       </a:bgFillStyleLst>
     </a:fmtScheme>
   </a:themeElements>
   <a:objectDefaults>
     <a:spDef>
-      <a:spPr/>
+      <a:spPr bwMode="auto"/>
       <a:bodyPr/>
       <a:lstStyle/>
       <a:style>
@@ -4822,7 +6285,7 @@
       </a:style>
     </a:spDef>
     <a:lnDef>
-      <a:spPr/>
+      <a:spPr bwMode="auto"/>
       <a:bodyPr/>
       <a:lstStyle/>
       <a:style>
@@ -4841,6 +6304,260 @@
       </a:style>
     </a:lnDef>
   </a:objectDefaults>
-  <a:extraClrSchemeLst/>
+</a:theme>
+</file>
+
+<file path=ppt/theme/theme2.xml><?xml version="1.0" encoding="utf-8"?>
+<a:theme xmlns:a="http://schemas.openxmlformats.org/drawingml/2006/main" xmlns:r="http://schemas.openxmlformats.org/officeDocument/2006/relationships" xmlns:p="http://schemas.openxmlformats.org/presentationml/2006/main" name="Office Theme">
+  <a:themeElements>
+    <a:clrScheme name="Office">
+      <a:dk1>
+        <a:sysClr val="windowText" lastClr="000000"/>
+      </a:dk1>
+      <a:lt1>
+        <a:sysClr val="window" lastClr="FFFFFF"/>
+      </a:lt1>
+      <a:dk2>
+        <a:srgbClr val="1F497D"/>
+      </a:dk2>
+      <a:lt2>
+        <a:srgbClr val="EEECE1"/>
+      </a:lt2>
+      <a:accent1>
+        <a:srgbClr val="4F81BD"/>
+      </a:accent1>
+      <a:accent2>
+        <a:srgbClr val="C0504D"/>
+      </a:accent2>
+      <a:accent3>
+        <a:srgbClr val="9BBB59"/>
+      </a:accent3>
+      <a:accent4>
+        <a:srgbClr val="8064A2"/>
+      </a:accent4>
+      <a:accent5>
+        <a:srgbClr val="4BACC6"/>
+      </a:accent5>
+      <a:accent6>
+        <a:srgbClr val="F79646"/>
+      </a:accent6>
+      <a:hlink>
+        <a:srgbClr val="0000FF"/>
+      </a:hlink>
+      <a:folHlink>
+        <a:srgbClr val="800080"/>
+      </a:folHlink>
+    </a:clrScheme>
+    <a:fontScheme name="">
+      <a:majorFont>
+        <a:latin typeface="Calibri"/>
+        <a:ea typeface="Arial"/>
+        <a:cs typeface="Arial"/>
+      </a:majorFont>
+      <a:minorFont>
+        <a:latin typeface="Calibri"/>
+        <a:ea typeface="Arial"/>
+        <a:cs typeface="Arial"/>
+      </a:minorFont>
+    </a:fontScheme>
+    <a:fmtScheme name="Office">
+      <a:fillStyleLst>
+        <a:solidFill>
+          <a:schemeClr val="phClr"/>
+        </a:solidFill>
+        <a:gradFill>
+          <a:gsLst>
+            <a:gs pos="0">
+              <a:schemeClr val="phClr">
+                <a:tint val="50000"/>
+                <a:satMod val="300000"/>
+              </a:schemeClr>
+            </a:gs>
+            <a:gs pos="35000">
+              <a:schemeClr val="phClr">
+                <a:tint val="37000"/>
+                <a:satMod val="300000"/>
+              </a:schemeClr>
+            </a:gs>
+            <a:gs pos="100000">
+              <a:schemeClr val="phClr">
+                <a:tint val="15000"/>
+                <a:satMod val="350000"/>
+              </a:schemeClr>
+            </a:gs>
+          </a:gsLst>
+          <a:lin ang="16200000" scaled="1"/>
+        </a:gradFill>
+        <a:gradFill>
+          <a:gsLst>
+            <a:gs pos="0">
+              <a:schemeClr val="phClr">
+                <a:tint val="100000"/>
+                <a:shade val="100000"/>
+                <a:satMod val="130000"/>
+              </a:schemeClr>
+            </a:gs>
+            <a:gs pos="100000">
+              <a:schemeClr val="phClr">
+                <a:tint val="50000"/>
+                <a:shade val="100000"/>
+                <a:satMod val="350000"/>
+              </a:schemeClr>
+            </a:gs>
+          </a:gsLst>
+          <a:lin ang="16200000" scaled="0"/>
+        </a:gradFill>
+      </a:fillStyleLst>
+      <a:lnStyleLst>
+        <a:ln w="9525" cap="flat" cmpd="sng" algn="ctr">
+          <a:solidFill>
+            <a:schemeClr val="phClr">
+              <a:shade val="95000"/>
+              <a:satMod val="105000"/>
+            </a:schemeClr>
+          </a:solidFill>
+          <a:prstDash val="solid"/>
+        </a:ln>
+        <a:ln w="25400" cap="flat" cmpd="sng" algn="ctr">
+          <a:solidFill>
+            <a:schemeClr val="phClr"/>
+          </a:solidFill>
+          <a:prstDash val="solid"/>
+        </a:ln>
+        <a:ln w="38100" cap="flat" cmpd="sng" algn="ctr">
+          <a:solidFill>
+            <a:schemeClr val="phClr"/>
+          </a:solidFill>
+          <a:prstDash val="solid"/>
+        </a:ln>
+      </a:lnStyleLst>
+      <a:effectStyleLst>
+        <a:effectStyle>
+          <a:effectLst>
+            <a:outerShdw blurRad="40000" dist="20000" dir="5400000" rotWithShape="0">
+              <a:srgbClr val="000000">
+                <a:alpha val="38000"/>
+              </a:srgbClr>
+            </a:outerShdw>
+          </a:effectLst>
+        </a:effectStyle>
+        <a:effectStyle>
+          <a:effectLst>
+            <a:outerShdw blurRad="40000" dist="23000" dir="5400000" rotWithShape="0">
+              <a:srgbClr val="000000">
+                <a:alpha val="35000"/>
+              </a:srgbClr>
+            </a:outerShdw>
+          </a:effectLst>
+        </a:effectStyle>
+        <a:effectStyle>
+          <a:effectLst>
+            <a:outerShdw blurRad="40000" dist="23000" dir="5400000" rotWithShape="0">
+              <a:srgbClr val="000000">
+                <a:alpha val="35000"/>
+              </a:srgbClr>
+            </a:outerShdw>
+          </a:effectLst>
+          <a:scene3d>
+            <a:camera prst="orthographicFront">
+              <a:rot lat="0" lon="0" rev="0"/>
+            </a:camera>
+            <a:lightRig rig="threePt" dir="t">
+              <a:rot lat="0" lon="0" rev="1200000"/>
+            </a:lightRig>
+          </a:scene3d>
+          <a:sp3d>
+            <a:bevelT w="63500" h="25400"/>
+          </a:sp3d>
+        </a:effectStyle>
+      </a:effectStyleLst>
+      <a:bgFillStyleLst>
+        <a:solidFill>
+          <a:schemeClr val="phClr"/>
+        </a:solidFill>
+        <a:gradFill>
+          <a:gsLst>
+            <a:gs pos="0">
+              <a:schemeClr val="phClr">
+                <a:tint val="40000"/>
+                <a:satMod val="350000"/>
+              </a:schemeClr>
+            </a:gs>
+            <a:gs pos="40000">
+              <a:schemeClr val="phClr">
+                <a:tint val="45000"/>
+                <a:shade val="99000"/>
+                <a:satMod val="350000"/>
+              </a:schemeClr>
+            </a:gs>
+            <a:gs pos="100000">
+              <a:schemeClr val="phClr">
+                <a:shade val="20000"/>
+                <a:satMod val="255000"/>
+              </a:schemeClr>
+            </a:gs>
+          </a:gsLst>
+          <a:path path="circle"/>
+        </a:gradFill>
+        <a:gradFill>
+          <a:gsLst>
+            <a:gs pos="0">
+              <a:schemeClr val="phClr">
+                <a:tint val="80000"/>
+                <a:satMod val="300000"/>
+              </a:schemeClr>
+            </a:gs>
+            <a:gs pos="100000">
+              <a:schemeClr val="phClr">
+                <a:shade val="30000"/>
+                <a:satMod val="200000"/>
+              </a:schemeClr>
+            </a:gs>
+          </a:gsLst>
+          <a:path path="circle"/>
+        </a:gradFill>
+      </a:bgFillStyleLst>
+    </a:fmtScheme>
+  </a:themeElements>
+  <a:objectDefaults>
+    <a:spDef>
+      <a:spPr bwMode="auto"/>
+      <a:bodyPr/>
+      <a:lstStyle/>
+      <a:style>
+        <a:lnRef idx="1">
+          <a:schemeClr val="accent1"/>
+        </a:lnRef>
+        <a:fillRef idx="3">
+          <a:schemeClr val="accent1"/>
+        </a:fillRef>
+        <a:effectRef idx="2">
+          <a:schemeClr val="accent1"/>
+        </a:effectRef>
+        <a:fontRef idx="minor">
+          <a:schemeClr val="lt1"/>
+        </a:fontRef>
+      </a:style>
+    </a:spDef>
+    <a:lnDef>
+      <a:spPr bwMode="auto"/>
+      <a:bodyPr/>
+      <a:lstStyle/>
+      <a:style>
+        <a:lnRef idx="2">
+          <a:schemeClr val="accent1"/>
+        </a:lnRef>
+        <a:fillRef idx="0">
+          <a:schemeClr val="accent1"/>
+        </a:fillRef>
+        <a:effectRef idx="1">
+          <a:schemeClr val="accent1"/>
+        </a:effectRef>
+        <a:fontRef idx="minor">
+          <a:schemeClr val="tx1"/>
+        </a:fontRef>
+      </a:style>
+    </a:lnDef>
+  </a:objectDefaults>
 </a:theme>
 </file>